--- a/Capstone PPT Template.pptx
+++ b/Capstone PPT Template.pptx
@@ -2,20 +2,24 @@
 <file path=ppt/presentation.xml><?xml version="1.0" encoding="utf-8"?>
 <p:presentation xmlns:a="http://schemas.openxmlformats.org/drawingml/2006/main" xmlns:r="http://schemas.openxmlformats.org/officeDocument/2006/relationships" xmlns:p="http://schemas.openxmlformats.org/presentationml/2006/main" bookmarkIdSeed="2">
   <p:sldMasterIdLst>
-    <p:sldMasterId id="2147483660" r:id="rId1"/>
+    <p:sldMasterId id="2147483648" r:id="rId1"/>
   </p:sldMasterIdLst>
   <p:notesMasterIdLst>
-    <p:notesMasterId r:id="rId10"/>
+    <p:notesMasterId r:id="rId14"/>
   </p:notesMasterIdLst>
   <p:sldIdLst>
-    <p:sldId id="256" r:id="rId2"/>
-    <p:sldId id="714" r:id="rId3"/>
-    <p:sldId id="674" r:id="rId4"/>
-    <p:sldId id="713" r:id="rId5"/>
-    <p:sldId id="712" r:id="rId6"/>
-    <p:sldId id="676" r:id="rId7"/>
-    <p:sldId id="711" r:id="rId8"/>
-    <p:sldId id="303" r:id="rId9"/>
+    <p:sldId id="256" r:id="rId3"/>
+    <p:sldId id="714" r:id="rId4"/>
+    <p:sldId id="674" r:id="rId5"/>
+    <p:sldId id="715" r:id="rId6"/>
+    <p:sldId id="712" r:id="rId7"/>
+    <p:sldId id="716" r:id="rId8"/>
+    <p:sldId id="717" r:id="rId9"/>
+    <p:sldId id="718" r:id="rId10"/>
+    <p:sldId id="719" r:id="rId11"/>
+    <p:sldId id="720" r:id="rId18"/>
+    <p:sldId id="711" r:id="rId12"/>
+    <p:sldId id="303" r:id="rId13"/>
   </p:sldIdLst>
   <p:sldSz cx="12192000" cy="6858000"/>
   <p:notesSz cx="6858000" cy="9144000"/>
@@ -114,20 +118,7 @@
       </a:defRPr>
     </a:lvl9pPr>
   </p:defaultTextStyle>
-  <p:extLst>
-    <p:ext uri="{EFAFB233-063F-42B5-8137-9DF3F51BA10A}">
-      <p15:sldGuideLst xmlns:p15="http://schemas.microsoft.com/office/powerpoint/2012/main"/>
-    </p:ext>
-  </p:extLst>
 </p:presentation>
-</file>
-
-<file path=ppt/revisionInfo.xml><?xml version="1.0" encoding="utf-8"?>
-<p1510:revInfo xmlns:a="http://schemas.openxmlformats.org/drawingml/2006/main" xmlns:r="http://schemas.openxmlformats.org/officeDocument/2006/relationships" xmlns:p1510="http://schemas.microsoft.com/office/powerpoint/2015/10/main">
-  <p1510:revLst>
-    <p1510:client id="{8CCA8346-09F0-4301-B585-28E9403048AB}" v="218" dt="2023-11-21T11:40:02.768"/>
-  </p1510:revLst>
-</p1510:revInfo>
 </file>
 
 <file path=ppt/notesMasters/notesMaster1.xml><?xml version="1.0" encoding="utf-8"?>
@@ -212,7 +203,6 @@
           <a:p>
             <a:fld id="{C20077D8-B575-4753-B8FD-F5736649C91E}" type="datetimeFigureOut">
               <a:rPr lang="en-IN" smtClean="0"/>
-              <a:t>16-05-2026</a:t>
             </a:fld>
             <a:endParaRPr lang="en-IN" dirty="0"/>
           </a:p>
@@ -279,6 +269,7 @@
               <a:rPr lang="en-US"/>
               <a:t>Click to edit Master text styles</a:t>
             </a:r>
+            <a:endParaRPr lang="en-US"/>
           </a:p>
           <a:p>
             <a:pPr lvl="1"/>
@@ -286,6 +277,7 @@
               <a:rPr lang="en-US"/>
               <a:t>Second level</a:t>
             </a:r>
+            <a:endParaRPr lang="en-US"/>
           </a:p>
           <a:p>
             <a:pPr lvl="2"/>
@@ -293,6 +285,7 @@
               <a:rPr lang="en-US"/>
               <a:t>Third level</a:t>
             </a:r>
+            <a:endParaRPr lang="en-US"/>
           </a:p>
           <a:p>
             <a:pPr lvl="3"/>
@@ -300,6 +293,7 @@
               <a:rPr lang="en-US"/>
               <a:t>Fourth level</a:t>
             </a:r>
+            <a:endParaRPr lang="en-US"/>
           </a:p>
           <a:p>
             <a:pPr lvl="4"/>
@@ -371,18 +365,12 @@
           <a:p>
             <a:fld id="{47FFB008-8E38-46F5-BCB9-8CFEF233CF3A}" type="slidenum">
               <a:rPr lang="en-IN" smtClean="0"/>
-              <a:t>‹#›</a:t>
             </a:fld>
             <a:endParaRPr lang="en-IN" dirty="0"/>
           </a:p>
         </p:txBody>
       </p:sp>
     </p:spTree>
-    <p:extLst>
-      <p:ext uri="{BB962C8B-B14F-4D97-AF65-F5344CB8AC3E}">
-        <p14:creationId xmlns:p14="http://schemas.microsoft.com/office/powerpoint/2010/main" val="4034188477"/>
-      </p:ext>
-    </p:extLst>
   </p:cSld>
   <p:clrMap bg1="lt1" tx1="dk1" bg2="lt2" tx2="dk2" accent1="accent1" accent2="accent2" accent3="accent3" accent4="accent4" accent5="accent5" accent6="accent6" hlink="hlink" folHlink="folHlink"/>
   <p:notesStyle>
@@ -480,90 +468,6 @@
 </p:notesMaster>
 </file>
 
-<file path=ppt/notesSlides/notesSlide1.xml><?xml version="1.0" encoding="utf-8"?>
-<p:notes xmlns:a="http://schemas.openxmlformats.org/drawingml/2006/main" xmlns:r="http://schemas.openxmlformats.org/officeDocument/2006/relationships" xmlns:p="http://schemas.openxmlformats.org/presentationml/2006/main">
-  <p:cSld>
-    <p:spTree>
-      <p:nvGrpSpPr>
-        <p:cNvPr id="1" name=""/>
-        <p:cNvGrpSpPr/>
-        <p:nvPr/>
-      </p:nvGrpSpPr>
-      <p:grpSpPr>
-        <a:xfrm>
-          <a:off x="0" y="0"/>
-          <a:ext cx="0" cy="0"/>
-          <a:chOff x="0" y="0"/>
-          <a:chExt cx="0" cy="0"/>
-        </a:xfrm>
-      </p:grpSpPr>
-      <p:sp>
-        <p:nvSpPr>
-          <p:cNvPr id="2" name="Slide Image Placeholder 1"/>
-          <p:cNvSpPr>
-            <a:spLocks noGrp="1" noRot="1" noChangeAspect="1"/>
-          </p:cNvSpPr>
-          <p:nvPr>
-            <p:ph type="sldImg"/>
-          </p:nvPr>
-        </p:nvSpPr>
-        <p:spPr/>
-      </p:sp>
-      <p:sp>
-        <p:nvSpPr>
-          <p:cNvPr id="3" name="Notes Placeholder 2"/>
-          <p:cNvSpPr>
-            <a:spLocks noGrp="1"/>
-          </p:cNvSpPr>
-          <p:nvPr>
-            <p:ph type="body" idx="1"/>
-          </p:nvPr>
-        </p:nvSpPr>
-        <p:spPr/>
-        <p:txBody>
-          <a:bodyPr/>
-          <a:lstStyle/>
-          <a:p>
-            <a:endParaRPr lang="en-IN" dirty="0"/>
-          </a:p>
-        </p:txBody>
-      </p:sp>
-      <p:sp>
-        <p:nvSpPr>
-          <p:cNvPr id="4" name="Slide Number Placeholder 3"/>
-          <p:cNvSpPr>
-            <a:spLocks noGrp="1"/>
-          </p:cNvSpPr>
-          <p:nvPr>
-            <p:ph type="sldNum" sz="quarter" idx="5"/>
-          </p:nvPr>
-        </p:nvSpPr>
-        <p:spPr/>
-        <p:txBody>
-          <a:bodyPr/>
-          <a:lstStyle/>
-          <a:p>
-            <a:fld id="{47FFB008-8E38-46F5-BCB9-8CFEF233CF3A}" type="slidenum">
-              <a:rPr lang="en-IN" smtClean="0"/>
-              <a:t>6</a:t>
-            </a:fld>
-            <a:endParaRPr lang="en-IN" dirty="0"/>
-          </a:p>
-        </p:txBody>
-      </p:sp>
-    </p:spTree>
-    <p:extLst>
-      <p:ext uri="{BB962C8B-B14F-4D97-AF65-F5344CB8AC3E}">
-        <p14:creationId xmlns:p14="http://schemas.microsoft.com/office/powerpoint/2010/main" val="1797883682"/>
-      </p:ext>
-    </p:extLst>
-  </p:cSld>
-  <p:clrMapOvr>
-    <a:masterClrMapping/>
-  </p:clrMapOvr>
-</p:notes>
-</file>
-
 <file path=ppt/slideLayouts/slideLayout1.xml><?xml version="1.0" encoding="utf-8"?>
 <p:sldLayout xmlns:a="http://schemas.openxmlformats.org/drawingml/2006/main" xmlns:r="http://schemas.openxmlformats.org/officeDocument/2006/relationships" xmlns:p="http://schemas.openxmlformats.org/presentationml/2006/main" preserve="1" userDrawn="1">
   <p:cSld name="Title Slide">
@@ -583,13 +487,7 @@
       </p:grpSpPr>
       <p:grpSp>
         <p:nvGrpSpPr>
-          <p:cNvPr id="21" name="Group 20">
-            <a:extLst>
-              <a:ext uri="{FF2B5EF4-FFF2-40B4-BE49-F238E27FC236}">
-                <a16:creationId xmlns:a16="http://schemas.microsoft.com/office/drawing/2014/main" id="{1D4C31DA-14CA-CFBA-5089-9BCD0585380D}"/>
-              </a:ext>
-            </a:extLst>
-          </p:cNvPr>
+          <p:cNvPr id="21" name="Group 20"/>
           <p:cNvGrpSpPr/>
           <p:nvPr userDrawn="1"/>
         </p:nvGrpSpPr>
@@ -603,13 +501,7 @@
         </p:grpSpPr>
         <p:pic>
           <p:nvPicPr>
-            <p:cNvPr id="6" name="Picture 5" descr="Tech Background&quot; Images – Browse 8,227 Stock Photos, Vectors, and Video |  Adobe Stock">
-              <a:extLst>
-                <a:ext uri="{FF2B5EF4-FFF2-40B4-BE49-F238E27FC236}">
-                  <a16:creationId xmlns:a16="http://schemas.microsoft.com/office/drawing/2014/main" id="{912EDB8F-0820-57F6-5CDA-EEB6AC9EF357}"/>
-                </a:ext>
-              </a:extLst>
-            </p:cNvPr>
+            <p:cNvPr id="6" name="Picture 5" descr="Tech Background&quot; Images – Browse 8,227 Stock Photos, Vectors, and Video |  Adobe Stock"/>
             <p:cNvPicPr>
               <a:picLocks noChangeAspect="1" noChangeArrowheads="1"/>
             </p:cNvPicPr>
@@ -693,13 +585,7 @@
         </p:pic>
         <p:pic>
           <p:nvPicPr>
-            <p:cNvPr id="18" name="Picture 17">
-              <a:extLst>
-                <a:ext uri="{FF2B5EF4-FFF2-40B4-BE49-F238E27FC236}">
-                  <a16:creationId xmlns:a16="http://schemas.microsoft.com/office/drawing/2014/main" id="{97530BAD-0593-FBF1-1D42-9B727191475D}"/>
-                </a:ext>
-              </a:extLst>
-            </p:cNvPr>
+            <p:cNvPr id="18" name="Picture 17"/>
             <p:cNvPicPr>
               <a:picLocks noChangeAspect="1"/>
             </p:cNvPicPr>
@@ -729,11 +615,6 @@
         </p:pic>
       </p:grpSp>
     </p:spTree>
-    <p:extLst>
-      <p:ext uri="{BB962C8B-B14F-4D97-AF65-F5344CB8AC3E}">
-        <p14:creationId xmlns:p14="http://schemas.microsoft.com/office/powerpoint/2010/main" val="1331126872"/>
-      </p:ext>
-    </p:extLst>
   </p:cSld>
   <p:clrMapOvr>
     <a:masterClrMapping/>
@@ -782,6 +663,7 @@
               <a:rPr lang="en-US" dirty="0"/>
               <a:t>Click to edit Master title style</a:t>
             </a:r>
+            <a:endParaRPr lang="en-US" dirty="0"/>
           </a:p>
         </p:txBody>
       </p:sp>
@@ -859,6 +741,7 @@
               <a:rPr lang="en-US" dirty="0"/>
               <a:t>Click to edit Master text styles</a:t>
             </a:r>
+            <a:endParaRPr lang="en-US" dirty="0"/>
           </a:p>
           <a:p>
             <a:pPr lvl="1"/>
@@ -866,6 +749,7 @@
               <a:rPr lang="en-US" dirty="0"/>
               <a:t>Second level</a:t>
             </a:r>
+            <a:endParaRPr lang="en-US" dirty="0"/>
           </a:p>
           <a:p>
             <a:pPr lvl="2"/>
@@ -873,6 +757,7 @@
               <a:rPr lang="en-US" dirty="0"/>
               <a:t>Third level</a:t>
             </a:r>
+            <a:endParaRPr lang="en-US" dirty="0"/>
           </a:p>
           <a:p>
             <a:pPr lvl="3"/>
@@ -880,6 +765,7 @@
               <a:rPr lang="en-US" dirty="0"/>
               <a:t>Fourth level</a:t>
             </a:r>
+            <a:endParaRPr lang="en-US" dirty="0"/>
           </a:p>
           <a:p>
             <a:pPr lvl="4"/>
@@ -887,6 +773,7 @@
               <a:rPr lang="en-US" dirty="0"/>
               <a:t>Fifth level</a:t>
             </a:r>
+            <a:endParaRPr lang="en-US" dirty="0"/>
           </a:p>
         </p:txBody>
       </p:sp>
@@ -964,6 +851,7 @@
               <a:rPr lang="en-US" dirty="0"/>
               <a:t>Click to edit Master text styles</a:t>
             </a:r>
+            <a:endParaRPr lang="en-US" dirty="0"/>
           </a:p>
           <a:p>
             <a:pPr lvl="1"/>
@@ -971,6 +859,7 @@
               <a:rPr lang="en-US" dirty="0"/>
               <a:t>Second level</a:t>
             </a:r>
+            <a:endParaRPr lang="en-US" dirty="0"/>
           </a:p>
           <a:p>
             <a:pPr lvl="2"/>
@@ -978,6 +867,7 @@
               <a:rPr lang="en-US" dirty="0"/>
               <a:t>Third level</a:t>
             </a:r>
+            <a:endParaRPr lang="en-US" dirty="0"/>
           </a:p>
           <a:p>
             <a:pPr lvl="3"/>
@@ -985,6 +875,7 @@
               <a:rPr lang="en-US" dirty="0"/>
               <a:t>Fourth level</a:t>
             </a:r>
+            <a:endParaRPr lang="en-US" dirty="0"/>
           </a:p>
           <a:p>
             <a:pPr lvl="4"/>
@@ -992,15 +883,11 @@
               <a:rPr lang="en-US" dirty="0"/>
               <a:t>Fifth level</a:t>
             </a:r>
+            <a:endParaRPr lang="en-US" dirty="0"/>
           </a:p>
         </p:txBody>
       </p:sp>
     </p:spTree>
-    <p:extLst>
-      <p:ext uri="{BB962C8B-B14F-4D97-AF65-F5344CB8AC3E}">
-        <p14:creationId xmlns:p14="http://schemas.microsoft.com/office/powerpoint/2010/main" val="409934384"/>
-      </p:ext>
-    </p:extLst>
   </p:cSld>
   <p:clrMapOvr>
     <a:masterClrMapping/>
@@ -1049,6 +936,7 @@
               <a:rPr lang="en-US" dirty="0"/>
               <a:t>Click to edit Master title style</a:t>
             </a:r>
+            <a:endParaRPr lang="en-US" dirty="0"/>
           </a:p>
         </p:txBody>
       </p:sp>
@@ -1117,6 +1005,7 @@
               <a:rPr lang="en-US" dirty="0"/>
               <a:t>Click to edit Master text styles</a:t>
             </a:r>
+            <a:endParaRPr lang="en-US" dirty="0"/>
           </a:p>
         </p:txBody>
       </p:sp>
@@ -1194,6 +1083,7 @@
               <a:rPr lang="en-US" dirty="0"/>
               <a:t>Click to edit Master text styles</a:t>
             </a:r>
+            <a:endParaRPr lang="en-US" dirty="0"/>
           </a:p>
           <a:p>
             <a:pPr lvl="1"/>
@@ -1201,6 +1091,7 @@
               <a:rPr lang="en-US" dirty="0"/>
               <a:t>Second level</a:t>
             </a:r>
+            <a:endParaRPr lang="en-US" dirty="0"/>
           </a:p>
           <a:p>
             <a:pPr lvl="2"/>
@@ -1208,6 +1099,7 @@
               <a:rPr lang="en-US" dirty="0"/>
               <a:t>Third level</a:t>
             </a:r>
+            <a:endParaRPr lang="en-US" dirty="0"/>
           </a:p>
           <a:p>
             <a:pPr lvl="3"/>
@@ -1215,6 +1107,7 @@
               <a:rPr lang="en-US" dirty="0"/>
               <a:t>Fourth level</a:t>
             </a:r>
+            <a:endParaRPr lang="en-US" dirty="0"/>
           </a:p>
           <a:p>
             <a:pPr lvl="4"/>
@@ -1222,6 +1115,7 @@
               <a:rPr lang="en-US" dirty="0"/>
               <a:t>Fifth level</a:t>
             </a:r>
+            <a:endParaRPr lang="en-US" dirty="0"/>
           </a:p>
         </p:txBody>
       </p:sp>
@@ -1290,6 +1184,7 @@
               <a:rPr lang="en-US" dirty="0"/>
               <a:t>Click to edit Master text styles</a:t>
             </a:r>
+            <a:endParaRPr lang="en-US" dirty="0"/>
           </a:p>
         </p:txBody>
       </p:sp>
@@ -1367,6 +1262,7 @@
               <a:rPr lang="en-US" dirty="0"/>
               <a:t>Click to edit Master text styles</a:t>
             </a:r>
+            <a:endParaRPr lang="en-US" dirty="0"/>
           </a:p>
           <a:p>
             <a:pPr lvl="1"/>
@@ -1374,6 +1270,7 @@
               <a:rPr lang="en-US" dirty="0"/>
               <a:t>Second level</a:t>
             </a:r>
+            <a:endParaRPr lang="en-US" dirty="0"/>
           </a:p>
           <a:p>
             <a:pPr lvl="2"/>
@@ -1381,6 +1278,7 @@
               <a:rPr lang="en-US" dirty="0"/>
               <a:t>Third level</a:t>
             </a:r>
+            <a:endParaRPr lang="en-US" dirty="0"/>
           </a:p>
           <a:p>
             <a:pPr lvl="3"/>
@@ -1388,6 +1286,7 @@
               <a:rPr lang="en-US" dirty="0"/>
               <a:t>Fourth level</a:t>
             </a:r>
+            <a:endParaRPr lang="en-US" dirty="0"/>
           </a:p>
           <a:p>
             <a:pPr lvl="4"/>
@@ -1395,15 +1294,11 @@
               <a:rPr lang="en-US" dirty="0"/>
               <a:t>Fifth level</a:t>
             </a:r>
+            <a:endParaRPr lang="en-US" dirty="0"/>
           </a:p>
         </p:txBody>
       </p:sp>
     </p:spTree>
-    <p:extLst>
-      <p:ext uri="{BB962C8B-B14F-4D97-AF65-F5344CB8AC3E}">
-        <p14:creationId xmlns:p14="http://schemas.microsoft.com/office/powerpoint/2010/main" val="819789000"/>
-      </p:ext>
-    </p:extLst>
   </p:cSld>
   <p:clrMapOvr>
     <a:masterClrMapping/>
@@ -1452,15 +1347,11 @@
               <a:rPr lang="en-US"/>
               <a:t>Click to edit Master title style</a:t>
             </a:r>
+            <a:endParaRPr lang="en-US"/>
           </a:p>
         </p:txBody>
       </p:sp>
     </p:spTree>
-    <p:extLst>
-      <p:ext uri="{BB962C8B-B14F-4D97-AF65-F5344CB8AC3E}">
-        <p14:creationId xmlns:p14="http://schemas.microsoft.com/office/powerpoint/2010/main" val="2831256556"/>
-      </p:ext>
-    </p:extLst>
   </p:cSld>
   <p:clrMapOvr>
     <a:masterClrMapping/>
@@ -1486,11 +1377,6 @@
         </a:xfrm>
       </p:grpSpPr>
     </p:spTree>
-    <p:extLst>
-      <p:ext uri="{BB962C8B-B14F-4D97-AF65-F5344CB8AC3E}">
-        <p14:creationId xmlns:p14="http://schemas.microsoft.com/office/powerpoint/2010/main" val="1295593171"/>
-      </p:ext>
-    </p:extLst>
   </p:cSld>
   <p:clrMapOvr>
     <a:masterClrMapping/>
@@ -1543,6 +1429,7 @@
               <a:rPr lang="en-US" dirty="0"/>
               <a:t>Click to edit Master title style</a:t>
             </a:r>
+            <a:endParaRPr lang="en-US" dirty="0"/>
           </a:p>
         </p:txBody>
       </p:sp>
@@ -1632,6 +1519,7 @@
               <a:rPr lang="en-US" dirty="0"/>
               <a:t>Click to edit Master text styles</a:t>
             </a:r>
+            <a:endParaRPr lang="en-US" dirty="0"/>
           </a:p>
           <a:p>
             <a:pPr lvl="1"/>
@@ -1639,6 +1527,7 @@
               <a:rPr lang="en-US" dirty="0"/>
               <a:t>Second level</a:t>
             </a:r>
+            <a:endParaRPr lang="en-US" dirty="0"/>
           </a:p>
           <a:p>
             <a:pPr lvl="2"/>
@@ -1646,6 +1535,7 @@
               <a:rPr lang="en-US" dirty="0"/>
               <a:t>Third level</a:t>
             </a:r>
+            <a:endParaRPr lang="en-US" dirty="0"/>
           </a:p>
           <a:p>
             <a:pPr lvl="3"/>
@@ -1653,6 +1543,7 @@
               <a:rPr lang="en-US" dirty="0"/>
               <a:t>Fourth level</a:t>
             </a:r>
+            <a:endParaRPr lang="en-US" dirty="0"/>
           </a:p>
           <a:p>
             <a:pPr lvl="4"/>
@@ -1660,6 +1551,7 @@
               <a:rPr lang="en-US" dirty="0"/>
               <a:t>Fifth level</a:t>
             </a:r>
+            <a:endParaRPr lang="en-US" dirty="0"/>
           </a:p>
         </p:txBody>
       </p:sp>
@@ -1728,15 +1620,11 @@
               <a:rPr lang="en-US" dirty="0"/>
               <a:t>Click to edit Master text styles</a:t>
             </a:r>
+            <a:endParaRPr lang="en-US" dirty="0"/>
           </a:p>
         </p:txBody>
       </p:sp>
     </p:spTree>
-    <p:extLst>
-      <p:ext uri="{BB962C8B-B14F-4D97-AF65-F5344CB8AC3E}">
-        <p14:creationId xmlns:p14="http://schemas.microsoft.com/office/powerpoint/2010/main" val="1828349371"/>
-      </p:ext>
-    </p:extLst>
   </p:cSld>
   <p:clrMapOvr>
     <a:masterClrMapping/>
@@ -1785,6 +1673,7 @@
               <a:rPr lang="en-US" dirty="0"/>
               <a:t>Click to edit Master title style</a:t>
             </a:r>
+            <a:endParaRPr lang="en-US" dirty="0"/>
           </a:p>
         </p:txBody>
       </p:sp>
@@ -1862,6 +1751,7 @@
               <a:rPr lang="en-US" dirty="0"/>
               <a:t>Click to edit Master text styles</a:t>
             </a:r>
+            <a:endParaRPr lang="en-US" dirty="0"/>
           </a:p>
           <a:p>
             <a:pPr lvl="1"/>
@@ -1869,6 +1759,7 @@
               <a:rPr lang="en-US" dirty="0"/>
               <a:t>Second level</a:t>
             </a:r>
+            <a:endParaRPr lang="en-US" dirty="0"/>
           </a:p>
           <a:p>
             <a:pPr lvl="2"/>
@@ -1876,6 +1767,7 @@
               <a:rPr lang="en-US" dirty="0"/>
               <a:t>Third level</a:t>
             </a:r>
+            <a:endParaRPr lang="en-US" dirty="0"/>
           </a:p>
           <a:p>
             <a:pPr lvl="3"/>
@@ -1883,6 +1775,7 @@
               <a:rPr lang="en-US" dirty="0"/>
               <a:t>Fourth level</a:t>
             </a:r>
+            <a:endParaRPr lang="en-US" dirty="0"/>
           </a:p>
           <a:p>
             <a:pPr lvl="4"/>
@@ -1890,15 +1783,11 @@
               <a:rPr lang="en-US" dirty="0"/>
               <a:t>Fifth level</a:t>
             </a:r>
+            <a:endParaRPr lang="en-US" dirty="0"/>
           </a:p>
         </p:txBody>
       </p:sp>
     </p:spTree>
-    <p:extLst>
-      <p:ext uri="{BB962C8B-B14F-4D97-AF65-F5344CB8AC3E}">
-        <p14:creationId xmlns:p14="http://schemas.microsoft.com/office/powerpoint/2010/main" val="2075053668"/>
-      </p:ext>
-    </p:extLst>
   </p:cSld>
   <p:clrMapOvr>
     <a:masterClrMapping/>
@@ -1925,13 +1814,7 @@
       </p:grpSpPr>
       <p:pic>
         <p:nvPicPr>
-          <p:cNvPr id="4" name="Picture 3" descr="Tech Background&quot; Images – Browse 8,227 Stock Photos, Vectors, and Video |  Adobe Stock">
-            <a:extLst>
-              <a:ext uri="{FF2B5EF4-FFF2-40B4-BE49-F238E27FC236}">
-                <a16:creationId xmlns:a16="http://schemas.microsoft.com/office/drawing/2014/main" id="{19625874-6531-A345-C3ED-8BD86E0E300E}"/>
-              </a:ext>
-            </a:extLst>
-          </p:cNvPr>
+          <p:cNvPr id="4" name="Picture 3" descr="Tech Background&quot; Images – Browse 8,227 Stock Photos, Vectors, and Video |  Adobe Stock"/>
           <p:cNvPicPr>
             <a:picLocks noChangeAspect="1" noChangeArrowheads="1"/>
           </p:cNvPicPr>
@@ -2047,15 +1930,193 @@
               <a:rPr lang="en-US" dirty="0"/>
               <a:t>Thank You</a:t>
             </a:r>
+            <a:endParaRPr lang="en-US" dirty="0"/>
           </a:p>
         </p:txBody>
       </p:sp>
     </p:spTree>
-    <p:extLst>
-      <p:ext uri="{BB962C8B-B14F-4D97-AF65-F5344CB8AC3E}">
-        <p14:creationId xmlns:p14="http://schemas.microsoft.com/office/powerpoint/2010/main" val="4167474205"/>
-      </p:ext>
-    </p:extLst>
+  </p:cSld>
+  <p:clrMapOvr>
+    <a:masterClrMapping/>
+  </p:clrMapOvr>
+</p:sldLayout>
+</file>
+
+<file path=ppt/slideLayouts/slideLayout17.xml><?xml version="1.0" encoding="utf-8"?>
+<p:sldLayout xmlns:a="http://schemas.openxmlformats.org/drawingml/2006/main" xmlns:r="http://schemas.openxmlformats.org/officeDocument/2006/relationships" xmlns:p="http://schemas.openxmlformats.org/presentationml/2006/main" type="tx" preserve="1">
+  <p:cSld name="Title and Text">
+    <p:spTree>
+      <p:nvGrpSpPr>
+        <p:cNvPr id="1" name=""/>
+        <p:cNvGrpSpPr/>
+        <p:nvPr/>
+      </p:nvGrpSpPr>
+      <p:grpSpPr>
+        <a:xfrm>
+          <a:off x="0" y="0"/>
+          <a:ext cx="0" cy="0"/>
+          <a:chOff x="0" y="0"/>
+          <a:chExt cx="0" cy="0"/>
+        </a:xfrm>
+      </p:grpSpPr>
+      <p:sp>
+        <p:nvSpPr>
+          <p:cNvPr id="2" name="Title 1"/>
+          <p:cNvSpPr>
+            <a:spLocks noGrp="1"/>
+          </p:cNvSpPr>
+          <p:nvPr>
+            <p:ph type="title"/>
+          </p:nvPr>
+        </p:nvSpPr>
+        <p:spPr/>
+        <p:txBody>
+          <a:bodyPr/>
+          <a:lstStyle/>
+          <a:p>
+            <a:r>
+              <a:rPr lang="en-US" smtClean="0"/>
+              <a:t>Click to edit Master title style</a:t>
+            </a:r>
+            <a:endParaRPr lang="en-US"/>
+          </a:p>
+        </p:txBody>
+      </p:sp>
+      <p:sp>
+        <p:nvSpPr>
+          <p:cNvPr id="3" name="Text Placeholder 2"/>
+          <p:cNvSpPr>
+            <a:spLocks noGrp="1"/>
+          </p:cNvSpPr>
+          <p:nvPr>
+            <p:ph type="body" idx="1"/>
+          </p:nvPr>
+        </p:nvSpPr>
+        <p:spPr/>
+        <p:txBody>
+          <a:bodyPr/>
+          <a:lstStyle/>
+          <a:p>
+            <a:pPr lvl="0"/>
+            <a:r>
+              <a:rPr lang="en-US" smtClean="0"/>
+              <a:t>Click to edit Master text styles</a:t>
+            </a:r>
+            <a:endParaRPr lang="en-US" smtClean="0"/>
+          </a:p>
+          <a:p>
+            <a:pPr lvl="1"/>
+            <a:r>
+              <a:rPr lang="en-US" smtClean="0"/>
+              <a:t>Second level</a:t>
+            </a:r>
+            <a:endParaRPr lang="en-US" smtClean="0"/>
+          </a:p>
+          <a:p>
+            <a:pPr lvl="2"/>
+            <a:r>
+              <a:rPr lang="en-US" smtClean="0"/>
+              <a:t>Third level</a:t>
+            </a:r>
+            <a:endParaRPr lang="en-US" smtClean="0"/>
+          </a:p>
+          <a:p>
+            <a:pPr lvl="3"/>
+            <a:r>
+              <a:rPr lang="en-US" smtClean="0"/>
+              <a:t>Fourth level</a:t>
+            </a:r>
+            <a:endParaRPr lang="en-US" smtClean="0"/>
+          </a:p>
+          <a:p>
+            <a:pPr lvl="4"/>
+            <a:r>
+              <a:rPr lang="en-US" smtClean="0"/>
+              <a:t>Fifth level</a:t>
+            </a:r>
+            <a:endParaRPr lang="en-US"/>
+          </a:p>
+        </p:txBody>
+      </p:sp>
+      <p:sp>
+        <p:nvSpPr>
+          <p:cNvPr id="4" name="Date Placeholder 3"/>
+          <p:cNvSpPr>
+            <a:spLocks noGrp="1"/>
+          </p:cNvSpPr>
+          <p:nvPr>
+            <p:ph type="dt" sz="half" idx="10"/>
+          </p:nvPr>
+        </p:nvSpPr>
+        <p:spPr>
+          <a:xfrm>
+            <a:off x="838200" y="6356350"/>
+            <a:ext cx="2743200" cy="365125"/>
+          </a:xfrm>
+        </p:spPr>
+        <p:txBody>
+          <a:bodyPr/>
+          <a:lstStyle/>
+          <a:p>
+            <a:fld id="{FDE934FF-F4E1-47C5-9CA5-30A81DDE2BE4}" type="datetimeFigureOut">
+              <a:rPr lang="en-US" smtClean="0"/>
+            </a:fld>
+            <a:endParaRPr lang="en-US"/>
+          </a:p>
+        </p:txBody>
+      </p:sp>
+      <p:sp>
+        <p:nvSpPr>
+          <p:cNvPr id="5" name="Footer Placeholder 4"/>
+          <p:cNvSpPr>
+            <a:spLocks noGrp="1"/>
+          </p:cNvSpPr>
+          <p:nvPr>
+            <p:ph type="ftr" sz="quarter" idx="11"/>
+          </p:nvPr>
+        </p:nvSpPr>
+        <p:spPr>
+          <a:xfrm>
+            <a:off x="4038600" y="6356350"/>
+            <a:ext cx="4114800" cy="365125"/>
+          </a:xfrm>
+        </p:spPr>
+        <p:txBody>
+          <a:bodyPr/>
+          <a:lstStyle/>
+          <a:p>
+            <a:endParaRPr lang="en-US"/>
+          </a:p>
+        </p:txBody>
+      </p:sp>
+      <p:sp>
+        <p:nvSpPr>
+          <p:cNvPr id="6" name="Slide Number Placeholder 5"/>
+          <p:cNvSpPr>
+            <a:spLocks noGrp="1"/>
+          </p:cNvSpPr>
+          <p:nvPr>
+            <p:ph type="sldNum" sz="quarter" idx="12"/>
+          </p:nvPr>
+        </p:nvSpPr>
+        <p:spPr>
+          <a:xfrm>
+            <a:off x="8610600" y="6356350"/>
+            <a:ext cx="2743200" cy="365125"/>
+          </a:xfrm>
+        </p:spPr>
+        <p:txBody>
+          <a:bodyPr/>
+          <a:lstStyle/>
+          <a:p>
+            <a:fld id="{B3561BA9-CDCF-4958-B8AB-66F3BF063E13}" type="slidenum">
+              <a:rPr lang="en-US" smtClean="0"/>
+            </a:fld>
+            <a:endParaRPr lang="en-US"/>
+          </a:p>
+        </p:txBody>
+      </p:sp>
+    </p:spTree>
   </p:cSld>
   <p:clrMapOvr>
     <a:masterClrMapping/>
@@ -2104,6 +2165,7 @@
               <a:rPr lang="en-US" dirty="0"/>
               <a:t>Click to edit Master title style</a:t>
             </a:r>
+            <a:endParaRPr lang="en-US" dirty="0"/>
           </a:p>
         </p:txBody>
       </p:sp>
@@ -2181,6 +2243,7 @@
               <a:rPr lang="en-US" dirty="0"/>
               <a:t>Click to edit Master text styles</a:t>
             </a:r>
+            <a:endParaRPr lang="en-US" dirty="0"/>
           </a:p>
           <a:p>
             <a:pPr lvl="1"/>
@@ -2188,6 +2251,7 @@
               <a:rPr lang="en-US" dirty="0"/>
               <a:t>Second level</a:t>
             </a:r>
+            <a:endParaRPr lang="en-US" dirty="0"/>
           </a:p>
           <a:p>
             <a:pPr lvl="2"/>
@@ -2195,6 +2259,7 @@
               <a:rPr lang="en-US" dirty="0"/>
               <a:t>Third level</a:t>
             </a:r>
+            <a:endParaRPr lang="en-US" dirty="0"/>
           </a:p>
           <a:p>
             <a:pPr lvl="3"/>
@@ -2202,6 +2267,7 @@
               <a:rPr lang="en-US" dirty="0"/>
               <a:t>Fourth level</a:t>
             </a:r>
+            <a:endParaRPr lang="en-US" dirty="0"/>
           </a:p>
           <a:p>
             <a:pPr lvl="4"/>
@@ -2209,15 +2275,11 @@
               <a:rPr lang="en-US" dirty="0"/>
               <a:t>Fifth level</a:t>
             </a:r>
+            <a:endParaRPr lang="en-US" dirty="0"/>
           </a:p>
         </p:txBody>
       </p:sp>
     </p:spTree>
-    <p:extLst>
-      <p:ext uri="{BB962C8B-B14F-4D97-AF65-F5344CB8AC3E}">
-        <p14:creationId xmlns:p14="http://schemas.microsoft.com/office/powerpoint/2010/main" val="2412652330"/>
-      </p:ext>
-    </p:extLst>
   </p:cSld>
   <p:clrMapOvr>
     <a:masterClrMapping/>
@@ -2316,6 +2378,7 @@
               <a:rPr lang="en-US" dirty="0"/>
               <a:t>Click to edit Master text styles</a:t>
             </a:r>
+            <a:endParaRPr lang="en-US" dirty="0"/>
           </a:p>
           <a:p>
             <a:pPr lvl="1"/>
@@ -2323,6 +2386,7 @@
               <a:rPr lang="en-US" dirty="0"/>
               <a:t>Second level</a:t>
             </a:r>
+            <a:endParaRPr lang="en-US" dirty="0"/>
           </a:p>
           <a:p>
             <a:pPr lvl="2"/>
@@ -2330,6 +2394,7 @@
               <a:rPr lang="en-US" dirty="0"/>
               <a:t>Third level</a:t>
             </a:r>
+            <a:endParaRPr lang="en-US" dirty="0"/>
           </a:p>
           <a:p>
             <a:pPr lvl="3"/>
@@ -2337,6 +2402,7 @@
               <a:rPr lang="en-US" dirty="0"/>
               <a:t>Fourth level</a:t>
             </a:r>
+            <a:endParaRPr lang="en-US" dirty="0"/>
           </a:p>
           <a:p>
             <a:pPr lvl="4"/>
@@ -2344,18 +2410,13 @@
               <a:rPr lang="en-US" dirty="0"/>
               <a:t>Fifth level</a:t>
             </a:r>
+            <a:endParaRPr lang="en-US" dirty="0"/>
           </a:p>
         </p:txBody>
       </p:sp>
       <p:sp>
         <p:nvSpPr>
-          <p:cNvPr id="6" name="Rectangle 5">
-            <a:extLst>
-              <a:ext uri="{FF2B5EF4-FFF2-40B4-BE49-F238E27FC236}">
-                <a16:creationId xmlns:a16="http://schemas.microsoft.com/office/drawing/2014/main" id="{360409B4-C617-2A18-6BFD-309E9F59F1A6}"/>
-              </a:ext>
-            </a:extLst>
-          </p:cNvPr>
+          <p:cNvPr id="6" name="Rectangle 5"/>
           <p:cNvSpPr/>
           <p:nvPr userDrawn="1"/>
         </p:nvSpPr>
@@ -2433,15 +2494,11 @@
               <a:rPr lang="en-US" dirty="0"/>
               <a:t>Click to edit Master title style</a:t>
             </a:r>
+            <a:endParaRPr lang="en-US" dirty="0"/>
           </a:p>
         </p:txBody>
       </p:sp>
     </p:spTree>
-    <p:extLst>
-      <p:ext uri="{BB962C8B-B14F-4D97-AF65-F5344CB8AC3E}">
-        <p14:creationId xmlns:p14="http://schemas.microsoft.com/office/powerpoint/2010/main" val="1361238580"/>
-      </p:ext>
-    </p:extLst>
   </p:cSld>
   <p:clrMapOvr>
     <a:masterClrMapping/>
@@ -2490,6 +2547,7 @@
               <a:rPr lang="en-US" dirty="0"/>
               <a:t>Click to edit Master title style</a:t>
             </a:r>
+            <a:endParaRPr lang="en-US" dirty="0"/>
           </a:p>
         </p:txBody>
       </p:sp>
@@ -2567,6 +2625,7 @@
               <a:rPr lang="en-US" dirty="0"/>
               <a:t>Click to edit Master text styles</a:t>
             </a:r>
+            <a:endParaRPr lang="en-US" dirty="0"/>
           </a:p>
           <a:p>
             <a:pPr lvl="1"/>
@@ -2574,6 +2633,7 @@
               <a:rPr lang="en-US" dirty="0"/>
               <a:t>Second level</a:t>
             </a:r>
+            <a:endParaRPr lang="en-US" dirty="0"/>
           </a:p>
           <a:p>
             <a:pPr lvl="2"/>
@@ -2581,6 +2641,7 @@
               <a:rPr lang="en-US" dirty="0"/>
               <a:t>Third level</a:t>
             </a:r>
+            <a:endParaRPr lang="en-US" dirty="0"/>
           </a:p>
           <a:p>
             <a:pPr lvl="3"/>
@@ -2588,6 +2649,7 @@
               <a:rPr lang="en-US" dirty="0"/>
               <a:t>Fourth level</a:t>
             </a:r>
+            <a:endParaRPr lang="en-US" dirty="0"/>
           </a:p>
           <a:p>
             <a:pPr lvl="4"/>
@@ -2595,18 +2657,13 @@
               <a:rPr lang="en-US" dirty="0"/>
               <a:t>Fifth level</a:t>
             </a:r>
+            <a:endParaRPr lang="en-US" dirty="0"/>
           </a:p>
         </p:txBody>
       </p:sp>
       <p:sp>
         <p:nvSpPr>
-          <p:cNvPr id="6" name="Rectangle 5">
-            <a:extLst>
-              <a:ext uri="{FF2B5EF4-FFF2-40B4-BE49-F238E27FC236}">
-                <a16:creationId xmlns:a16="http://schemas.microsoft.com/office/drawing/2014/main" id="{360409B4-C617-2A18-6BFD-309E9F59F1A6}"/>
-              </a:ext>
-            </a:extLst>
-          </p:cNvPr>
+          <p:cNvPr id="6" name="Rectangle 5"/>
           <p:cNvSpPr/>
           <p:nvPr userDrawn="1"/>
         </p:nvSpPr>
@@ -2654,13 +2711,7 @@
       </p:sp>
       <p:pic>
         <p:nvPicPr>
-          <p:cNvPr id="7" name="Picture 6">
-            <a:extLst>
-              <a:ext uri="{FF2B5EF4-FFF2-40B4-BE49-F238E27FC236}">
-                <a16:creationId xmlns:a16="http://schemas.microsoft.com/office/drawing/2014/main" id="{F13DF77B-C435-B418-C899-54652105D045}"/>
-              </a:ext>
-            </a:extLst>
-          </p:cNvPr>
+          <p:cNvPr id="7" name="Picture 6"/>
           <p:cNvPicPr>
             <a:picLocks noChangeAspect="1"/>
           </p:cNvPicPr>
@@ -2689,11 +2740,6 @@
         </p:spPr>
       </p:pic>
     </p:spTree>
-    <p:extLst>
-      <p:ext uri="{BB962C8B-B14F-4D97-AF65-F5344CB8AC3E}">
-        <p14:creationId xmlns:p14="http://schemas.microsoft.com/office/powerpoint/2010/main" val="4013561160"/>
-      </p:ext>
-    </p:extLst>
   </p:cSld>
   <p:clrMapOvr>
     <a:masterClrMapping/>
@@ -2742,6 +2788,7 @@
               <a:rPr lang="en-US" dirty="0"/>
               <a:t>Click to edit Master title style</a:t>
             </a:r>
+            <a:endParaRPr lang="en-US" dirty="0"/>
           </a:p>
         </p:txBody>
       </p:sp>
@@ -2819,6 +2866,7 @@
               <a:rPr lang="en-US" dirty="0"/>
               <a:t>Click to edit Master text styles</a:t>
             </a:r>
+            <a:endParaRPr lang="en-US" dirty="0"/>
           </a:p>
           <a:p>
             <a:pPr lvl="1"/>
@@ -2826,6 +2874,7 @@
               <a:rPr lang="en-US" dirty="0"/>
               <a:t>Second level</a:t>
             </a:r>
+            <a:endParaRPr lang="en-US" dirty="0"/>
           </a:p>
           <a:p>
             <a:pPr lvl="2"/>
@@ -2833,6 +2882,7 @@
               <a:rPr lang="en-US" dirty="0"/>
               <a:t>Third level</a:t>
             </a:r>
+            <a:endParaRPr lang="en-US" dirty="0"/>
           </a:p>
           <a:p>
             <a:pPr lvl="3"/>
@@ -2840,6 +2890,7 @@
               <a:rPr lang="en-US" dirty="0"/>
               <a:t>Fourth level</a:t>
             </a:r>
+            <a:endParaRPr lang="en-US" dirty="0"/>
           </a:p>
           <a:p>
             <a:pPr lvl="4"/>
@@ -2847,18 +2898,13 @@
               <a:rPr lang="en-US" dirty="0"/>
               <a:t>Fifth level</a:t>
             </a:r>
+            <a:endParaRPr lang="en-US" dirty="0"/>
           </a:p>
         </p:txBody>
       </p:sp>
       <p:sp>
         <p:nvSpPr>
-          <p:cNvPr id="6" name="Rectangle 5">
-            <a:extLst>
-              <a:ext uri="{FF2B5EF4-FFF2-40B4-BE49-F238E27FC236}">
-                <a16:creationId xmlns:a16="http://schemas.microsoft.com/office/drawing/2014/main" id="{360409B4-C617-2A18-6BFD-309E9F59F1A6}"/>
-              </a:ext>
-            </a:extLst>
-          </p:cNvPr>
+          <p:cNvPr id="6" name="Rectangle 5"/>
           <p:cNvSpPr/>
           <p:nvPr userDrawn="1"/>
         </p:nvSpPr>
@@ -2906,13 +2952,7 @@
       </p:sp>
       <p:pic>
         <p:nvPicPr>
-          <p:cNvPr id="4" name="Picture 3">
-            <a:extLst>
-              <a:ext uri="{FF2B5EF4-FFF2-40B4-BE49-F238E27FC236}">
-                <a16:creationId xmlns:a16="http://schemas.microsoft.com/office/drawing/2014/main" id="{4258C05D-B60D-14D1-7105-F6719232542F}"/>
-              </a:ext>
-            </a:extLst>
-          </p:cNvPr>
+          <p:cNvPr id="4" name="Picture 3"/>
           <p:cNvPicPr>
             <a:picLocks noChangeAspect="1"/>
           </p:cNvPicPr>
@@ -2941,11 +2981,6 @@
         </p:spPr>
       </p:pic>
     </p:spTree>
-    <p:extLst>
-      <p:ext uri="{BB962C8B-B14F-4D97-AF65-F5344CB8AC3E}">
-        <p14:creationId xmlns:p14="http://schemas.microsoft.com/office/powerpoint/2010/main" val="1185285810"/>
-      </p:ext>
-    </p:extLst>
   </p:cSld>
   <p:clrMapOvr>
     <a:masterClrMapping/>
@@ -2994,6 +3029,7 @@
               <a:rPr lang="en-US" dirty="0"/>
               <a:t>Click to edit Master title style</a:t>
             </a:r>
+            <a:endParaRPr lang="en-US" dirty="0"/>
           </a:p>
         </p:txBody>
       </p:sp>
@@ -3071,6 +3107,7 @@
               <a:rPr lang="en-US" dirty="0"/>
               <a:t>Click to edit Master text styles</a:t>
             </a:r>
+            <a:endParaRPr lang="en-US" dirty="0"/>
           </a:p>
           <a:p>
             <a:pPr lvl="1"/>
@@ -3078,6 +3115,7 @@
               <a:rPr lang="en-US" dirty="0"/>
               <a:t>Second level</a:t>
             </a:r>
+            <a:endParaRPr lang="en-US" dirty="0"/>
           </a:p>
           <a:p>
             <a:pPr lvl="2"/>
@@ -3085,6 +3123,7 @@
               <a:rPr lang="en-US" dirty="0"/>
               <a:t>Third level</a:t>
             </a:r>
+            <a:endParaRPr lang="en-US" dirty="0"/>
           </a:p>
           <a:p>
             <a:pPr lvl="3"/>
@@ -3092,6 +3131,7 @@
               <a:rPr lang="en-US" dirty="0"/>
               <a:t>Fourth level</a:t>
             </a:r>
+            <a:endParaRPr lang="en-US" dirty="0"/>
           </a:p>
           <a:p>
             <a:pPr lvl="4"/>
@@ -3099,18 +3139,13 @@
               <a:rPr lang="en-US" dirty="0"/>
               <a:t>Fifth level</a:t>
             </a:r>
+            <a:endParaRPr lang="en-US" dirty="0"/>
           </a:p>
         </p:txBody>
       </p:sp>
       <p:sp>
         <p:nvSpPr>
-          <p:cNvPr id="6" name="Arrow: Pentagon 5">
-            <a:extLst>
-              <a:ext uri="{FF2B5EF4-FFF2-40B4-BE49-F238E27FC236}">
-                <a16:creationId xmlns:a16="http://schemas.microsoft.com/office/drawing/2014/main" id="{360409B4-C617-2A18-6BFD-309E9F59F1A6}"/>
-              </a:ext>
-            </a:extLst>
-          </p:cNvPr>
+          <p:cNvPr id="6" name="Arrow: Pentagon 5"/>
           <p:cNvSpPr/>
           <p:nvPr userDrawn="1"/>
         </p:nvSpPr>
@@ -3160,16 +3195,8 @@
       </p:sp>
       <p:sp>
         <p:nvSpPr>
-          <p:cNvPr id="8" name="Title 1">
-            <a:extLst>
-              <a:ext uri="{FF2B5EF4-FFF2-40B4-BE49-F238E27FC236}">
-                <a16:creationId xmlns:a16="http://schemas.microsoft.com/office/drawing/2014/main" id="{F19F22F4-4B18-0516-26F1-498BF7EBEAB2}"/>
-              </a:ext>
-            </a:extLst>
-          </p:cNvPr>
-          <p:cNvSpPr txBox="1">
-            <a:spLocks/>
-          </p:cNvSpPr>
+          <p:cNvPr id="8" name="Title 1"/>
+          <p:cNvSpPr txBox="1"/>
           <p:nvPr userDrawn="1"/>
         </p:nvSpPr>
         <p:spPr>
@@ -3214,15 +3241,16 @@
               </a:rPr>
               <a:t>Click to edit Master title style</a:t>
             </a:r>
+            <a:endParaRPr lang="en-US" sz="3400" dirty="0">
+              <a:solidFill>
+                <a:schemeClr val="bg1"/>
+              </a:solidFill>
+              <a:latin typeface="Calibri" panose="020F0502020204030204" pitchFamily="34" charset="0"/>
+            </a:endParaRPr>
           </a:p>
         </p:txBody>
       </p:sp>
     </p:spTree>
-    <p:extLst>
-      <p:ext uri="{BB962C8B-B14F-4D97-AF65-F5344CB8AC3E}">
-        <p14:creationId xmlns:p14="http://schemas.microsoft.com/office/powerpoint/2010/main" val="599992804"/>
-      </p:ext>
-    </p:extLst>
   </p:cSld>
   <p:clrMapOvr>
     <a:masterClrMapping/>
@@ -3249,16 +3277,8 @@
       </p:grpSpPr>
       <p:sp>
         <p:nvSpPr>
-          <p:cNvPr id="8" name="Title 1">
-            <a:extLst>
-              <a:ext uri="{FF2B5EF4-FFF2-40B4-BE49-F238E27FC236}">
-                <a16:creationId xmlns:a16="http://schemas.microsoft.com/office/drawing/2014/main" id="{F19F22F4-4B18-0516-26F1-498BF7EBEAB2}"/>
-              </a:ext>
-            </a:extLst>
-          </p:cNvPr>
-          <p:cNvSpPr txBox="1">
-            <a:spLocks/>
-          </p:cNvSpPr>
+          <p:cNvPr id="8" name="Title 1"/>
+          <p:cNvSpPr txBox="1"/>
           <p:nvPr userDrawn="1"/>
         </p:nvSpPr>
         <p:spPr>
@@ -3303,18 +3323,18 @@
               </a:rPr>
               <a:t>Click to edit Master title style</a:t>
             </a:r>
+            <a:endParaRPr lang="en-US" sz="3400" dirty="0">
+              <a:solidFill>
+                <a:srgbClr val="1D1B58"/>
+              </a:solidFill>
+              <a:latin typeface="Calibri" panose="020F0502020204030204" pitchFamily="34" charset="0"/>
+            </a:endParaRPr>
           </a:p>
         </p:txBody>
       </p:sp>
       <p:sp>
         <p:nvSpPr>
-          <p:cNvPr id="13" name="Freeform: Shape 12">
-            <a:extLst>
-              <a:ext uri="{FF2B5EF4-FFF2-40B4-BE49-F238E27FC236}">
-                <a16:creationId xmlns:a16="http://schemas.microsoft.com/office/drawing/2014/main" id="{BC7368D9-5898-B04D-9CD2-C5A3736BFFA6}"/>
-              </a:ext>
-            </a:extLst>
-          </p:cNvPr>
+          <p:cNvPr id="13" name="Freeform: Shape 12"/>
           <p:cNvSpPr/>
           <p:nvPr userDrawn="1"/>
         </p:nvSpPr>
@@ -3451,6 +3471,7 @@
               <a:rPr lang="en-US" dirty="0"/>
               <a:t>Click to edit Master title style</a:t>
             </a:r>
+            <a:endParaRPr lang="en-US" dirty="0"/>
           </a:p>
         </p:txBody>
       </p:sp>
@@ -3518,6 +3539,7 @@
               <a:rPr lang="en-US" dirty="0"/>
               <a:t>Click to edit Master text styles</a:t>
             </a:r>
+            <a:endParaRPr lang="en-US" dirty="0"/>
           </a:p>
           <a:p>
             <a:pPr lvl="1"/>
@@ -3525,6 +3547,7 @@
               <a:rPr lang="en-US" dirty="0"/>
               <a:t>Second level</a:t>
             </a:r>
+            <a:endParaRPr lang="en-US" dirty="0"/>
           </a:p>
           <a:p>
             <a:pPr lvl="2"/>
@@ -3532,6 +3555,7 @@
               <a:rPr lang="en-US" dirty="0"/>
               <a:t>Third level</a:t>
             </a:r>
+            <a:endParaRPr lang="en-US" dirty="0"/>
           </a:p>
           <a:p>
             <a:pPr lvl="3"/>
@@ -3539,6 +3563,7 @@
               <a:rPr lang="en-US" dirty="0"/>
               <a:t>Fourth level</a:t>
             </a:r>
+            <a:endParaRPr lang="en-US" dirty="0"/>
           </a:p>
           <a:p>
             <a:pPr lvl="4"/>
@@ -3546,18 +3571,13 @@
               <a:rPr lang="en-US" dirty="0"/>
               <a:t>Fifth level</a:t>
             </a:r>
+            <a:endParaRPr lang="en-US" dirty="0"/>
           </a:p>
         </p:txBody>
       </p:sp>
       <p:pic>
         <p:nvPicPr>
-          <p:cNvPr id="4" name="Picture 3">
-            <a:extLst>
-              <a:ext uri="{FF2B5EF4-FFF2-40B4-BE49-F238E27FC236}">
-                <a16:creationId xmlns:a16="http://schemas.microsoft.com/office/drawing/2014/main" id="{BC1D7751-B046-E6FF-E802-137A168948C9}"/>
-              </a:ext>
-            </a:extLst>
-          </p:cNvPr>
+          <p:cNvPr id="4" name="Picture 3"/>
           <p:cNvPicPr>
             <a:picLocks noChangeAspect="1"/>
           </p:cNvPicPr>
@@ -3586,11 +3606,6 @@
         </p:spPr>
       </p:pic>
     </p:spTree>
-    <p:extLst>
-      <p:ext uri="{BB962C8B-B14F-4D97-AF65-F5344CB8AC3E}">
-        <p14:creationId xmlns:p14="http://schemas.microsoft.com/office/powerpoint/2010/main" val="645539045"/>
-      </p:ext>
-    </p:extLst>
   </p:cSld>
   <p:clrMapOvr>
     <a:masterClrMapping/>
@@ -3639,6 +3654,7 @@
               <a:rPr lang="en-US" dirty="0"/>
               <a:t>Click to edit Master title style</a:t>
             </a:r>
+            <a:endParaRPr lang="en-US" dirty="0"/>
           </a:p>
         </p:txBody>
       </p:sp>
@@ -3716,6 +3732,7 @@
               <a:rPr lang="en-US" dirty="0"/>
               <a:t>Click to edit Master text styles</a:t>
             </a:r>
+            <a:endParaRPr lang="en-US" dirty="0"/>
           </a:p>
           <a:p>
             <a:pPr lvl="1"/>
@@ -3723,6 +3740,7 @@
               <a:rPr lang="en-US" dirty="0"/>
               <a:t>Second level</a:t>
             </a:r>
+            <a:endParaRPr lang="en-US" dirty="0"/>
           </a:p>
           <a:p>
             <a:pPr lvl="2"/>
@@ -3730,6 +3748,7 @@
               <a:rPr lang="en-US" dirty="0"/>
               <a:t>Third level</a:t>
             </a:r>
+            <a:endParaRPr lang="en-US" dirty="0"/>
           </a:p>
           <a:p>
             <a:pPr lvl="3"/>
@@ -3737,6 +3756,7 @@
               <a:rPr lang="en-US" dirty="0"/>
               <a:t>Fourth level</a:t>
             </a:r>
+            <a:endParaRPr lang="en-US" dirty="0"/>
           </a:p>
           <a:p>
             <a:pPr lvl="4"/>
@@ -3744,21 +3764,14 @@
               <a:rPr lang="en-US" dirty="0"/>
               <a:t>Fifth level</a:t>
             </a:r>
+            <a:endParaRPr lang="en-US" dirty="0"/>
           </a:p>
         </p:txBody>
       </p:sp>
       <p:sp>
         <p:nvSpPr>
-          <p:cNvPr id="8" name="Title 1">
-            <a:extLst>
-              <a:ext uri="{FF2B5EF4-FFF2-40B4-BE49-F238E27FC236}">
-                <a16:creationId xmlns:a16="http://schemas.microsoft.com/office/drawing/2014/main" id="{F19F22F4-4B18-0516-26F1-498BF7EBEAB2}"/>
-              </a:ext>
-            </a:extLst>
-          </p:cNvPr>
-          <p:cNvSpPr txBox="1">
-            <a:spLocks/>
-          </p:cNvSpPr>
+          <p:cNvPr id="8" name="Title 1"/>
+          <p:cNvSpPr txBox="1"/>
           <p:nvPr userDrawn="1"/>
         </p:nvSpPr>
         <p:spPr>
@@ -3803,18 +3816,18 @@
               </a:rPr>
               <a:t>Click to edit Master title style</a:t>
             </a:r>
+            <a:endParaRPr lang="en-US" sz="3400" dirty="0">
+              <a:solidFill>
+                <a:schemeClr val="bg1"/>
+              </a:solidFill>
+              <a:latin typeface="Calibri" panose="020F0502020204030204" pitchFamily="34" charset="0"/>
+            </a:endParaRPr>
           </a:p>
         </p:txBody>
       </p:sp>
       <p:sp>
         <p:nvSpPr>
-          <p:cNvPr id="13" name="Freeform: Shape 12">
-            <a:extLst>
-              <a:ext uri="{FF2B5EF4-FFF2-40B4-BE49-F238E27FC236}">
-                <a16:creationId xmlns:a16="http://schemas.microsoft.com/office/drawing/2014/main" id="{D78CF48E-B68F-E9BA-8398-FF8CD727D1A9}"/>
-              </a:ext>
-            </a:extLst>
-          </p:cNvPr>
+          <p:cNvPr id="13" name="Freeform: Shape 12"/>
           <p:cNvSpPr/>
           <p:nvPr userDrawn="1"/>
         </p:nvSpPr>
@@ -3921,13 +3934,7 @@
       </p:sp>
       <p:pic>
         <p:nvPicPr>
-          <p:cNvPr id="4" name="Picture 3">
-            <a:extLst>
-              <a:ext uri="{FF2B5EF4-FFF2-40B4-BE49-F238E27FC236}">
-                <a16:creationId xmlns:a16="http://schemas.microsoft.com/office/drawing/2014/main" id="{5BC983E8-29C2-9FD4-5029-201C1DDD5E80}"/>
-              </a:ext>
-            </a:extLst>
-          </p:cNvPr>
+          <p:cNvPr id="4" name="Picture 3"/>
           <p:cNvPicPr>
             <a:picLocks noChangeAspect="1"/>
           </p:cNvPicPr>
@@ -3956,11 +3963,6 @@
         </p:spPr>
       </p:pic>
     </p:spTree>
-    <p:extLst>
-      <p:ext uri="{BB962C8B-B14F-4D97-AF65-F5344CB8AC3E}">
-        <p14:creationId xmlns:p14="http://schemas.microsoft.com/office/powerpoint/2010/main" val="1907501397"/>
-      </p:ext>
-    </p:extLst>
   </p:cSld>
   <p:clrMapOvr>
     <a:masterClrMapping/>
@@ -4013,6 +4015,7 @@
               <a:rPr lang="en-US" dirty="0"/>
               <a:t>Click to edit Master title style</a:t>
             </a:r>
+            <a:endParaRPr lang="en-US" dirty="0"/>
           </a:p>
         </p:txBody>
       </p:sp>
@@ -4135,15 +4138,11 @@
               <a:rPr lang="en-US"/>
               <a:t>Click to edit Master text styles</a:t>
             </a:r>
+            <a:endParaRPr lang="en-US"/>
           </a:p>
         </p:txBody>
       </p:sp>
     </p:spTree>
-    <p:extLst>
-      <p:ext uri="{BB962C8B-B14F-4D97-AF65-F5344CB8AC3E}">
-        <p14:creationId xmlns:p14="http://schemas.microsoft.com/office/powerpoint/2010/main" val="207278455"/>
-      </p:ext>
-    </p:extLst>
   </p:cSld>
   <p:clrMapOvr>
     <a:masterClrMapping/>
@@ -4202,6 +4201,7 @@
               <a:rPr lang="en-US" dirty="0"/>
               <a:t>Click to edit Master title style</a:t>
             </a:r>
+            <a:endParaRPr lang="en-US" dirty="0"/>
           </a:p>
         </p:txBody>
       </p:sp>
@@ -4235,6 +4235,7 @@
               <a:rPr lang="en-US" dirty="0"/>
               <a:t>Click to edit Master text styles</a:t>
             </a:r>
+            <a:endParaRPr lang="en-US" dirty="0"/>
           </a:p>
           <a:p>
             <a:pPr lvl="1"/>
@@ -4242,6 +4243,7 @@
               <a:rPr lang="en-US" dirty="0"/>
               <a:t>Second level</a:t>
             </a:r>
+            <a:endParaRPr lang="en-US" dirty="0"/>
           </a:p>
           <a:p>
             <a:pPr lvl="2"/>
@@ -4249,6 +4251,7 @@
               <a:rPr lang="en-US" dirty="0"/>
               <a:t>Third level</a:t>
             </a:r>
+            <a:endParaRPr lang="en-US" dirty="0"/>
           </a:p>
           <a:p>
             <a:pPr lvl="3"/>
@@ -4256,6 +4259,7 @@
               <a:rPr lang="en-US" dirty="0"/>
               <a:t>Fourth level</a:t>
             </a:r>
+            <a:endParaRPr lang="en-US" dirty="0"/>
           </a:p>
           <a:p>
             <a:pPr lvl="4"/>
@@ -4263,18 +4267,13 @@
               <a:rPr lang="en-US" dirty="0"/>
               <a:t>Fifth level</a:t>
             </a:r>
+            <a:endParaRPr lang="en-US" dirty="0"/>
           </a:p>
         </p:txBody>
       </p:sp>
       <p:pic>
         <p:nvPicPr>
-          <p:cNvPr id="2052" name="Picture 4" descr="Top Ranked Data Science Institute, Classroom Plus Online Training | Boston  Institute of Analytics">
-            <a:extLst>
-              <a:ext uri="{FF2B5EF4-FFF2-40B4-BE49-F238E27FC236}">
-                <a16:creationId xmlns:a16="http://schemas.microsoft.com/office/drawing/2014/main" id="{D55A4135-B2E5-3A1C-9614-E010D1062B85}"/>
-              </a:ext>
-            </a:extLst>
-          </p:cNvPr>
+          <p:cNvPr id="2052" name="Picture 4" descr="Top Ranked Data Science Institute, Classroom Plus Online Training | Boston  Institute of Analytics"/>
           <p:cNvPicPr>
             <a:picLocks noChangeAspect="1" noChangeArrowheads="1"/>
           </p:cNvPicPr>
@@ -4289,7 +4288,9 @@
             </a:extLst>
           </a:blip>
           <a:srcRect l="4000" r="3112"/>
-          <a:stretch/>
+          <a:stretch>
+            <a:fillRect/>
+          </a:stretch>
         </p:blipFill>
         <p:spPr bwMode="auto">
           <a:xfrm>
@@ -4313,13 +4314,7 @@
       </p:pic>
       <p:sp>
         <p:nvSpPr>
-          <p:cNvPr id="4" name="Rectangle 3">
-            <a:extLst>
-              <a:ext uri="{FF2B5EF4-FFF2-40B4-BE49-F238E27FC236}">
-                <a16:creationId xmlns:a16="http://schemas.microsoft.com/office/drawing/2014/main" id="{3665DF22-91AD-CE85-A78A-CF35969DE003}"/>
-              </a:ext>
-            </a:extLst>
-          </p:cNvPr>
+          <p:cNvPr id="4" name="Rectangle 3"/>
           <p:cNvSpPr/>
           <p:nvPr userDrawn="1"/>
         </p:nvSpPr>
@@ -4378,34 +4373,37 @@
               </a:rPr>
               <a:t>: The information in this document belongs to Boston Institute of Analytics LLC. Any unauthorized sharing of this material is prohibited and subject to legal action under breach of IP and confidentiality clauses. </a:t>
             </a:r>
+            <a:endParaRPr lang="en-US" sz="1100" dirty="0">
+              <a:solidFill>
+                <a:schemeClr val="bg2">
+                  <a:lumMod val="75000"/>
+                </a:schemeClr>
+              </a:solidFill>
+            </a:endParaRPr>
           </a:p>
         </p:txBody>
       </p:sp>
     </p:spTree>
-    <p:extLst>
-      <p:ext uri="{BB962C8B-B14F-4D97-AF65-F5344CB8AC3E}">
-        <p14:creationId xmlns:p14="http://schemas.microsoft.com/office/powerpoint/2010/main" val="1628178356"/>
-      </p:ext>
-    </p:extLst>
   </p:cSld>
   <p:clrMap bg1="lt1" tx1="dk1" bg2="lt2" tx2="dk2" accent1="accent1" accent2="accent2" accent3="accent3" accent4="accent4" accent5="accent5" accent6="accent6" hlink="hlink" folHlink="folHlink"/>
   <p:sldLayoutIdLst>
-    <p:sldLayoutId id="2147483661" r:id="rId1"/>
-    <p:sldLayoutId id="2147483662" r:id="rId2"/>
-    <p:sldLayoutId id="2147483672" r:id="rId3"/>
-    <p:sldLayoutId id="2147483673" r:id="rId4"/>
-    <p:sldLayoutId id="2147483674" r:id="rId5"/>
-    <p:sldLayoutId id="2147483675" r:id="rId6"/>
-    <p:sldLayoutId id="2147483677" r:id="rId7"/>
-    <p:sldLayoutId id="2147483676" r:id="rId8"/>
-    <p:sldLayoutId id="2147483663" r:id="rId9"/>
-    <p:sldLayoutId id="2147483664" r:id="rId10"/>
-    <p:sldLayoutId id="2147483665" r:id="rId11"/>
-    <p:sldLayoutId id="2147483666" r:id="rId12"/>
-    <p:sldLayoutId id="2147483667" r:id="rId13"/>
-    <p:sldLayoutId id="2147483668" r:id="rId14"/>
-    <p:sldLayoutId id="2147483670" r:id="rId15"/>
-    <p:sldLayoutId id="2147483671" r:id="rId16"/>
+    <p:sldLayoutId id="2147483649" r:id="rId1"/>
+    <p:sldLayoutId id="2147483650" r:id="rId2"/>
+    <p:sldLayoutId id="2147483651" r:id="rId3"/>
+    <p:sldLayoutId id="2147483652" r:id="rId4"/>
+    <p:sldLayoutId id="2147483653" r:id="rId5"/>
+    <p:sldLayoutId id="2147483654" r:id="rId6"/>
+    <p:sldLayoutId id="2147483655" r:id="rId7"/>
+    <p:sldLayoutId id="2147483656" r:id="rId8"/>
+    <p:sldLayoutId id="2147483657" r:id="rId9"/>
+    <p:sldLayoutId id="2147483658" r:id="rId10"/>
+    <p:sldLayoutId id="2147483659" r:id="rId11"/>
+    <p:sldLayoutId id="2147483660" r:id="rId12"/>
+    <p:sldLayoutId id="2147483661" r:id="rId13"/>
+    <p:sldLayoutId id="2147483662" r:id="rId14"/>
+    <p:sldLayoutId id="2147483663" r:id="rId15"/>
+    <p:sldLayoutId id="2147483664" r:id="rId16"/>
+    <p:sldLayoutId id="2147483665" r:id="rId17"/>
   </p:sldLayoutIdLst>
   <p:txStyles>
     <p:titleStyle>
@@ -4435,7 +4433,7 @@
         <a:spcBef>
           <a:spcPts val="1000"/>
         </a:spcBef>
-        <a:buFont typeface="Arial" panose="020B0604020202020204" pitchFamily="34" charset="0"/>
+        <a:buFont typeface="Arial" panose="020B0604020202090204" pitchFamily="34" charset="0"/>
         <a:buChar char="•"/>
         <a:defRPr sz="2800" kern="1200">
           <a:solidFill>
@@ -4455,7 +4453,7 @@
         <a:spcBef>
           <a:spcPts val="500"/>
         </a:spcBef>
-        <a:buFont typeface="Arial" panose="020B0604020202020204" pitchFamily="34" charset="0"/>
+        <a:buFont typeface="Arial" panose="020B0604020202090204" pitchFamily="34" charset="0"/>
         <a:buChar char="•"/>
         <a:defRPr sz="2400" kern="1200">
           <a:solidFill>
@@ -4475,7 +4473,7 @@
         <a:spcBef>
           <a:spcPts val="500"/>
         </a:spcBef>
-        <a:buFont typeface="Arial" panose="020B0604020202020204" pitchFamily="34" charset="0"/>
+        <a:buFont typeface="Arial" panose="020B0604020202090204" pitchFamily="34" charset="0"/>
         <a:buChar char="•"/>
         <a:defRPr sz="2000" kern="1200">
           <a:solidFill>
@@ -4495,7 +4493,7 @@
         <a:spcBef>
           <a:spcPts val="500"/>
         </a:spcBef>
-        <a:buFont typeface="Arial" panose="020B0604020202020204" pitchFamily="34" charset="0"/>
+        <a:buFont typeface="Arial" panose="020B0604020202090204" pitchFamily="34" charset="0"/>
         <a:buChar char="•"/>
         <a:defRPr sz="1800" kern="1200">
           <a:solidFill>
@@ -4515,7 +4513,7 @@
         <a:spcBef>
           <a:spcPts val="500"/>
         </a:spcBef>
-        <a:buFont typeface="Arial" panose="020B0604020202020204" pitchFamily="34" charset="0"/>
+        <a:buFont typeface="Arial" panose="020B0604020202090204" pitchFamily="34" charset="0"/>
         <a:buChar char="•"/>
         <a:defRPr sz="1800" kern="1200">
           <a:solidFill>
@@ -4535,7 +4533,7 @@
         <a:spcBef>
           <a:spcPts val="500"/>
         </a:spcBef>
-        <a:buFont typeface="Arial" panose="020B0604020202020204" pitchFamily="34" charset="0"/>
+        <a:buFont typeface="Arial" panose="020B0604020202090204" pitchFamily="34" charset="0"/>
         <a:buChar char="•"/>
         <a:defRPr sz="1800" kern="1200">
           <a:solidFill>
@@ -4553,7 +4551,7 @@
         <a:spcBef>
           <a:spcPts val="500"/>
         </a:spcBef>
-        <a:buFont typeface="Arial" panose="020B0604020202020204" pitchFamily="34" charset="0"/>
+        <a:buFont typeface="Arial" panose="020B0604020202090204" pitchFamily="34" charset="0"/>
         <a:buChar char="•"/>
         <a:defRPr sz="1800" kern="1200">
           <a:solidFill>
@@ -4571,7 +4569,7 @@
         <a:spcBef>
           <a:spcPts val="500"/>
         </a:spcBef>
-        <a:buFont typeface="Arial" panose="020B0604020202020204" pitchFamily="34" charset="0"/>
+        <a:buFont typeface="Arial" panose="020B0604020202090204" pitchFamily="34" charset="0"/>
         <a:buChar char="•"/>
         <a:defRPr sz="1800" kern="1200">
           <a:solidFill>
@@ -4589,7 +4587,7 @@
         <a:spcBef>
           <a:spcPts val="500"/>
         </a:spcBef>
-        <a:buFont typeface="Arial" panose="020B0604020202020204" pitchFamily="34" charset="0"/>
+        <a:buFont typeface="Arial" panose="020B0604020202090204" pitchFamily="34" charset="0"/>
         <a:buChar char="•"/>
         <a:defRPr sz="1800" kern="1200">
           <a:solidFill>
@@ -4719,20 +4717,14 @@
       </p:grpSpPr>
       <p:sp>
         <p:nvSpPr>
-          <p:cNvPr id="2" name="Rectangle 1">
-            <a:extLst>
-              <a:ext uri="{FF2B5EF4-FFF2-40B4-BE49-F238E27FC236}">
-                <a16:creationId xmlns:a16="http://schemas.microsoft.com/office/drawing/2014/main" id="{1A225F15-9B21-01FF-BD6D-D04F30F7A091}"/>
-              </a:ext>
-            </a:extLst>
-          </p:cNvPr>
+          <p:cNvPr id="2" name="Rectangle 1"/>
           <p:cNvSpPr/>
           <p:nvPr/>
         </p:nvSpPr>
         <p:spPr>
           <a:xfrm>
-            <a:off x="1" y="2788290"/>
-            <a:ext cx="12192000" cy="811522"/>
+            <a:off x="0" y="2788285"/>
+            <a:ext cx="12192635" cy="1089660"/>
           </a:xfrm>
           <a:prstGeom prst="rect">
             <a:avLst/>
@@ -4767,17 +4759,27 @@
               <a:rPr lang="en-US" sz="4400" b="1" dirty="0">
                 <a:latin typeface="Calibri" panose="020F0502020204030204" pitchFamily="34" charset="0"/>
               </a:rPr>
-              <a:t>Name of Capstone Project</a:t>
-            </a:r>
+              <a:t>VoxCart</a:t>
+            </a:r>
+            <a:endParaRPr lang="en-US" sz="4400" b="1" dirty="0">
+              <a:latin typeface="Calibri" panose="020F0502020204030204" pitchFamily="34" charset="0"/>
+            </a:endParaRPr>
+          </a:p>
+          <a:p>
+            <a:pPr algn="ctr"/>
+            <a:r>
+              <a:rPr lang="en-US" sz="4400" b="1" dirty="0">
+                <a:latin typeface="Calibri" panose="020F0502020204030204" pitchFamily="34" charset="0"/>
+              </a:rPr>
+              <a:t>Real-Time E-Commerce Voice Assistant</a:t>
+            </a:r>
+            <a:endParaRPr lang="en-US" sz="4400" b="1" dirty="0">
+              <a:latin typeface="Calibri" panose="020F0502020204030204" pitchFamily="34" charset="0"/>
+            </a:endParaRPr>
           </a:p>
         </p:txBody>
       </p:sp>
     </p:spTree>
-    <p:extLst>
-      <p:ext uri="{BB962C8B-B14F-4D97-AF65-F5344CB8AC3E}">
-        <p14:creationId xmlns:p14="http://schemas.microsoft.com/office/powerpoint/2010/main" val="1024334718"/>
-      </p:ext>
-    </p:extLst>
   </p:cSld>
   <p:clrMapOvr>
     <a:masterClrMapping/>
@@ -4785,7 +4787,7 @@
 </p:sld>
 </file>
 
-<file path=ppt/slides/slide2.xml><?xml version="1.0" encoding="utf-8"?>
+<file path=ppt/slides/slide10.xml><?xml version="1.0" encoding="utf-8"?>
 <p:sld xmlns:a="http://schemas.openxmlformats.org/drawingml/2006/main" xmlns:r="http://schemas.openxmlformats.org/officeDocument/2006/relationships" xmlns:p="http://schemas.openxmlformats.org/presentationml/2006/main">
   <p:cSld>
     <p:spTree>
@@ -4804,13 +4806,7 @@
       </p:grpSpPr>
       <p:sp>
         <p:nvSpPr>
-          <p:cNvPr id="2" name="Title 1">
-            <a:extLst>
-              <a:ext uri="{FF2B5EF4-FFF2-40B4-BE49-F238E27FC236}">
-                <a16:creationId xmlns:a16="http://schemas.microsoft.com/office/drawing/2014/main" id="{C938B360-A630-EE21-210D-844E85048949}"/>
-              </a:ext>
-            </a:extLst>
-          </p:cNvPr>
+          <p:cNvPr id="4" name="Title 3"/>
           <p:cNvSpPr>
             <a:spLocks noGrp="1"/>
           </p:cNvSpPr>
@@ -4820,48 +4816,23 @@
         </p:nvSpPr>
         <p:spPr/>
         <p:txBody>
-          <a:bodyPr/>
+          <a:bodyPr>
+            <a:normAutofit/>
+          </a:bodyPr>
           <a:lstStyle/>
           <a:p>
-            <a:r>
-              <a:rPr lang="en-US" dirty="0"/>
-              <a:t>Agenda</a:t>
+            <a:br>
+              <a:rPr lang="en-IN" dirty="0"/>
+            </a:br>
+            <a:r>
+              <a:rPr lang="en-IN" dirty="0"/>
+              <a:t>Questions ?</a:t>
             </a:r>
             <a:endParaRPr lang="en-IN" dirty="0"/>
-          </a:p>
-        </p:txBody>
-      </p:sp>
-      <p:sp>
-        <p:nvSpPr>
-          <p:cNvPr id="3" name="Content Placeholder 2">
-            <a:extLst>
-              <a:ext uri="{FF2B5EF4-FFF2-40B4-BE49-F238E27FC236}">
-                <a16:creationId xmlns:a16="http://schemas.microsoft.com/office/drawing/2014/main" id="{67B003C9-103A-47E6-D7EB-87D0A8CB5431}"/>
-              </a:ext>
-            </a:extLst>
-          </p:cNvPr>
-          <p:cNvSpPr>
-            <a:spLocks noGrp="1"/>
-          </p:cNvSpPr>
-          <p:nvPr>
-            <p:ph idx="1"/>
-          </p:nvPr>
-        </p:nvSpPr>
-        <p:spPr/>
-        <p:txBody>
-          <a:bodyPr/>
-          <a:lstStyle/>
-          <a:p>
-            <a:endParaRPr lang="en-IN"/>
           </a:p>
         </p:txBody>
       </p:sp>
     </p:spTree>
-    <p:extLst>
-      <p:ext uri="{BB962C8B-B14F-4D97-AF65-F5344CB8AC3E}">
-        <p14:creationId xmlns:p14="http://schemas.microsoft.com/office/powerpoint/2010/main" val="1953804542"/>
-      </p:ext>
-    </p:extLst>
   </p:cSld>
   <p:clrMapOvr>
     <a:masterClrMapping/>
@@ -4869,7 +4840,7 @@
 </p:sld>
 </file>
 
-<file path=ppt/slides/slide3.xml><?xml version="1.0" encoding="utf-8"?>
+<file path=ppt/slides/slide11.xml><?xml version="1.0" encoding="utf-8"?>
 <p:sld xmlns:a="http://schemas.openxmlformats.org/drawingml/2006/main" xmlns:r="http://schemas.openxmlformats.org/officeDocument/2006/relationships" xmlns:p="http://schemas.openxmlformats.org/presentationml/2006/main">
   <p:cSld>
     <p:spTree>
@@ -4888,512 +4859,7 @@
       </p:grpSpPr>
       <p:sp>
         <p:nvSpPr>
-          <p:cNvPr id="2" name="Title 1">
-            <a:extLst>
-              <a:ext uri="{FF2B5EF4-FFF2-40B4-BE49-F238E27FC236}">
-                <a16:creationId xmlns:a16="http://schemas.microsoft.com/office/drawing/2014/main" id="{61E853F5-3FF5-F820-B593-B4F4AF27A2B6}"/>
-              </a:ext>
-            </a:extLst>
-          </p:cNvPr>
-          <p:cNvSpPr>
-            <a:spLocks noGrp="1"/>
-          </p:cNvSpPr>
-          <p:nvPr>
-            <p:ph type="title"/>
-          </p:nvPr>
-        </p:nvSpPr>
-        <p:spPr/>
-        <p:txBody>
-          <a:bodyPr/>
-          <a:lstStyle/>
-          <a:p>
-            <a:r>
-              <a:rPr lang="en-US" dirty="0"/>
-              <a:t>Title</a:t>
-            </a:r>
-            <a:endParaRPr lang="en-IN" dirty="0"/>
-          </a:p>
-        </p:txBody>
-      </p:sp>
-      <p:sp>
-        <p:nvSpPr>
-          <p:cNvPr id="3" name="Content Placeholder 2">
-            <a:extLst>
-              <a:ext uri="{FF2B5EF4-FFF2-40B4-BE49-F238E27FC236}">
-                <a16:creationId xmlns:a16="http://schemas.microsoft.com/office/drawing/2014/main" id="{5498D2CD-3F24-F46B-D0FD-F213BDB36EC1}"/>
-              </a:ext>
-            </a:extLst>
-          </p:cNvPr>
-          <p:cNvSpPr>
-            <a:spLocks noGrp="1"/>
-          </p:cNvSpPr>
-          <p:nvPr>
-            <p:ph idx="1"/>
-          </p:nvPr>
-        </p:nvSpPr>
-        <p:spPr>
-          <a:xfrm>
-            <a:off x="678884" y="1675075"/>
-            <a:ext cx="10834234" cy="4398066"/>
-          </a:xfrm>
-          <a:prstGeom prst="rect">
-            <a:avLst/>
-          </a:prstGeom>
-        </p:spPr>
-        <p:txBody>
-          <a:bodyPr/>
-          <a:lstStyle>
-            <a:lvl1pPr>
-              <a:defRPr>
-                <a:solidFill>
-                  <a:schemeClr val="bg2">
-                    <a:lumMod val="10000"/>
-                  </a:schemeClr>
-                </a:solidFill>
-              </a:defRPr>
-            </a:lvl1pPr>
-            <a:lvl2pPr>
-              <a:defRPr>
-                <a:solidFill>
-                  <a:schemeClr val="bg2">
-                    <a:lumMod val="10000"/>
-                  </a:schemeClr>
-                </a:solidFill>
-              </a:defRPr>
-            </a:lvl2pPr>
-            <a:lvl3pPr>
-              <a:defRPr>
-                <a:solidFill>
-                  <a:schemeClr val="bg2">
-                    <a:lumMod val="10000"/>
-                  </a:schemeClr>
-                </a:solidFill>
-              </a:defRPr>
-            </a:lvl3pPr>
-            <a:lvl4pPr>
-              <a:defRPr>
-                <a:solidFill>
-                  <a:schemeClr val="bg2">
-                    <a:lumMod val="10000"/>
-                  </a:schemeClr>
-                </a:solidFill>
-              </a:defRPr>
-            </a:lvl4pPr>
-            <a:lvl5pPr>
-              <a:defRPr>
-                <a:solidFill>
-                  <a:schemeClr val="bg2">
-                    <a:lumMod val="10000"/>
-                  </a:schemeClr>
-                </a:solidFill>
-              </a:defRPr>
-            </a:lvl5pPr>
-          </a:lstStyle>
-          <a:p>
-            <a:pPr lvl="0"/>
-            <a:r>
-              <a:rPr lang="en-US" dirty="0"/>
-              <a:t>Click to edit Master text styles</a:t>
-            </a:r>
-          </a:p>
-          <a:p>
-            <a:pPr lvl="1"/>
-            <a:r>
-              <a:rPr lang="en-US" dirty="0"/>
-              <a:t>Second level</a:t>
-            </a:r>
-          </a:p>
-          <a:p>
-            <a:pPr lvl="2"/>
-            <a:r>
-              <a:rPr lang="en-US" dirty="0"/>
-              <a:t>Third level</a:t>
-            </a:r>
-          </a:p>
-          <a:p>
-            <a:pPr lvl="3"/>
-            <a:r>
-              <a:rPr lang="en-US" dirty="0"/>
-              <a:t>Fourth level</a:t>
-            </a:r>
-          </a:p>
-          <a:p>
-            <a:pPr lvl="4"/>
-            <a:r>
-              <a:rPr lang="en-US" dirty="0"/>
-              <a:t>Fifth level</a:t>
-            </a:r>
-          </a:p>
-        </p:txBody>
-      </p:sp>
-    </p:spTree>
-    <p:extLst>
-      <p:ext uri="{BB962C8B-B14F-4D97-AF65-F5344CB8AC3E}">
-        <p14:creationId xmlns:p14="http://schemas.microsoft.com/office/powerpoint/2010/main" val="2272459462"/>
-      </p:ext>
-    </p:extLst>
-  </p:cSld>
-  <p:clrMapOvr>
-    <a:masterClrMapping/>
-  </p:clrMapOvr>
-</p:sld>
-</file>
-
-<file path=ppt/slides/slide4.xml><?xml version="1.0" encoding="utf-8"?>
-<p:sld xmlns:a="http://schemas.openxmlformats.org/drawingml/2006/main" xmlns:r="http://schemas.openxmlformats.org/officeDocument/2006/relationships" xmlns:p="http://schemas.openxmlformats.org/presentationml/2006/main">
-  <p:cSld>
-    <p:spTree>
-      <p:nvGrpSpPr>
-        <p:cNvPr id="1" name=""/>
-        <p:cNvGrpSpPr/>
-        <p:nvPr/>
-      </p:nvGrpSpPr>
-      <p:grpSpPr>
-        <a:xfrm>
-          <a:off x="0" y="0"/>
-          <a:ext cx="0" cy="0"/>
-          <a:chOff x="0" y="0"/>
-          <a:chExt cx="0" cy="0"/>
-        </a:xfrm>
-      </p:grpSpPr>
-      <p:sp>
-        <p:nvSpPr>
-          <p:cNvPr id="4" name="Title 3">
-            <a:extLst>
-              <a:ext uri="{FF2B5EF4-FFF2-40B4-BE49-F238E27FC236}">
-                <a16:creationId xmlns:a16="http://schemas.microsoft.com/office/drawing/2014/main" id="{F69DB3DB-2D6A-4800-21E5-71369CC117F1}"/>
-              </a:ext>
-            </a:extLst>
-          </p:cNvPr>
-          <p:cNvSpPr>
-            <a:spLocks noGrp="1"/>
-          </p:cNvSpPr>
-          <p:nvPr>
-            <p:ph type="title"/>
-          </p:nvPr>
-        </p:nvSpPr>
-        <p:spPr/>
-        <p:txBody>
-          <a:bodyPr/>
-          <a:lstStyle/>
-          <a:p>
-            <a:endParaRPr lang="en-IN"/>
-          </a:p>
-        </p:txBody>
-      </p:sp>
-      <p:sp>
-        <p:nvSpPr>
-          <p:cNvPr id="5" name="Content Placeholder 4">
-            <a:extLst>
-              <a:ext uri="{FF2B5EF4-FFF2-40B4-BE49-F238E27FC236}">
-                <a16:creationId xmlns:a16="http://schemas.microsoft.com/office/drawing/2014/main" id="{911E276C-DF85-3591-E888-F5B1B9B1522C}"/>
-              </a:ext>
-            </a:extLst>
-          </p:cNvPr>
-          <p:cNvSpPr>
-            <a:spLocks noGrp="1"/>
-          </p:cNvSpPr>
-          <p:nvPr>
-            <p:ph idx="1"/>
-          </p:nvPr>
-        </p:nvSpPr>
-        <p:spPr/>
-        <p:txBody>
-          <a:bodyPr/>
-          <a:lstStyle/>
-          <a:p>
-            <a:endParaRPr lang="en-IN"/>
-          </a:p>
-        </p:txBody>
-      </p:sp>
-    </p:spTree>
-    <p:extLst>
-      <p:ext uri="{BB962C8B-B14F-4D97-AF65-F5344CB8AC3E}">
-        <p14:creationId xmlns:p14="http://schemas.microsoft.com/office/powerpoint/2010/main" val="1344420264"/>
-      </p:ext>
-    </p:extLst>
-  </p:cSld>
-  <p:clrMapOvr>
-    <a:masterClrMapping/>
-  </p:clrMapOvr>
-</p:sld>
-</file>
-
-<file path=ppt/slides/slide5.xml><?xml version="1.0" encoding="utf-8"?>
-<p:sld xmlns:a="http://schemas.openxmlformats.org/drawingml/2006/main" xmlns:r="http://schemas.openxmlformats.org/officeDocument/2006/relationships" xmlns:p="http://schemas.openxmlformats.org/presentationml/2006/main">
-  <p:cSld>
-    <p:spTree>
-      <p:nvGrpSpPr>
-        <p:cNvPr id="1" name=""/>
-        <p:cNvGrpSpPr/>
-        <p:nvPr/>
-      </p:nvGrpSpPr>
-      <p:grpSpPr>
-        <a:xfrm>
-          <a:off x="0" y="0"/>
-          <a:ext cx="0" cy="0"/>
-          <a:chOff x="0" y="0"/>
-          <a:chExt cx="0" cy="0"/>
-        </a:xfrm>
-      </p:grpSpPr>
-      <p:sp>
-        <p:nvSpPr>
-          <p:cNvPr id="4" name="Title 3">
-            <a:extLst>
-              <a:ext uri="{FF2B5EF4-FFF2-40B4-BE49-F238E27FC236}">
-                <a16:creationId xmlns:a16="http://schemas.microsoft.com/office/drawing/2014/main" id="{96A923FD-EE06-48F2-482E-88F38D200251}"/>
-              </a:ext>
-            </a:extLst>
-          </p:cNvPr>
-          <p:cNvSpPr>
-            <a:spLocks noGrp="1"/>
-          </p:cNvSpPr>
-          <p:nvPr>
-            <p:ph type="title"/>
-          </p:nvPr>
-        </p:nvSpPr>
-        <p:spPr/>
-        <p:txBody>
-          <a:bodyPr/>
-          <a:lstStyle/>
-          <a:p>
-            <a:endParaRPr lang="en-IN"/>
-          </a:p>
-        </p:txBody>
-      </p:sp>
-      <p:sp>
-        <p:nvSpPr>
-          <p:cNvPr id="5" name="Content Placeholder 4">
-            <a:extLst>
-              <a:ext uri="{FF2B5EF4-FFF2-40B4-BE49-F238E27FC236}">
-                <a16:creationId xmlns:a16="http://schemas.microsoft.com/office/drawing/2014/main" id="{8C74B58E-E923-F7F3-8627-D12DF58EC0C5}"/>
-              </a:ext>
-            </a:extLst>
-          </p:cNvPr>
-          <p:cNvSpPr>
-            <a:spLocks noGrp="1"/>
-          </p:cNvSpPr>
-          <p:nvPr>
-            <p:ph idx="1"/>
-          </p:nvPr>
-        </p:nvSpPr>
-        <p:spPr/>
-        <p:txBody>
-          <a:bodyPr/>
-          <a:lstStyle/>
-          <a:p>
-            <a:endParaRPr lang="en-IN"/>
-          </a:p>
-        </p:txBody>
-      </p:sp>
-    </p:spTree>
-    <p:extLst>
-      <p:ext uri="{BB962C8B-B14F-4D97-AF65-F5344CB8AC3E}">
-        <p14:creationId xmlns:p14="http://schemas.microsoft.com/office/powerpoint/2010/main" val="1594365271"/>
-      </p:ext>
-    </p:extLst>
-  </p:cSld>
-  <p:clrMapOvr>
-    <a:masterClrMapping/>
-  </p:clrMapOvr>
-</p:sld>
-</file>
-
-<file path=ppt/slides/slide6.xml><?xml version="1.0" encoding="utf-8"?>
-<p:sld xmlns:a="http://schemas.openxmlformats.org/drawingml/2006/main" xmlns:r="http://schemas.openxmlformats.org/officeDocument/2006/relationships" xmlns:p="http://schemas.openxmlformats.org/presentationml/2006/main">
-  <p:cSld>
-    <p:spTree>
-      <p:nvGrpSpPr>
-        <p:cNvPr id="1" name=""/>
-        <p:cNvGrpSpPr/>
-        <p:nvPr/>
-      </p:nvGrpSpPr>
-      <p:grpSpPr>
-        <a:xfrm>
-          <a:off x="0" y="0"/>
-          <a:ext cx="0" cy="0"/>
-          <a:chOff x="0" y="0"/>
-          <a:chExt cx="0" cy="0"/>
-        </a:xfrm>
-      </p:grpSpPr>
-      <p:sp>
-        <p:nvSpPr>
-          <p:cNvPr id="4" name="Title 3">
-            <a:extLst>
-              <a:ext uri="{FF2B5EF4-FFF2-40B4-BE49-F238E27FC236}">
-                <a16:creationId xmlns:a16="http://schemas.microsoft.com/office/drawing/2014/main" id="{C5BA2E58-FEC9-D54D-ACC0-E7CEEF5F42E4}"/>
-              </a:ext>
-            </a:extLst>
-          </p:cNvPr>
-          <p:cNvSpPr>
-            <a:spLocks noGrp="1"/>
-          </p:cNvSpPr>
-          <p:nvPr>
-            <p:ph type="title"/>
-          </p:nvPr>
-        </p:nvSpPr>
-        <p:spPr/>
-        <p:txBody>
-          <a:bodyPr>
-            <a:normAutofit/>
-          </a:bodyPr>
-          <a:lstStyle/>
-          <a:p>
-            <a:r>
-              <a:rPr lang="en-US" dirty="0"/>
-              <a:t>Title</a:t>
-            </a:r>
-          </a:p>
-        </p:txBody>
-      </p:sp>
-      <p:sp>
-        <p:nvSpPr>
-          <p:cNvPr id="2" name="Content Placeholder 1">
-            <a:extLst>
-              <a:ext uri="{FF2B5EF4-FFF2-40B4-BE49-F238E27FC236}">
-                <a16:creationId xmlns:a16="http://schemas.microsoft.com/office/drawing/2014/main" id="{C9565BAE-48A9-8300-4E79-87D77968413B}"/>
-              </a:ext>
-            </a:extLst>
-          </p:cNvPr>
-          <p:cNvSpPr>
-            <a:spLocks noGrp="1"/>
-          </p:cNvSpPr>
-          <p:nvPr>
-            <p:ph idx="1"/>
-          </p:nvPr>
-        </p:nvSpPr>
-        <p:spPr/>
-        <p:txBody>
-          <a:bodyPr lIns="0" tIns="0" rIns="0" bIns="0" numCol="2">
-            <a:normAutofit/>
-          </a:bodyPr>
-          <a:lstStyle/>
-          <a:p>
-            <a:pPr marL="0" indent="0">
-              <a:buNone/>
-            </a:pPr>
-            <a:r>
-              <a:rPr lang="en-US" sz="2200" b="1" dirty="0">
-                <a:solidFill>
-                  <a:schemeClr val="tx1"/>
-                </a:solidFill>
-              </a:rPr>
-              <a:t>C</a:t>
-            </a:r>
-            <a:r>
-              <a:rPr lang="en-IN" sz="2200" b="1" dirty="0" err="1">
-                <a:solidFill>
-                  <a:schemeClr val="tx1"/>
-                </a:solidFill>
-              </a:rPr>
-              <a:t>ontent</a:t>
-            </a:r>
-            <a:endParaRPr lang="en-IN" sz="2200" dirty="0"/>
-          </a:p>
-        </p:txBody>
-      </p:sp>
-    </p:spTree>
-    <p:extLst>
-      <p:ext uri="{BB962C8B-B14F-4D97-AF65-F5344CB8AC3E}">
-        <p14:creationId xmlns:p14="http://schemas.microsoft.com/office/powerpoint/2010/main" val="2845992452"/>
-      </p:ext>
-    </p:extLst>
-  </p:cSld>
-  <p:clrMapOvr>
-    <a:masterClrMapping/>
-  </p:clrMapOvr>
-</p:sld>
-</file>
-
-<file path=ppt/slides/slide7.xml><?xml version="1.0" encoding="utf-8"?>
-<p:sld xmlns:a="http://schemas.openxmlformats.org/drawingml/2006/main" xmlns:r="http://schemas.openxmlformats.org/officeDocument/2006/relationships" xmlns:p="http://schemas.openxmlformats.org/presentationml/2006/main">
-  <p:cSld>
-    <p:spTree>
-      <p:nvGrpSpPr>
-        <p:cNvPr id="1" name=""/>
-        <p:cNvGrpSpPr/>
-        <p:nvPr/>
-      </p:nvGrpSpPr>
-      <p:grpSpPr>
-        <a:xfrm>
-          <a:off x="0" y="0"/>
-          <a:ext cx="0" cy="0"/>
-          <a:chOff x="0" y="0"/>
-          <a:chExt cx="0" cy="0"/>
-        </a:xfrm>
-      </p:grpSpPr>
-      <p:sp>
-        <p:nvSpPr>
-          <p:cNvPr id="4" name="Title 3">
-            <a:extLst>
-              <a:ext uri="{FF2B5EF4-FFF2-40B4-BE49-F238E27FC236}">
-                <a16:creationId xmlns:a16="http://schemas.microsoft.com/office/drawing/2014/main" id="{6F80C857-4384-387E-D3B0-A675AA2C932C}"/>
-              </a:ext>
-            </a:extLst>
-          </p:cNvPr>
-          <p:cNvSpPr>
-            <a:spLocks noGrp="1"/>
-          </p:cNvSpPr>
-          <p:nvPr>
-            <p:ph type="title"/>
-          </p:nvPr>
-        </p:nvSpPr>
-        <p:spPr/>
-        <p:txBody>
-          <a:bodyPr>
-            <a:normAutofit/>
-          </a:bodyPr>
-          <a:lstStyle/>
-          <a:p>
-            <a:br>
-              <a:rPr lang="en-IN" dirty="0"/>
-            </a:br>
-            <a:r>
-              <a:rPr lang="en-IN" dirty="0"/>
-              <a:t>Questions ?</a:t>
-            </a:r>
-          </a:p>
-        </p:txBody>
-      </p:sp>
-    </p:spTree>
-    <p:extLst>
-      <p:ext uri="{BB962C8B-B14F-4D97-AF65-F5344CB8AC3E}">
-        <p14:creationId xmlns:p14="http://schemas.microsoft.com/office/powerpoint/2010/main" val="1173862094"/>
-      </p:ext>
-    </p:extLst>
-  </p:cSld>
-  <p:clrMapOvr>
-    <a:masterClrMapping/>
-  </p:clrMapOvr>
-</p:sld>
-</file>
-
-<file path=ppt/slides/slide8.xml><?xml version="1.0" encoding="utf-8"?>
-<p:sld xmlns:a="http://schemas.openxmlformats.org/drawingml/2006/main" xmlns:r="http://schemas.openxmlformats.org/officeDocument/2006/relationships" xmlns:p="http://schemas.openxmlformats.org/presentationml/2006/main">
-  <p:cSld>
-    <p:spTree>
-      <p:nvGrpSpPr>
-        <p:cNvPr id="1" name=""/>
-        <p:cNvGrpSpPr/>
-        <p:nvPr/>
-      </p:nvGrpSpPr>
-      <p:grpSpPr>
-        <a:xfrm>
-          <a:off x="0" y="0"/>
-          <a:ext cx="0" cy="0"/>
-          <a:chOff x="0" y="0"/>
-          <a:chExt cx="0" cy="0"/>
-        </a:xfrm>
-      </p:grpSpPr>
-      <p:sp>
-        <p:nvSpPr>
-          <p:cNvPr id="5" name="Rectangle 4">
-            <a:extLst>
-              <a:ext uri="{FF2B5EF4-FFF2-40B4-BE49-F238E27FC236}">
-                <a16:creationId xmlns:a16="http://schemas.microsoft.com/office/drawing/2014/main" id="{01DBBFEC-17D0-1D96-6CDC-0E5B94EF077B}"/>
-              </a:ext>
-            </a:extLst>
-          </p:cNvPr>
+          <p:cNvPr id="5" name="Rectangle 4"/>
           <p:cNvSpPr/>
           <p:nvPr/>
         </p:nvSpPr>
@@ -5444,16 +4910,3912 @@
         </p:txBody>
       </p:sp>
     </p:spTree>
-    <p:extLst>
-      <p:ext uri="{BB962C8B-B14F-4D97-AF65-F5344CB8AC3E}">
-        <p14:creationId xmlns:p14="http://schemas.microsoft.com/office/powerpoint/2010/main" val="2438371579"/>
-      </p:ext>
-    </p:extLst>
   </p:cSld>
   <p:clrMapOvr>
     <a:masterClrMapping/>
   </p:clrMapOvr>
 </p:sld>
+</file>
+
+<file path=ppt/slides/slide12.xml><?xml version="1.0" encoding="utf-8"?>
+<p:sld xmlns:a="http://schemas.openxmlformats.org/drawingml/2006/main" xmlns:p="http://schemas.openxmlformats.org/presentationml/2006/main" xmlns:r="http://schemas.openxmlformats.org/officeDocument/2006/relationships">
+  <p:cSld>
+    <p:bg>
+      <p:bgPr>
+        <a:solidFill>
+          <a:srgbClr val="F5F7FA"/>
+        </a:solidFill>
+        <a:effectLst/>
+      </p:bgPr>
+    </p:bg>
+    <p:spTree>
+      <p:nvGrpSpPr>
+        <p:cNvPr id="1" name=""/>
+        <p:cNvGrpSpPr/>
+        <p:nvPr/>
+      </p:nvGrpSpPr>
+      <p:grpSpPr/>
+      <p:sp>
+        <p:nvSpPr>
+          <p:cNvPr id="2" name="Title 1"/>
+          <p:cNvSpPr>
+            <a:spLocks noGrp="1"/>
+          </p:cNvSpPr>
+          <p:nvPr>
+            <p:ph type="title"/>
+          </p:nvPr>
+        </p:nvSpPr>
+        <p:spPr/>
+        <p:txBody>
+          <a:bodyPr/>
+          <a:lstStyle/>
+          <a:p/>
+        </p:txBody>
+      </p:sp>
+      <p:sp>
+        <p:nvSpPr>
+          <p:cNvPr id="3" name="Content Placeholder 2"/>
+          <p:cNvSpPr>
+            <a:spLocks noGrp="1"/>
+          </p:cNvSpPr>
+          <p:nvPr>
+            <p:ph idx="1"/>
+          </p:nvPr>
+        </p:nvSpPr>
+        <p:spPr/>
+        <p:txBody>
+          <a:bodyPr/>
+          <a:lstStyle/>
+          <a:p/>
+        </p:txBody>
+      </p:sp>
+      <p:sp>
+        <p:nvSpPr>
+          <p:cNvPr id="4" name="TextBox 3"/>
+          <p:cNvSpPr txBox="1"/>
+          <p:nvPr/>
+        </p:nvSpPr>
+        <p:spPr>
+          <a:xfrm>
+            <a:off x="502920" y="320040"/>
+            <a:ext cx="11155680" cy="640080"/>
+          </a:xfrm>
+          <a:prstGeom prst="rect">
+            <a:avLst/>
+          </a:prstGeom>
+          <a:noFill/>
+        </p:spPr>
+        <p:txBody>
+          <a:bodyPr wrap="none">
+            <a:spAutoFit/>
+          </a:bodyPr>
+          <a:lstStyle/>
+          <a:p>
+            <a:pPr>
+              <a:defRPr sz="3400" b="1">
+                <a:solidFill>
+                  <a:srgbClr val="172533"/>
+                </a:solidFill>
+              </a:defRPr>
+            </a:pPr>
+            <a:r>
+              <a:t>Next Steps for Enhancement</a:t>
+            </a:r>
+          </a:p>
+        </p:txBody>
+      </p:sp>
+      <p:sp>
+        <p:nvSpPr>
+          <p:cNvPr id="5" name="TextBox 4"/>
+          <p:cNvSpPr txBox="1"/>
+          <p:nvPr/>
+        </p:nvSpPr>
+        <p:spPr>
+          <a:xfrm>
+            <a:off x="530352" y="932688"/>
+            <a:ext cx="10881360" cy="320040"/>
+          </a:xfrm>
+          <a:prstGeom prst="rect">
+            <a:avLst/>
+          </a:prstGeom>
+          <a:noFill/>
+        </p:spPr>
+        <p:txBody>
+          <a:bodyPr wrap="none">
+            <a:spAutoFit/>
+          </a:bodyPr>
+          <a:lstStyle/>
+          <a:p>
+            <a:pPr>
+              <a:defRPr sz="1500">
+                <a:solidFill>
+                  <a:srgbClr val="526070"/>
+                </a:solidFill>
+              </a:defRPr>
+            </a:pPr>
+            <a:r>
+              <a:t>Moving VoxCart from capstone prototype to production-ready assistant</a:t>
+            </a:r>
+          </a:p>
+        </p:txBody>
+      </p:sp>
+      <p:sp>
+        <p:nvSpPr>
+          <p:cNvPr id="6" name="Rounded Rectangle 5"/>
+          <p:cNvSpPr/>
+          <p:nvPr/>
+        </p:nvSpPr>
+        <p:spPr>
+          <a:xfrm>
+            <a:off x="640080" y="1508760"/>
+            <a:ext cx="3611880" cy="1143000"/>
+          </a:xfrm>
+          <a:prstGeom prst="roundRect">
+            <a:avLst/>
+          </a:prstGeom>
+          <a:solidFill>
+            <a:srgbClr val="FFFFFF"/>
+          </a:solidFill>
+          <a:ln w="12700">
+            <a:solidFill>
+              <a:srgbClr val="D7DEE6"/>
+            </a:solidFill>
+          </a:ln>
+        </p:spPr>
+        <p:style>
+          <a:lnRef idx="1">
+            <a:schemeClr val="accent1"/>
+          </a:lnRef>
+          <a:fillRef idx="3">
+            <a:schemeClr val="accent1"/>
+          </a:fillRef>
+          <a:effectRef idx="2">
+            <a:schemeClr val="accent1"/>
+          </a:effectRef>
+          <a:fontRef idx="minor">
+            <a:schemeClr val="lt1"/>
+          </a:fontRef>
+        </p:style>
+        <p:txBody>
+          <a:bodyPr rtlCol="0" anchor="ctr" lIns="182880" rIns="128016" tIns="109728" bIns="73152"/>
+          <a:lstStyle/>
+          <a:p>
+            <a:pPr algn="ctr">
+              <a:spcAft>
+                <a:spcPts val="500"/>
+              </a:spcAft>
+              <a:defRPr sz="1400" b="1">
+                <a:solidFill>
+                  <a:srgbClr val="1E2C3A"/>
+                </a:solidFill>
+              </a:defRPr>
+            </a:pPr>
+            <a:r>
+              <a:t>Security &amp; Access</a:t>
+            </a:r>
+          </a:p>
+          <a:p>
+            <a:pPr>
+              <a:lnSpc>
+                <a:spcPct val="110000"/>
+              </a:lnSpc>
+              <a:defRPr sz="1050">
+                <a:solidFill>
+                  <a:srgbClr val="505B68"/>
+                </a:solidFill>
+              </a:defRPr>
+            </a:pPr>
+            <a:r>
+              <a:t>Authenticate users before token minting; restrict CORS; add rate limits.</a:t>
+            </a:r>
+          </a:p>
+        </p:txBody>
+      </p:sp>
+      <p:sp>
+        <p:nvSpPr>
+          <p:cNvPr id="7" name="Rectangle 6"/>
+          <p:cNvSpPr/>
+          <p:nvPr/>
+        </p:nvSpPr>
+        <p:spPr>
+          <a:xfrm>
+            <a:off x="640080" y="1508760"/>
+            <a:ext cx="73152" cy="1143000"/>
+          </a:xfrm>
+          <a:prstGeom prst="rect">
+            <a:avLst/>
+          </a:prstGeom>
+          <a:solidFill>
+            <a:srgbClr val="2A548C"/>
+          </a:solidFill>
+          <a:ln>
+            <a:noFill/>
+          </a:ln>
+        </p:spPr>
+        <p:style>
+          <a:lnRef idx="1">
+            <a:schemeClr val="accent1"/>
+          </a:lnRef>
+          <a:fillRef idx="3">
+            <a:schemeClr val="accent1"/>
+          </a:fillRef>
+          <a:effectRef idx="2">
+            <a:schemeClr val="accent1"/>
+          </a:effectRef>
+          <a:fontRef idx="minor">
+            <a:schemeClr val="lt1"/>
+          </a:fontRef>
+        </p:style>
+        <p:txBody>
+          <a:bodyPr rtlCol="0" anchor="ctr"/>
+          <a:lstStyle/>
+          <a:p>
+            <a:pPr algn="ctr"/>
+          </a:p>
+        </p:txBody>
+      </p:sp>
+      <p:sp>
+        <p:nvSpPr>
+          <p:cNvPr id="8" name="Rounded Rectangle 7"/>
+          <p:cNvSpPr/>
+          <p:nvPr/>
+        </p:nvSpPr>
+        <p:spPr>
+          <a:xfrm>
+            <a:off x="4526280" y="1508760"/>
+            <a:ext cx="3611880" cy="1143000"/>
+          </a:xfrm>
+          <a:prstGeom prst="roundRect">
+            <a:avLst/>
+          </a:prstGeom>
+          <a:solidFill>
+            <a:srgbClr val="FFFFFF"/>
+          </a:solidFill>
+          <a:ln w="12700">
+            <a:solidFill>
+              <a:srgbClr val="D7DEE6"/>
+            </a:solidFill>
+          </a:ln>
+        </p:spPr>
+        <p:style>
+          <a:lnRef idx="1">
+            <a:schemeClr val="accent1"/>
+          </a:lnRef>
+          <a:fillRef idx="3">
+            <a:schemeClr val="accent1"/>
+          </a:fillRef>
+          <a:effectRef idx="2">
+            <a:schemeClr val="accent1"/>
+          </a:effectRef>
+          <a:fontRef idx="minor">
+            <a:schemeClr val="lt1"/>
+          </a:fontRef>
+        </p:style>
+        <p:txBody>
+          <a:bodyPr rtlCol="0" anchor="ctr" lIns="182880" rIns="128016" tIns="109728" bIns="73152"/>
+          <a:lstStyle/>
+          <a:p>
+            <a:pPr algn="ctr">
+              <a:spcAft>
+                <a:spcPts val="500"/>
+              </a:spcAft>
+              <a:defRPr sz="1400" b="1">
+                <a:solidFill>
+                  <a:srgbClr val="1E2C3A"/>
+                </a:solidFill>
+              </a:defRPr>
+            </a:pPr>
+            <a:r>
+              <a:t>Order Ownership</a:t>
+            </a:r>
+          </a:p>
+          <a:p>
+            <a:pPr>
+              <a:lnSpc>
+                <a:spcPct val="110000"/>
+              </a:lnSpc>
+              <a:defRPr sz="1050">
+                <a:solidFill>
+                  <a:srgbClr val="505B68"/>
+                </a:solidFill>
+              </a:defRPr>
+            </a:pPr>
+            <a:r>
+              <a:t>Verify that a user can access only their own orders before returning status.</a:t>
+            </a:r>
+          </a:p>
+        </p:txBody>
+      </p:sp>
+      <p:sp>
+        <p:nvSpPr>
+          <p:cNvPr id="9" name="Rectangle 8"/>
+          <p:cNvSpPr/>
+          <p:nvPr/>
+        </p:nvSpPr>
+        <p:spPr>
+          <a:xfrm>
+            <a:off x="4526280" y="1508760"/>
+            <a:ext cx="73152" cy="1143000"/>
+          </a:xfrm>
+          <a:prstGeom prst="rect">
+            <a:avLst/>
+          </a:prstGeom>
+          <a:solidFill>
+            <a:srgbClr val="1C7A68"/>
+          </a:solidFill>
+          <a:ln>
+            <a:noFill/>
+          </a:ln>
+        </p:spPr>
+        <p:style>
+          <a:lnRef idx="1">
+            <a:schemeClr val="accent1"/>
+          </a:lnRef>
+          <a:fillRef idx="3">
+            <a:schemeClr val="accent1"/>
+          </a:fillRef>
+          <a:effectRef idx="2">
+            <a:schemeClr val="accent1"/>
+          </a:effectRef>
+          <a:fontRef idx="minor">
+            <a:schemeClr val="lt1"/>
+          </a:fontRef>
+        </p:style>
+        <p:txBody>
+          <a:bodyPr rtlCol="0" anchor="ctr"/>
+          <a:lstStyle/>
+          <a:p>
+            <a:pPr algn="ctr"/>
+          </a:p>
+        </p:txBody>
+      </p:sp>
+      <p:sp>
+        <p:nvSpPr>
+          <p:cNvPr id="10" name="Rounded Rectangle 9"/>
+          <p:cNvSpPr/>
+          <p:nvPr/>
+        </p:nvSpPr>
+        <p:spPr>
+          <a:xfrm>
+            <a:off x="8412480" y="1508760"/>
+            <a:ext cx="3611880" cy="1143000"/>
+          </a:xfrm>
+          <a:prstGeom prst="roundRect">
+            <a:avLst/>
+          </a:prstGeom>
+          <a:solidFill>
+            <a:srgbClr val="FFFFFF"/>
+          </a:solidFill>
+          <a:ln w="12700">
+            <a:solidFill>
+              <a:srgbClr val="D7DEE6"/>
+            </a:solidFill>
+          </a:ln>
+        </p:spPr>
+        <p:style>
+          <a:lnRef idx="1">
+            <a:schemeClr val="accent1"/>
+          </a:lnRef>
+          <a:fillRef idx="3">
+            <a:schemeClr val="accent1"/>
+          </a:fillRef>
+          <a:effectRef idx="2">
+            <a:schemeClr val="accent1"/>
+          </a:effectRef>
+          <a:fontRef idx="minor">
+            <a:schemeClr val="lt1"/>
+          </a:fontRef>
+        </p:style>
+        <p:txBody>
+          <a:bodyPr rtlCol="0" anchor="ctr" lIns="182880" rIns="128016" tIns="109728" bIns="73152"/>
+          <a:lstStyle/>
+          <a:p>
+            <a:pPr algn="ctr">
+              <a:spcAft>
+                <a:spcPts val="500"/>
+              </a:spcAft>
+              <a:defRPr sz="1400" b="1">
+                <a:solidFill>
+                  <a:srgbClr val="1E2C3A"/>
+                </a:solidFill>
+              </a:defRPr>
+            </a:pPr>
+            <a:r>
+              <a:t>Safety Guardrails</a:t>
+            </a:r>
+          </a:p>
+          <a:p>
+            <a:pPr>
+              <a:lnSpc>
+                <a:spcPct val="110000"/>
+              </a:lnSpc>
+              <a:defRPr sz="1050">
+                <a:solidFill>
+                  <a:srgbClr val="505B68"/>
+                </a:solidFill>
+              </a:defRPr>
+            </a:pPr>
+            <a:r>
+              <a:t>Add moderation, prompt-injection checks, and response validation.</a:t>
+            </a:r>
+          </a:p>
+        </p:txBody>
+      </p:sp>
+      <p:sp>
+        <p:nvSpPr>
+          <p:cNvPr id="11" name="Rectangle 10"/>
+          <p:cNvSpPr/>
+          <p:nvPr/>
+        </p:nvSpPr>
+        <p:spPr>
+          <a:xfrm>
+            <a:off x="8412480" y="1508760"/>
+            <a:ext cx="73152" cy="1143000"/>
+          </a:xfrm>
+          <a:prstGeom prst="rect">
+            <a:avLst/>
+          </a:prstGeom>
+          <a:solidFill>
+            <a:srgbClr val="955029"/>
+          </a:solidFill>
+          <a:ln>
+            <a:noFill/>
+          </a:ln>
+        </p:spPr>
+        <p:style>
+          <a:lnRef idx="1">
+            <a:schemeClr val="accent1"/>
+          </a:lnRef>
+          <a:fillRef idx="3">
+            <a:schemeClr val="accent1"/>
+          </a:fillRef>
+          <a:effectRef idx="2">
+            <a:schemeClr val="accent1"/>
+          </a:effectRef>
+          <a:fontRef idx="minor">
+            <a:schemeClr val="lt1"/>
+          </a:fontRef>
+        </p:style>
+        <p:txBody>
+          <a:bodyPr rtlCol="0" anchor="ctr"/>
+          <a:lstStyle/>
+          <a:p>
+            <a:pPr algn="ctr"/>
+          </a:p>
+        </p:txBody>
+      </p:sp>
+      <p:sp>
+        <p:nvSpPr>
+          <p:cNvPr id="12" name="Rounded Rectangle 11"/>
+          <p:cNvSpPr/>
+          <p:nvPr/>
+        </p:nvSpPr>
+        <p:spPr>
+          <a:xfrm>
+            <a:off x="640080" y="2944368"/>
+            <a:ext cx="3611880" cy="1143000"/>
+          </a:xfrm>
+          <a:prstGeom prst="roundRect">
+            <a:avLst/>
+          </a:prstGeom>
+          <a:solidFill>
+            <a:srgbClr val="FFFFFF"/>
+          </a:solidFill>
+          <a:ln w="12700">
+            <a:solidFill>
+              <a:srgbClr val="D7DEE6"/>
+            </a:solidFill>
+          </a:ln>
+        </p:spPr>
+        <p:style>
+          <a:lnRef idx="1">
+            <a:schemeClr val="accent1"/>
+          </a:lnRef>
+          <a:fillRef idx="3">
+            <a:schemeClr val="accent1"/>
+          </a:fillRef>
+          <a:effectRef idx="2">
+            <a:schemeClr val="accent1"/>
+          </a:effectRef>
+          <a:fontRef idx="minor">
+            <a:schemeClr val="lt1"/>
+          </a:fontRef>
+        </p:style>
+        <p:txBody>
+          <a:bodyPr rtlCol="0" anchor="ctr" lIns="182880" rIns="128016" tIns="109728" bIns="73152"/>
+          <a:lstStyle/>
+          <a:p>
+            <a:pPr algn="ctr">
+              <a:spcAft>
+                <a:spcPts val="500"/>
+              </a:spcAft>
+              <a:defRPr sz="1400" b="1">
+                <a:solidFill>
+                  <a:srgbClr val="1E2C3A"/>
+                </a:solidFill>
+              </a:defRPr>
+            </a:pPr>
+            <a:r>
+              <a:t>Real Backend</a:t>
+            </a:r>
+          </a:p>
+          <a:p>
+            <a:pPr>
+              <a:lnSpc>
+                <a:spcPct val="110000"/>
+              </a:lnSpc>
+              <a:defRPr sz="1050">
+                <a:solidFill>
+                  <a:srgbClr val="505B68"/>
+                </a:solidFill>
+              </a:defRPr>
+            </a:pPr>
+            <a:r>
+              <a:t>Replace mock data with live catalogue, order, return, and payment APIs.</a:t>
+            </a:r>
+          </a:p>
+        </p:txBody>
+      </p:sp>
+      <p:sp>
+        <p:nvSpPr>
+          <p:cNvPr id="13" name="Rectangle 12"/>
+          <p:cNvSpPr/>
+          <p:nvPr/>
+        </p:nvSpPr>
+        <p:spPr>
+          <a:xfrm>
+            <a:off x="640080" y="2944368"/>
+            <a:ext cx="73152" cy="1143000"/>
+          </a:xfrm>
+          <a:prstGeom prst="rect">
+            <a:avLst/>
+          </a:prstGeom>
+          <a:solidFill>
+            <a:srgbClr val="6958A6"/>
+          </a:solidFill>
+          <a:ln>
+            <a:noFill/>
+          </a:ln>
+        </p:spPr>
+        <p:style>
+          <a:lnRef idx="1">
+            <a:schemeClr val="accent1"/>
+          </a:lnRef>
+          <a:fillRef idx="3">
+            <a:schemeClr val="accent1"/>
+          </a:fillRef>
+          <a:effectRef idx="2">
+            <a:schemeClr val="accent1"/>
+          </a:effectRef>
+          <a:fontRef idx="minor">
+            <a:schemeClr val="lt1"/>
+          </a:fontRef>
+        </p:style>
+        <p:txBody>
+          <a:bodyPr rtlCol="0" anchor="ctr"/>
+          <a:lstStyle/>
+          <a:p>
+            <a:pPr algn="ctr"/>
+          </a:p>
+        </p:txBody>
+      </p:sp>
+      <p:sp>
+        <p:nvSpPr>
+          <p:cNvPr id="14" name="Rounded Rectangle 13"/>
+          <p:cNvSpPr/>
+          <p:nvPr/>
+        </p:nvSpPr>
+        <p:spPr>
+          <a:xfrm>
+            <a:off x="4526280" y="2944368"/>
+            <a:ext cx="3611880" cy="1143000"/>
+          </a:xfrm>
+          <a:prstGeom prst="roundRect">
+            <a:avLst/>
+          </a:prstGeom>
+          <a:solidFill>
+            <a:srgbClr val="FFFFFF"/>
+          </a:solidFill>
+          <a:ln w="12700">
+            <a:solidFill>
+              <a:srgbClr val="D7DEE6"/>
+            </a:solidFill>
+          </a:ln>
+        </p:spPr>
+        <p:style>
+          <a:lnRef idx="1">
+            <a:schemeClr val="accent1"/>
+          </a:lnRef>
+          <a:fillRef idx="3">
+            <a:schemeClr val="accent1"/>
+          </a:fillRef>
+          <a:effectRef idx="2">
+            <a:schemeClr val="accent1"/>
+          </a:effectRef>
+          <a:fontRef idx="minor">
+            <a:schemeClr val="lt1"/>
+          </a:fontRef>
+        </p:style>
+        <p:txBody>
+          <a:bodyPr rtlCol="0" anchor="ctr" lIns="182880" rIns="128016" tIns="109728" bIns="73152"/>
+          <a:lstStyle/>
+          <a:p>
+            <a:pPr algn="ctr">
+              <a:spcAft>
+                <a:spcPts val="500"/>
+              </a:spcAft>
+              <a:defRPr sz="1400" b="1">
+                <a:solidFill>
+                  <a:srgbClr val="1E2C3A"/>
+                </a:solidFill>
+              </a:defRPr>
+            </a:pPr>
+            <a:r>
+              <a:t>Quality Metrics</a:t>
+            </a:r>
+          </a:p>
+          <a:p>
+            <a:pPr>
+              <a:lnSpc>
+                <a:spcPct val="110000"/>
+              </a:lnSpc>
+              <a:defRPr sz="1050">
+                <a:solidFill>
+                  <a:srgbClr val="505B68"/>
+                </a:solidFill>
+              </a:defRPr>
+            </a:pPr>
+            <a:r>
+              <a:t>Track latency, tool accuracy, fallback rate, and task completion.</a:t>
+            </a:r>
+          </a:p>
+        </p:txBody>
+      </p:sp>
+      <p:sp>
+        <p:nvSpPr>
+          <p:cNvPr id="15" name="Rectangle 14"/>
+          <p:cNvSpPr/>
+          <p:nvPr/>
+        </p:nvSpPr>
+        <p:spPr>
+          <a:xfrm>
+            <a:off x="4526280" y="2944368"/>
+            <a:ext cx="73152" cy="1143000"/>
+          </a:xfrm>
+          <a:prstGeom prst="rect">
+            <a:avLst/>
+          </a:prstGeom>
+          <a:solidFill>
+            <a:srgbClr val="A13946"/>
+          </a:solidFill>
+          <a:ln>
+            <a:noFill/>
+          </a:ln>
+        </p:spPr>
+        <p:style>
+          <a:lnRef idx="1">
+            <a:schemeClr val="accent1"/>
+          </a:lnRef>
+          <a:fillRef idx="3">
+            <a:schemeClr val="accent1"/>
+          </a:fillRef>
+          <a:effectRef idx="2">
+            <a:schemeClr val="accent1"/>
+          </a:effectRef>
+          <a:fontRef idx="minor">
+            <a:schemeClr val="lt1"/>
+          </a:fontRef>
+        </p:style>
+        <p:txBody>
+          <a:bodyPr rtlCol="0" anchor="ctr"/>
+          <a:lstStyle/>
+          <a:p>
+            <a:pPr algn="ctr"/>
+          </a:p>
+        </p:txBody>
+      </p:sp>
+      <p:sp>
+        <p:nvSpPr>
+          <p:cNvPr id="16" name="Rounded Rectangle 15"/>
+          <p:cNvSpPr/>
+          <p:nvPr/>
+        </p:nvSpPr>
+        <p:spPr>
+          <a:xfrm>
+            <a:off x="8412480" y="2944368"/>
+            <a:ext cx="3611880" cy="1143000"/>
+          </a:xfrm>
+          <a:prstGeom prst="roundRect">
+            <a:avLst/>
+          </a:prstGeom>
+          <a:solidFill>
+            <a:srgbClr val="FFFFFF"/>
+          </a:solidFill>
+          <a:ln w="12700">
+            <a:solidFill>
+              <a:srgbClr val="D7DEE6"/>
+            </a:solidFill>
+          </a:ln>
+        </p:spPr>
+        <p:style>
+          <a:lnRef idx="1">
+            <a:schemeClr val="accent1"/>
+          </a:lnRef>
+          <a:fillRef idx="3">
+            <a:schemeClr val="accent1"/>
+          </a:fillRef>
+          <a:effectRef idx="2">
+            <a:schemeClr val="accent1"/>
+          </a:effectRef>
+          <a:fontRef idx="minor">
+            <a:schemeClr val="lt1"/>
+          </a:fontRef>
+        </p:style>
+        <p:txBody>
+          <a:bodyPr rtlCol="0" anchor="ctr" lIns="182880" rIns="128016" tIns="109728" bIns="73152"/>
+          <a:lstStyle/>
+          <a:p>
+            <a:pPr algn="ctr">
+              <a:spcAft>
+                <a:spcPts val="500"/>
+              </a:spcAft>
+              <a:defRPr sz="1400" b="1">
+                <a:solidFill>
+                  <a:srgbClr val="1E2C3A"/>
+                </a:solidFill>
+              </a:defRPr>
+            </a:pPr>
+            <a:r>
+              <a:t>Multilingual Scale</a:t>
+            </a:r>
+          </a:p>
+          <a:p>
+            <a:pPr>
+              <a:lnSpc>
+                <a:spcPct val="110000"/>
+              </a:lnSpc>
+              <a:defRPr sz="1050">
+                <a:solidFill>
+                  <a:srgbClr val="505B68"/>
+                </a:solidFill>
+              </a:defRPr>
+            </a:pPr>
+            <a:r>
+              <a:t>Validate STT/TTS quality across languages, accents, and noisy settings.</a:t>
+            </a:r>
+          </a:p>
+        </p:txBody>
+      </p:sp>
+      <p:sp>
+        <p:nvSpPr>
+          <p:cNvPr id="17" name="Rectangle 16"/>
+          <p:cNvSpPr/>
+          <p:nvPr/>
+        </p:nvSpPr>
+        <p:spPr>
+          <a:xfrm>
+            <a:off x="8412480" y="2944368"/>
+            <a:ext cx="73152" cy="1143000"/>
+          </a:xfrm>
+          <a:prstGeom prst="rect">
+            <a:avLst/>
+          </a:prstGeom>
+          <a:solidFill>
+            <a:srgbClr val="4D6836"/>
+          </a:solidFill>
+          <a:ln>
+            <a:noFill/>
+          </a:ln>
+        </p:spPr>
+        <p:style>
+          <a:lnRef idx="1">
+            <a:schemeClr val="accent1"/>
+          </a:lnRef>
+          <a:fillRef idx="3">
+            <a:schemeClr val="accent1"/>
+          </a:fillRef>
+          <a:effectRef idx="2">
+            <a:schemeClr val="accent1"/>
+          </a:effectRef>
+          <a:fontRef idx="minor">
+            <a:schemeClr val="lt1"/>
+          </a:fontRef>
+        </p:style>
+        <p:txBody>
+          <a:bodyPr rtlCol="0" anchor="ctr"/>
+          <a:lstStyle/>
+          <a:p>
+            <a:pPr algn="ctr"/>
+          </a:p>
+        </p:txBody>
+      </p:sp>
+      <p:sp>
+        <p:nvSpPr>
+          <p:cNvPr id="18" name="TextBox 17"/>
+          <p:cNvSpPr txBox="1"/>
+          <p:nvPr/>
+        </p:nvSpPr>
+        <p:spPr>
+          <a:xfrm>
+            <a:off x="594360" y="6172200"/>
+            <a:ext cx="10972800" cy="320040"/>
+          </a:xfrm>
+          <a:prstGeom prst="rect">
+            <a:avLst/>
+          </a:prstGeom>
+          <a:noFill/>
+        </p:spPr>
+        <p:txBody>
+          <a:bodyPr wrap="none">
+            <a:spAutoFit/>
+          </a:bodyPr>
+          <a:lstStyle/>
+          <a:p>
+            <a:pPr algn="ctr">
+              <a:defRPr sz="1300">
+                <a:solidFill>
+                  <a:srgbClr val="4A5562"/>
+                </a:solidFill>
+              </a:defRPr>
+            </a:pPr>
+            <a:r>
+              <a:t>Immediate demo readiness: run healthcheck, verify microphone permissions, and rehearse the three required voice scenarios.</a:t>
+            </a:r>
+          </a:p>
+        </p:txBody>
+      </p:sp>
+    </p:spTree>
+  </p:cSld>
+  <p:clrMapOvr>
+    <a:masterClrMapping/>
+  </p:clrMapOvr>
+</p:sld>
+</file>
+
+<file path=ppt/slides/slide2.xml><?xml version="1.0" encoding="utf-8"?>
+<p:sld xmlns:a="http://schemas.openxmlformats.org/drawingml/2006/main" xmlns:r="http://schemas.openxmlformats.org/officeDocument/2006/relationships" xmlns:p="http://schemas.openxmlformats.org/presentationml/2006/main">
+  <p:cSld>
+    <p:spTree>
+      <p:nvGrpSpPr>
+        <p:cNvPr id="1" name=""/>
+        <p:cNvGrpSpPr/>
+        <p:nvPr/>
+      </p:nvGrpSpPr>
+      <p:grpSpPr>
+        <a:xfrm>
+          <a:off x="0" y="0"/>
+          <a:ext cx="0" cy="0"/>
+          <a:chOff x="0" y="0"/>
+          <a:chExt cx="0" cy="0"/>
+        </a:xfrm>
+      </p:grpSpPr>
+      <p:sp>
+        <p:nvSpPr>
+          <p:cNvPr id="5" name="Content Placeholder 4"/>
+          <p:cNvSpPr/>
+          <p:nvPr>
+            <p:ph idx="1"/>
+          </p:nvPr>
+        </p:nvSpPr>
+        <p:spPr/>
+        <p:txBody>
+          <a:bodyPr/>
+          <a:p>
+            <a:r>
+              <a:rPr lang="en-US" altLang="en-US"/>
+              <a:t>Problem Statement &amp; Motivation</a:t>
+            </a:r>
+            <a:endParaRPr lang="en-US" altLang="en-US"/>
+          </a:p>
+          <a:p>
+            <a:r>
+              <a:rPr lang="en-US" altLang="en-US"/>
+              <a:t>System Architecture</a:t>
+            </a:r>
+            <a:endParaRPr lang="en-US" altLang="en-US"/>
+          </a:p>
+          <a:p>
+            <a:r>
+              <a:rPr lang="en-US" altLang="en-US"/>
+              <a:t>AI/ML Technology Stack</a:t>
+            </a:r>
+            <a:endParaRPr lang="en-US" altLang="en-US"/>
+          </a:p>
+          <a:p>
+            <a:r>
+              <a:rPr lang="en-US" altLang="en-US"/>
+              <a:t>Key Features &amp; Capabilities</a:t>
+            </a:r>
+            <a:endParaRPr lang="en-US" altLang="en-US"/>
+          </a:p>
+          <a:p>
+            <a:r>
+              <a:rPr lang="en-US" altLang="en-US"/>
+              <a:t>Demo Scenarios</a:t>
+            </a:r>
+            <a:endParaRPr lang="en-US" altLang="en-US"/>
+          </a:p>
+          <a:p>
+            <a:r>
+              <a:rPr lang="en-US" altLang="en-US"/>
+              <a:t>Challenges &amp; Solutions</a:t>
+            </a:r>
+            <a:endParaRPr lang="en-US" altLang="en-US"/>
+          </a:p>
+          <a:p>
+            <a:r>
+              <a:rPr lang="en-US" altLang="en-US"/>
+              <a:t>Results &amp; Outcomes</a:t>
+            </a:r>
+            <a:endParaRPr lang="en-US" altLang="en-US"/>
+          </a:p>
+          <a:p>
+            <a:r>
+              <a:rPr lang="en-US" altLang="en-US"/>
+              <a:t>Future Scope</a:t>
+            </a:r>
+            <a:endParaRPr lang="en-US" altLang="en-US"/>
+          </a:p>
+        </p:txBody>
+      </p:sp>
+      <p:sp>
+        <p:nvSpPr>
+          <p:cNvPr id="2" name="Title 1"/>
+          <p:cNvSpPr>
+            <a:spLocks noGrp="1"/>
+          </p:cNvSpPr>
+          <p:nvPr>
+            <p:ph type="title"/>
+          </p:nvPr>
+        </p:nvSpPr>
+        <p:spPr/>
+        <p:txBody>
+          <a:bodyPr/>
+          <a:lstStyle/>
+          <a:p>
+            <a:r>
+              <a:rPr lang="en-US" dirty="0"/>
+              <a:t>Agenda</a:t>
+            </a:r>
+            <a:endParaRPr lang="en-IN" dirty="0"/>
+          </a:p>
+        </p:txBody>
+      </p:sp>
+    </p:spTree>
+  </p:cSld>
+  <p:clrMapOvr>
+    <a:masterClrMapping/>
+  </p:clrMapOvr>
+</p:sld>
+</file>
+
+<file path=ppt/slides/slide3.xml><?xml version="1.0" encoding="utf-8"?>
+<p:sld xmlns:a="http://schemas.openxmlformats.org/drawingml/2006/main" xmlns:r="http://schemas.openxmlformats.org/officeDocument/2006/relationships" xmlns:p="http://schemas.openxmlformats.org/presentationml/2006/main">
+  <p:cSld>
+    <p:spTree>
+      <p:nvGrpSpPr>
+        <p:cNvPr id="1" name=""/>
+        <p:cNvGrpSpPr/>
+        <p:nvPr/>
+      </p:nvGrpSpPr>
+      <p:grpSpPr>
+        <a:xfrm>
+          <a:off x="0" y="0"/>
+          <a:ext cx="0" cy="0"/>
+          <a:chOff x="0" y="0"/>
+          <a:chExt cx="0" cy="0"/>
+        </a:xfrm>
+      </p:grpSpPr>
+      <p:sp>
+        <p:nvSpPr>
+          <p:cNvPr id="3" name="Content Placeholder 2"/>
+          <p:cNvSpPr>
+            <a:spLocks noGrp="1"/>
+          </p:cNvSpPr>
+          <p:nvPr>
+            <p:ph idx="1"/>
+            <p:custDataLst>
+              <p:tags r:id="rId1"/>
+            </p:custDataLst>
+          </p:nvPr>
+        </p:nvSpPr>
+        <p:spPr>
+          <a:prstGeom prst="rect">
+            <a:avLst/>
+          </a:prstGeom>
+        </p:spPr>
+        <p:txBody>
+          <a:bodyPr>
+            <a:normAutofit fontScale="80000"/>
+          </a:bodyPr>
+          <a:lstStyle>
+            <a:lvl1pPr>
+              <a:defRPr>
+                <a:solidFill>
+                  <a:schemeClr val="bg2">
+                    <a:lumMod val="10000"/>
+                  </a:schemeClr>
+                </a:solidFill>
+              </a:defRPr>
+            </a:lvl1pPr>
+            <a:lvl2pPr>
+              <a:defRPr>
+                <a:solidFill>
+                  <a:schemeClr val="bg2">
+                    <a:lumMod val="10000"/>
+                  </a:schemeClr>
+                </a:solidFill>
+              </a:defRPr>
+            </a:lvl2pPr>
+            <a:lvl3pPr>
+              <a:defRPr>
+                <a:solidFill>
+                  <a:schemeClr val="bg2">
+                    <a:lumMod val="10000"/>
+                  </a:schemeClr>
+                </a:solidFill>
+              </a:defRPr>
+            </a:lvl3pPr>
+            <a:lvl4pPr>
+              <a:defRPr>
+                <a:solidFill>
+                  <a:schemeClr val="bg2">
+                    <a:lumMod val="10000"/>
+                  </a:schemeClr>
+                </a:solidFill>
+              </a:defRPr>
+            </a:lvl4pPr>
+            <a:lvl5pPr>
+              <a:defRPr>
+                <a:solidFill>
+                  <a:schemeClr val="bg2">
+                    <a:lumMod val="10000"/>
+                  </a:schemeClr>
+                </a:solidFill>
+              </a:defRPr>
+            </a:lvl5pPr>
+          </a:lstStyle>
+          <a:p>
+            <a:pPr lvl="0"/>
+            <a:r>
+              <a:rPr lang="en-US" altLang="en-US" dirty="0"/>
+              <a:t>**Title: Why VoxCart?**</a:t>
+            </a:r>
+            <a:endParaRPr lang="en-US" altLang="en-US" dirty="0"/>
+          </a:p>
+          <a:p>
+            <a:pPr lvl="0"/>
+            <a:r>
+              <a:rPr lang="en-US" altLang="en-US" dirty="0"/>
+              <a:t>**Content:**</a:t>
+            </a:r>
+            <a:endParaRPr lang="en-US" altLang="en-US" dirty="0"/>
+          </a:p>
+          <a:p>
+            <a:pPr lvl="0"/>
+            <a:r>
+              <a:rPr lang="en-US" altLang="en-US" dirty="0"/>
+              <a:t>Tired of clunky, text-only e-commerce chatbots? They're slow, impersonal, and frankly, a chore! We all prefer to *speak* for quick questions like "Where's my order?" And let's not even mention rigid IVR systems that fumble natural conversation.</a:t>
+            </a:r>
+            <a:endParaRPr lang="en-US" altLang="en-US" dirty="0"/>
+          </a:p>
+          <a:p>
+            <a:pPr lvl="0"/>
+            <a:r>
+              <a:rPr lang="en-US" altLang="en-US" dirty="0"/>
+              <a:t>Our bold goal? To create a revolutionary, voice-first, AI-powered shopping assistant that operates in *real-time* – absolutely no typing, no frustrating page reloads!</a:t>
+            </a:r>
+            <a:endParaRPr lang="en-US" altLang="en-US" dirty="0"/>
+          </a:p>
+          <a:p>
+            <a:pPr lvl="0"/>
+            <a:r>
+              <a:rPr lang="en-US" altLang="en-US" dirty="0"/>
+              <a:t>Introducing Aria: your ultimate conversational voice agent. She listens, truly understands, and instantly speaks back within a blazing ~1 second, effortlessly handling your order inquiries and much more!rs, products, and return policies end-to-end</a:t>
+            </a:r>
+            <a:endParaRPr lang="en-US" altLang="en-US" dirty="0"/>
+          </a:p>
+        </p:txBody>
+      </p:sp>
+      <p:sp>
+        <p:nvSpPr>
+          <p:cNvPr id="2" name="Title 1"/>
+          <p:cNvSpPr>
+            <a:spLocks noGrp="1"/>
+          </p:cNvSpPr>
+          <p:nvPr>
+            <p:ph type="title"/>
+          </p:nvPr>
+        </p:nvSpPr>
+        <p:spPr>
+          <a:xfrm>
+            <a:off x="0" y="2049780"/>
+            <a:ext cx="4034790" cy="2562225"/>
+          </a:xfrm>
+        </p:spPr>
+        <p:txBody>
+          <a:bodyPr/>
+          <a:lstStyle/>
+          <a:p>
+            <a:r>
+              <a:rPr lang="en-US" altLang="en-US">
+                <a:sym typeface="+mn-ea"/>
+              </a:rPr>
+              <a:t>Problem Statement &amp; Motivation</a:t>
+            </a:r>
+            <a:endParaRPr lang="en-IN" dirty="0"/>
+          </a:p>
+        </p:txBody>
+      </p:sp>
+    </p:spTree>
+  </p:cSld>
+  <p:clrMapOvr>
+    <a:masterClrMapping/>
+  </p:clrMapOvr>
+</p:sld>
+</file>
+
+<file path=ppt/slides/slide4.xml><?xml version="1.0" encoding="utf-8"?>
+<p:sld xmlns:a="http://schemas.openxmlformats.org/drawingml/2006/main" xmlns:r="http://schemas.openxmlformats.org/officeDocument/2006/relationships" xmlns:p="http://schemas.openxmlformats.org/presentationml/2006/main">
+  <p:cSld>
+    <p:spTree>
+      <p:nvGrpSpPr>
+        <p:cNvPr id="1" name=""/>
+        <p:cNvGrpSpPr/>
+        <p:nvPr/>
+      </p:nvGrpSpPr>
+      <p:grpSpPr>
+        <a:xfrm>
+          <a:off x="0" y="0"/>
+          <a:ext cx="0" cy="0"/>
+          <a:chOff x="0" y="0"/>
+          <a:chExt cx="0" cy="0"/>
+        </a:xfrm>
+      </p:grpSpPr>
+      <p:sp>
+        <p:nvSpPr>
+          <p:cNvPr id="2" name="Title 1"/>
+          <p:cNvSpPr>
+            <a:spLocks noGrp="1"/>
+          </p:cNvSpPr>
+          <p:nvPr>
+            <p:ph type="title"/>
+          </p:nvPr>
+        </p:nvSpPr>
+        <p:spPr>
+          <a:xfrm>
+            <a:off x="678815" y="151130"/>
+            <a:ext cx="10834370" cy="643255"/>
+          </a:xfrm>
+        </p:spPr>
+        <p:txBody>
+          <a:bodyPr/>
+          <a:lstStyle/>
+          <a:p>
+            <a:r>
+              <a:rPr lang="en-US" altLang="en-US">
+                <a:sym typeface="+mn-ea"/>
+              </a:rPr>
+              <a:t>System Architecture</a:t>
+            </a:r>
+            <a:endParaRPr lang="en-IN" dirty="0"/>
+          </a:p>
+        </p:txBody>
+      </p:sp>
+      <p:pic>
+        <p:nvPicPr>
+          <p:cNvPr id="4" name="Content Placeholder 3"/>
+          <p:cNvPicPr>
+            <a:picLocks noChangeAspect="1"/>
+          </p:cNvPicPr>
+          <p:nvPr>
+            <p:ph idx="1"/>
+          </p:nvPr>
+        </p:nvPicPr>
+        <p:blipFill>
+          <a:blip r:embed="rId1"/>
+          <a:stretch>
+            <a:fillRect/>
+          </a:stretch>
+        </p:blipFill>
+        <p:spPr>
+          <a:xfrm>
+            <a:off x="1338580" y="681355"/>
+            <a:ext cx="9514205" cy="5391785"/>
+          </a:xfrm>
+          <a:prstGeom prst="rect">
+            <a:avLst/>
+          </a:prstGeom>
+        </p:spPr>
+      </p:pic>
+    </p:spTree>
+  </p:cSld>
+  <p:clrMapOvr>
+    <a:masterClrMapping/>
+  </p:clrMapOvr>
+</p:sld>
+</file>
+
+<file path=ppt/slides/slide5.xml><?xml version="1.0" encoding="utf-8"?>
+<p:sld xmlns:a="http://schemas.openxmlformats.org/drawingml/2006/main" xmlns:r="http://schemas.openxmlformats.org/officeDocument/2006/relationships" xmlns:p="http://schemas.openxmlformats.org/presentationml/2006/main">
+  <p:cSld>
+    <p:bg>
+      <p:bgPr>
+        <a:noFill/>
+        <a:effectLst/>
+      </p:bgPr>
+    </p:bg>
+    <p:spTree>
+      <p:nvGrpSpPr>
+        <p:cNvPr id="1" name=""/>
+        <p:cNvGrpSpPr/>
+        <p:nvPr/>
+      </p:nvGrpSpPr>
+      <p:grpSpPr>
+        <a:xfrm>
+          <a:off x="0" y="0"/>
+          <a:ext cx="0" cy="0"/>
+          <a:chOff x="0" y="0"/>
+          <a:chExt cx="0" cy="0"/>
+        </a:xfrm>
+      </p:grpSpPr>
+      <p:sp>
+        <p:nvSpPr>
+          <p:cNvPr id="12" name="Content Placeholder 11"/>
+          <p:cNvSpPr>
+            <a:spLocks noGrp="1"/>
+          </p:cNvSpPr>
+          <p:nvPr>
+            <p:ph idx="1"/>
+          </p:nvPr>
+        </p:nvSpPr>
+        <p:spPr>
+          <a:xfrm>
+            <a:off x="4194810" y="603885"/>
+            <a:ext cx="7318375" cy="5454015"/>
+          </a:xfrm>
+        </p:spPr>
+        <p:txBody>
+          <a:bodyPr/>
+          <a:p>
+            <a:r>
+              <a:rPr lang="en-US" altLang="en-US"/>
+              <a:t>Technology Stack</a:t>
+            </a:r>
+            <a:endParaRPr lang="en-US" altLang="en-US"/>
+          </a:p>
+        </p:txBody>
+      </p:sp>
+      <p:sp>
+        <p:nvSpPr>
+          <p:cNvPr id="4" name="Title 3"/>
+          <p:cNvSpPr>
+            <a:spLocks noGrp="1"/>
+          </p:cNvSpPr>
+          <p:nvPr>
+            <p:ph type="title"/>
+          </p:nvPr>
+        </p:nvSpPr>
+        <p:spPr>
+          <a:xfrm>
+            <a:off x="635" y="2049780"/>
+            <a:ext cx="3888105" cy="2562225"/>
+          </a:xfrm>
+        </p:spPr>
+        <p:txBody>
+          <a:bodyPr/>
+          <a:lstStyle/>
+          <a:p>
+            <a:r>
+              <a:rPr lang="en-US" altLang="en-IN"/>
+              <a:t>AI/ML Technology Stack</a:t>
+            </a:r>
+            <a:endParaRPr lang="en-US" altLang="en-IN"/>
+          </a:p>
+        </p:txBody>
+      </p:sp>
+      <p:graphicFrame>
+        <p:nvGraphicFramePr>
+          <p:cNvPr id="2" name="Table 1"/>
+          <p:cNvGraphicFramePr/>
+          <p:nvPr/>
+        </p:nvGraphicFramePr>
+        <p:xfrm>
+          <a:off x="4830445" y="1337310"/>
+          <a:ext cx="6855460" cy="4663440"/>
+        </p:xfrm>
+        <a:graphic>
+          <a:graphicData uri="http://schemas.openxmlformats.org/drawingml/2006/table">
+            <a:tbl>
+              <a:tblPr/>
+              <a:tblGrid>
+                <a:gridCol w="1861820"/>
+                <a:gridCol w="2533015"/>
+                <a:gridCol w="2460625"/>
+              </a:tblGrid>
+              <a:tr h="340360">
+                <a:tc>
+                  <a:txBody>
+                    <a:bodyPr/>
+                    <a:p>
+                      <a:r>
+                        <a:rPr sz="1100" b="0" i="0">
+                          <a:solidFill>
+                            <a:srgbClr val="BFBFBF"/>
+                          </a:solidFill>
+                          <a:latin typeface="-apple-system"/>
+                          <a:ea typeface="-apple-system"/>
+                        </a:rPr>
+                        <a:t>Layer</a:t>
+                      </a:r>
+                      <a:endParaRPr sz="1100" b="0" i="0">
+                        <a:solidFill>
+                          <a:srgbClr val="BFBFBF"/>
+                        </a:solidFill>
+                        <a:latin typeface="-apple-system"/>
+                        <a:ea typeface="-apple-system"/>
+                      </a:endParaRPr>
+                    </a:p>
+                  </a:txBody>
+                  <a:tcPr marL="76517" marR="76517" marT="51117" marB="51117" anchor="ctr" anchorCtr="0">
+                    <a:lnL>
+                      <a:noFill/>
+                    </a:lnL>
+                    <a:lnR>
+                      <a:noFill/>
+                    </a:lnR>
+                    <a:lnT>
+                      <a:noFill/>
+                    </a:lnT>
+                    <a:lnB>
+                      <a:noFill/>
+                    </a:lnB>
+                    <a:noFill/>
+                  </a:tcPr>
+                </a:tc>
+                <a:tc>
+                  <a:txBody>
+                    <a:bodyPr/>
+                    <a:p>
+                      <a:r>
+                        <a:rPr sz="1100" b="0" i="0">
+                          <a:solidFill>
+                            <a:srgbClr val="BFBFBF"/>
+                          </a:solidFill>
+                          <a:latin typeface="-apple-system"/>
+                          <a:ea typeface="-apple-system"/>
+                        </a:rPr>
+                        <a:t>Technology</a:t>
+                      </a:r>
+                      <a:endParaRPr sz="1100" b="0" i="0">
+                        <a:solidFill>
+                          <a:srgbClr val="BFBFBF"/>
+                        </a:solidFill>
+                        <a:latin typeface="-apple-system"/>
+                        <a:ea typeface="-apple-system"/>
+                      </a:endParaRPr>
+                    </a:p>
+                  </a:txBody>
+                  <a:tcPr marL="76517" marR="76517" marT="51117" marB="51117" anchor="ctr" anchorCtr="0">
+                    <a:lnL>
+                      <a:noFill/>
+                    </a:lnL>
+                    <a:lnR>
+                      <a:noFill/>
+                    </a:lnR>
+                    <a:lnT>
+                      <a:noFill/>
+                    </a:lnT>
+                    <a:lnB>
+                      <a:noFill/>
+                    </a:lnB>
+                    <a:noFill/>
+                  </a:tcPr>
+                </a:tc>
+                <a:tc>
+                  <a:txBody>
+                    <a:bodyPr/>
+                    <a:p>
+                      <a:r>
+                        <a:rPr sz="1100" b="0" i="0">
+                          <a:solidFill>
+                            <a:srgbClr val="BFBFBF"/>
+                          </a:solidFill>
+                          <a:latin typeface="-apple-system"/>
+                          <a:ea typeface="-apple-system"/>
+                        </a:rPr>
+                        <a:t>Why Chosen</a:t>
+                      </a:r>
+                      <a:endParaRPr sz="1100" b="0" i="0">
+                        <a:solidFill>
+                          <a:srgbClr val="BFBFBF"/>
+                        </a:solidFill>
+                        <a:latin typeface="-apple-system"/>
+                        <a:ea typeface="-apple-system"/>
+                      </a:endParaRPr>
+                    </a:p>
+                  </a:txBody>
+                  <a:tcPr marL="76517" marR="76517" marT="51117" marB="51117" anchor="ctr" anchorCtr="0">
+                    <a:lnL>
+                      <a:noFill/>
+                    </a:lnL>
+                    <a:lnR>
+                      <a:noFill/>
+                    </a:lnR>
+                    <a:lnT>
+                      <a:noFill/>
+                    </a:lnT>
+                    <a:lnB>
+                      <a:noFill/>
+                    </a:lnB>
+                    <a:noFill/>
+                  </a:tcPr>
+                </a:tc>
+              </a:tr>
+              <a:tr h="552450">
+                <a:tc>
+                  <a:txBody>
+                    <a:bodyPr/>
+                    <a:p>
+                      <a:r>
+                        <a:rPr sz="1100" b="0" i="0">
+                          <a:solidFill>
+                            <a:srgbClr val="BFBFBF"/>
+                          </a:solidFill>
+                          <a:latin typeface="-apple-system"/>
+                          <a:ea typeface="-apple-system"/>
+                        </a:rPr>
+                        <a:t>Real-time transport</a:t>
+                      </a:r>
+                      <a:endParaRPr sz="1100" b="0" i="0">
+                        <a:solidFill>
+                          <a:srgbClr val="BFBFBF"/>
+                        </a:solidFill>
+                        <a:latin typeface="-apple-system"/>
+                        <a:ea typeface="-apple-system"/>
+                      </a:endParaRPr>
+                    </a:p>
+                  </a:txBody>
+                  <a:tcPr marL="76517" marR="76517" marT="51117" marB="51117" anchor="ctr" anchorCtr="0">
+                    <a:lnL>
+                      <a:noFill/>
+                    </a:lnL>
+                    <a:lnR>
+                      <a:noFill/>
+                    </a:lnR>
+                    <a:lnT>
+                      <a:noFill/>
+                    </a:lnT>
+                    <a:lnB>
+                      <a:noFill/>
+                    </a:lnB>
+                    <a:noFill/>
+                  </a:tcPr>
+                </a:tc>
+                <a:tc>
+                  <a:txBody>
+                    <a:bodyPr/>
+                    <a:p>
+                      <a:r>
+                        <a:rPr sz="1100" b="0" i="0">
+                          <a:solidFill>
+                            <a:srgbClr val="BFBFBF"/>
+                          </a:solidFill>
+                          <a:latin typeface="-apple-system"/>
+                          <a:ea typeface="-apple-system"/>
+                        </a:rPr>
+                        <a:t>LiveKit WebRTC</a:t>
+                      </a:r>
+                      <a:endParaRPr sz="1100" b="0" i="0">
+                        <a:solidFill>
+                          <a:srgbClr val="BFBFBF"/>
+                        </a:solidFill>
+                        <a:latin typeface="-apple-system"/>
+                        <a:ea typeface="-apple-system"/>
+                      </a:endParaRPr>
+                    </a:p>
+                  </a:txBody>
+                  <a:tcPr marL="76517" marR="76517" marT="51117" marB="51117" anchor="ctr" anchorCtr="0">
+                    <a:lnL>
+                      <a:noFill/>
+                    </a:lnL>
+                    <a:lnR>
+                      <a:noFill/>
+                    </a:lnR>
+                    <a:lnT>
+                      <a:noFill/>
+                    </a:lnT>
+                    <a:lnB>
+                      <a:noFill/>
+                    </a:lnB>
+                    <a:noFill/>
+                  </a:tcPr>
+                </a:tc>
+                <a:tc>
+                  <a:txBody>
+                    <a:bodyPr/>
+                    <a:p>
+                      <a:r>
+                        <a:rPr sz="1100" b="0" i="0">
+                          <a:solidFill>
+                            <a:srgbClr val="BFBFBF"/>
+                          </a:solidFill>
+                          <a:latin typeface="-apple-system"/>
+                          <a:ea typeface="-apple-system"/>
+                        </a:rPr>
+                        <a:t>Sub-second bidirectional audio in browser</a:t>
+                      </a:r>
+                      <a:endParaRPr sz="1100" b="0" i="0">
+                        <a:solidFill>
+                          <a:srgbClr val="BFBFBF"/>
+                        </a:solidFill>
+                        <a:latin typeface="-apple-system"/>
+                        <a:ea typeface="-apple-system"/>
+                      </a:endParaRPr>
+                    </a:p>
+                  </a:txBody>
+                  <a:tcPr marL="76517" marR="76517" marT="51117" marB="51117" anchor="ctr" anchorCtr="0">
+                    <a:lnL>
+                      <a:noFill/>
+                    </a:lnL>
+                    <a:lnR>
+                      <a:noFill/>
+                    </a:lnR>
+                    <a:lnT>
+                      <a:noFill/>
+                    </a:lnT>
+                    <a:lnB>
+                      <a:noFill/>
+                    </a:lnB>
+                    <a:noFill/>
+                  </a:tcPr>
+                </a:tc>
+              </a:tr>
+              <a:tr h="504825">
+                <a:tc>
+                  <a:txBody>
+                    <a:bodyPr/>
+                    <a:p>
+                      <a:r>
+                        <a:rPr sz="1100" b="0" i="0">
+                          <a:solidFill>
+                            <a:srgbClr val="BFBFBF"/>
+                          </a:solidFill>
+                          <a:latin typeface="-apple-system"/>
+                          <a:ea typeface="-apple-system"/>
+                        </a:rPr>
+                        <a:t>Voice Activity Detection</a:t>
+                      </a:r>
+                      <a:endParaRPr sz="1100" b="0" i="0">
+                        <a:solidFill>
+                          <a:srgbClr val="BFBFBF"/>
+                        </a:solidFill>
+                        <a:latin typeface="-apple-system"/>
+                        <a:ea typeface="-apple-system"/>
+                      </a:endParaRPr>
+                    </a:p>
+                  </a:txBody>
+                  <a:tcPr marL="76517" marR="76517" marT="51117" marB="51117" anchor="ctr" anchorCtr="0">
+                    <a:lnL>
+                      <a:noFill/>
+                    </a:lnL>
+                    <a:lnR>
+                      <a:noFill/>
+                    </a:lnR>
+                    <a:lnT>
+                      <a:noFill/>
+                    </a:lnT>
+                    <a:lnB>
+                      <a:noFill/>
+                    </a:lnB>
+                    <a:noFill/>
+                  </a:tcPr>
+                </a:tc>
+                <a:tc>
+                  <a:txBody>
+                    <a:bodyPr/>
+                    <a:p>
+                      <a:r>
+                        <a:rPr sz="1100" b="0" i="0">
+                          <a:solidFill>
+                            <a:srgbClr val="BFBFBF"/>
+                          </a:solidFill>
+                          <a:latin typeface="-apple-system"/>
+                          <a:ea typeface="-apple-system"/>
+                        </a:rPr>
+                        <a:t>Silero VAD</a:t>
+                      </a:r>
+                      <a:endParaRPr sz="1100" b="0" i="0">
+                        <a:solidFill>
+                          <a:srgbClr val="BFBFBF"/>
+                        </a:solidFill>
+                        <a:latin typeface="-apple-system"/>
+                        <a:ea typeface="-apple-system"/>
+                      </a:endParaRPr>
+                    </a:p>
+                  </a:txBody>
+                  <a:tcPr marL="76517" marR="76517" marT="51117" marB="51117" anchor="ctr" anchorCtr="0">
+                    <a:lnL>
+                      <a:noFill/>
+                    </a:lnL>
+                    <a:lnR>
+                      <a:noFill/>
+                    </a:lnR>
+                    <a:lnT>
+                      <a:noFill/>
+                    </a:lnT>
+                    <a:lnB>
+                      <a:noFill/>
+                    </a:lnB>
+                    <a:noFill/>
+                  </a:tcPr>
+                </a:tc>
+                <a:tc>
+                  <a:txBody>
+                    <a:bodyPr/>
+                    <a:p>
+                      <a:r>
+                        <a:rPr sz="1100" b="0" i="0">
+                          <a:solidFill>
+                            <a:srgbClr val="BFBFBF"/>
+                          </a:solidFill>
+                          <a:latin typeface="-apple-system"/>
+                          <a:ea typeface="-apple-system"/>
+                        </a:rPr>
+                        <a:t>Lightweight, fast, CPU-efficient</a:t>
+                      </a:r>
+                      <a:endParaRPr sz="1100" b="0" i="0">
+                        <a:solidFill>
+                          <a:srgbClr val="BFBFBF"/>
+                        </a:solidFill>
+                        <a:latin typeface="-apple-system"/>
+                        <a:ea typeface="-apple-system"/>
+                      </a:endParaRPr>
+                    </a:p>
+                  </a:txBody>
+                  <a:tcPr marL="76517" marR="76517" marT="51117" marB="51117" anchor="ctr" anchorCtr="0">
+                    <a:lnL>
+                      <a:noFill/>
+                    </a:lnL>
+                    <a:lnR>
+                      <a:noFill/>
+                    </a:lnR>
+                    <a:lnT>
+                      <a:noFill/>
+                    </a:lnT>
+                    <a:lnB>
+                      <a:noFill/>
+                    </a:lnB>
+                    <a:noFill/>
+                  </a:tcPr>
+                </a:tc>
+              </a:tr>
+              <a:tr h="551815">
+                <a:tc>
+                  <a:txBody>
+                    <a:bodyPr/>
+                    <a:p>
+                      <a:r>
+                        <a:rPr sz="1100" b="0" i="0">
+                          <a:solidFill>
+                            <a:srgbClr val="BFBFBF"/>
+                          </a:solidFill>
+                          <a:latin typeface="-apple-system"/>
+                          <a:ea typeface="-apple-system"/>
+                        </a:rPr>
+                        <a:t>Speech-to-Text</a:t>
+                      </a:r>
+                      <a:endParaRPr sz="1100" b="0" i="0">
+                        <a:solidFill>
+                          <a:srgbClr val="BFBFBF"/>
+                        </a:solidFill>
+                        <a:latin typeface="-apple-system"/>
+                        <a:ea typeface="-apple-system"/>
+                      </a:endParaRPr>
+                    </a:p>
+                  </a:txBody>
+                  <a:tcPr marL="76517" marR="76517" marT="51117" marB="51117" anchor="ctr" anchorCtr="0">
+                    <a:lnL>
+                      <a:noFill/>
+                    </a:lnL>
+                    <a:lnR>
+                      <a:noFill/>
+                    </a:lnR>
+                    <a:lnT>
+                      <a:noFill/>
+                    </a:lnT>
+                    <a:lnB>
+                      <a:noFill/>
+                    </a:lnB>
+                    <a:noFill/>
+                  </a:tcPr>
+                </a:tc>
+                <a:tc>
+                  <a:txBody>
+                    <a:bodyPr/>
+                    <a:p>
+                      <a:r>
+                        <a:rPr sz="1100" b="0" i="0">
+                          <a:solidFill>
+                            <a:srgbClr val="BFBFBF"/>
+                          </a:solidFill>
+                          <a:latin typeface="-apple-system"/>
+                          <a:ea typeface="-apple-system"/>
+                        </a:rPr>
+                        <a:t>OpenAI Whisper</a:t>
+                      </a:r>
+                      <a:endParaRPr sz="1100" b="0" i="0">
+                        <a:solidFill>
+                          <a:srgbClr val="BFBFBF"/>
+                        </a:solidFill>
+                        <a:latin typeface="-apple-system"/>
+                        <a:ea typeface="-apple-system"/>
+                      </a:endParaRPr>
+                    </a:p>
+                  </a:txBody>
+                  <a:tcPr marL="76517" marR="76517" marT="51117" marB="51117" anchor="ctr" anchorCtr="0">
+                    <a:lnL>
+                      <a:noFill/>
+                    </a:lnL>
+                    <a:lnR>
+                      <a:noFill/>
+                    </a:lnR>
+                    <a:lnT>
+                      <a:noFill/>
+                    </a:lnT>
+                    <a:lnB>
+                      <a:noFill/>
+                    </a:lnB>
+                    <a:noFill/>
+                  </a:tcPr>
+                </a:tc>
+                <a:tc>
+                  <a:txBody>
+                    <a:bodyPr/>
+                    <a:p>
+                      <a:r>
+                        <a:rPr sz="1100" b="0" i="0">
+                          <a:solidFill>
+                            <a:srgbClr val="BFBFBF"/>
+                          </a:solidFill>
+                          <a:latin typeface="-apple-system"/>
+                          <a:ea typeface="-apple-system"/>
+                        </a:rPr>
+                        <a:t>High accuracy, handles accents &amp; noise</a:t>
+                      </a:r>
+                      <a:endParaRPr sz="1100" b="0" i="0">
+                        <a:solidFill>
+                          <a:srgbClr val="BFBFBF"/>
+                        </a:solidFill>
+                        <a:latin typeface="-apple-system"/>
+                        <a:ea typeface="-apple-system"/>
+                      </a:endParaRPr>
+                    </a:p>
+                  </a:txBody>
+                  <a:tcPr marL="76517" marR="76517" marT="51117" marB="51117" anchor="ctr" anchorCtr="0">
+                    <a:lnL>
+                      <a:noFill/>
+                    </a:lnL>
+                    <a:lnR>
+                      <a:noFill/>
+                    </a:lnR>
+                    <a:lnT>
+                      <a:noFill/>
+                    </a:lnT>
+                    <a:lnB>
+                      <a:noFill/>
+                    </a:lnB>
+                    <a:noFill/>
+                  </a:tcPr>
+                </a:tc>
+              </a:tr>
+              <a:tr h="553720">
+                <a:tc>
+                  <a:txBody>
+                    <a:bodyPr/>
+                    <a:p>
+                      <a:r>
+                        <a:rPr sz="1100" b="0" i="0">
+                          <a:solidFill>
+                            <a:srgbClr val="BFBFBF"/>
+                          </a:solidFill>
+                          <a:latin typeface="-apple-system"/>
+                          <a:ea typeface="-apple-system"/>
+                        </a:rPr>
+                        <a:t>Large Language Model</a:t>
+                      </a:r>
+                      <a:endParaRPr sz="1100" b="0" i="0">
+                        <a:solidFill>
+                          <a:srgbClr val="BFBFBF"/>
+                        </a:solidFill>
+                        <a:latin typeface="-apple-system"/>
+                        <a:ea typeface="-apple-system"/>
+                      </a:endParaRPr>
+                    </a:p>
+                  </a:txBody>
+                  <a:tcPr marL="76517" marR="76517" marT="51117" marB="51117" anchor="ctr" anchorCtr="0">
+                    <a:lnL>
+                      <a:noFill/>
+                    </a:lnL>
+                    <a:lnR>
+                      <a:noFill/>
+                    </a:lnR>
+                    <a:lnT>
+                      <a:noFill/>
+                    </a:lnT>
+                    <a:lnB>
+                      <a:noFill/>
+                    </a:lnB>
+                    <a:noFill/>
+                  </a:tcPr>
+                </a:tc>
+                <a:tc>
+                  <a:txBody>
+                    <a:bodyPr/>
+                    <a:p>
+                      <a:r>
+                        <a:rPr sz="1100" b="0" i="0">
+                          <a:solidFill>
+                            <a:srgbClr val="BFBFBF"/>
+                          </a:solidFill>
+                          <a:latin typeface="-apple-system"/>
+                          <a:ea typeface="-apple-system"/>
+                        </a:rPr>
+                        <a:t>GPT-4.1-mini</a:t>
+                      </a:r>
+                      <a:endParaRPr sz="1100" b="0" i="0">
+                        <a:solidFill>
+                          <a:srgbClr val="BFBFBF"/>
+                        </a:solidFill>
+                        <a:latin typeface="-apple-system"/>
+                        <a:ea typeface="-apple-system"/>
+                      </a:endParaRPr>
+                    </a:p>
+                  </a:txBody>
+                  <a:tcPr marL="76517" marR="76517" marT="51117" marB="51117" anchor="ctr" anchorCtr="0">
+                    <a:lnL>
+                      <a:noFill/>
+                    </a:lnL>
+                    <a:lnR>
+                      <a:noFill/>
+                    </a:lnR>
+                    <a:lnT>
+                      <a:noFill/>
+                    </a:lnT>
+                    <a:lnB>
+                      <a:noFill/>
+                    </a:lnB>
+                    <a:noFill/>
+                  </a:tcPr>
+                </a:tc>
+                <a:tc>
+                  <a:txBody>
+                    <a:bodyPr/>
+                    <a:p>
+                      <a:r>
+                        <a:rPr sz="1100" b="0" i="0">
+                          <a:solidFill>
+                            <a:srgbClr val="BFBFBF"/>
+                          </a:solidFill>
+                          <a:latin typeface="-apple-system"/>
+                          <a:ea typeface="-apple-system"/>
+                        </a:rPr>
+                        <a:t>Function calling, 200K TPM, fast TTFT</a:t>
+                      </a:r>
+                      <a:endParaRPr sz="1100" b="0" i="0">
+                        <a:solidFill>
+                          <a:srgbClr val="BFBFBF"/>
+                        </a:solidFill>
+                        <a:latin typeface="-apple-system"/>
+                        <a:ea typeface="-apple-system"/>
+                      </a:endParaRPr>
+                    </a:p>
+                  </a:txBody>
+                  <a:tcPr marL="76517" marR="76517" marT="51117" marB="51117" anchor="ctr" anchorCtr="0">
+                    <a:lnL>
+                      <a:noFill/>
+                    </a:lnL>
+                    <a:lnR>
+                      <a:noFill/>
+                    </a:lnR>
+                    <a:lnT>
+                      <a:noFill/>
+                    </a:lnT>
+                    <a:lnB>
+                      <a:noFill/>
+                    </a:lnB>
+                    <a:noFill/>
+                  </a:tcPr>
+                </a:tc>
+              </a:tr>
+              <a:tr h="551815">
+                <a:tc>
+                  <a:txBody>
+                    <a:bodyPr/>
+                    <a:p>
+                      <a:r>
+                        <a:rPr sz="1100" b="0" i="0">
+                          <a:solidFill>
+                            <a:srgbClr val="BFBFBF"/>
+                          </a:solidFill>
+                          <a:latin typeface="-apple-system"/>
+                          <a:ea typeface="-apple-system"/>
+                        </a:rPr>
+                        <a:t>Text-to-Speech</a:t>
+                      </a:r>
+                      <a:endParaRPr sz="1100" b="0" i="0">
+                        <a:solidFill>
+                          <a:srgbClr val="BFBFBF"/>
+                        </a:solidFill>
+                        <a:latin typeface="-apple-system"/>
+                        <a:ea typeface="-apple-system"/>
+                      </a:endParaRPr>
+                    </a:p>
+                  </a:txBody>
+                  <a:tcPr marL="76517" marR="76517" marT="51117" marB="51117" anchor="ctr" anchorCtr="0">
+                    <a:lnL>
+                      <a:noFill/>
+                    </a:lnL>
+                    <a:lnR>
+                      <a:noFill/>
+                    </a:lnR>
+                    <a:lnT>
+                      <a:noFill/>
+                    </a:lnT>
+                    <a:lnB>
+                      <a:noFill/>
+                    </a:lnB>
+                    <a:noFill/>
+                  </a:tcPr>
+                </a:tc>
+                <a:tc>
+                  <a:txBody>
+                    <a:bodyPr/>
+                    <a:p>
+                      <a:r>
+                        <a:rPr sz="1100" b="0" i="0">
+                          <a:solidFill>
+                            <a:srgbClr val="BFBFBF"/>
+                          </a:solidFill>
+                          <a:latin typeface="-apple-system"/>
+                          <a:ea typeface="-apple-system"/>
+                        </a:rPr>
+                        <a:t>Cartesia Sonic-2</a:t>
+                      </a:r>
+                      <a:endParaRPr sz="1100" b="0" i="0">
+                        <a:solidFill>
+                          <a:srgbClr val="BFBFBF"/>
+                        </a:solidFill>
+                        <a:latin typeface="-apple-system"/>
+                        <a:ea typeface="-apple-system"/>
+                      </a:endParaRPr>
+                    </a:p>
+                  </a:txBody>
+                  <a:tcPr marL="76517" marR="76517" marT="51117" marB="51117" anchor="ctr" anchorCtr="0">
+                    <a:lnL>
+                      <a:noFill/>
+                    </a:lnL>
+                    <a:lnR>
+                      <a:noFill/>
+                    </a:lnR>
+                    <a:lnT>
+                      <a:noFill/>
+                    </a:lnT>
+                    <a:lnB>
+                      <a:noFill/>
+                    </a:lnB>
+                    <a:noFill/>
+                  </a:tcPr>
+                </a:tc>
+                <a:tc>
+                  <a:txBody>
+                    <a:bodyPr/>
+                    <a:p>
+                      <a:r>
+                        <a:rPr sz="1100" b="0" i="0">
+                          <a:solidFill>
+                            <a:srgbClr val="BFBFBF"/>
+                          </a:solidFill>
+                          <a:latin typeface="-apple-system"/>
+                          <a:ea typeface="-apple-system"/>
+                        </a:rPr>
+                        <a:t>Ultra-low latency (~100ms), natural voice</a:t>
+                      </a:r>
+                      <a:endParaRPr sz="1100" b="0" i="0">
+                        <a:solidFill>
+                          <a:srgbClr val="BFBFBF"/>
+                        </a:solidFill>
+                        <a:latin typeface="-apple-system"/>
+                        <a:ea typeface="-apple-system"/>
+                      </a:endParaRPr>
+                    </a:p>
+                  </a:txBody>
+                  <a:tcPr marL="76517" marR="76517" marT="51117" marB="51117" anchor="ctr" anchorCtr="0">
+                    <a:lnL>
+                      <a:noFill/>
+                    </a:lnL>
+                    <a:lnR>
+                      <a:noFill/>
+                    </a:lnR>
+                    <a:lnT>
+                      <a:noFill/>
+                    </a:lnT>
+                    <a:lnB>
+                      <a:noFill/>
+                    </a:lnB>
+                    <a:noFill/>
+                  </a:tcPr>
+                </a:tc>
+              </a:tr>
+              <a:tr h="552450">
+                <a:tc>
+                  <a:txBody>
+                    <a:bodyPr/>
+                    <a:p>
+                      <a:r>
+                        <a:rPr sz="1100" b="0" i="0">
+                          <a:solidFill>
+                            <a:srgbClr val="BFBFBF"/>
+                          </a:solidFill>
+                          <a:latin typeface="-apple-system"/>
+                          <a:ea typeface="-apple-system"/>
+                        </a:rPr>
+                        <a:t>RAG / Knowledge Base</a:t>
+                      </a:r>
+                      <a:endParaRPr sz="1100" b="0" i="0">
+                        <a:solidFill>
+                          <a:srgbClr val="BFBFBF"/>
+                        </a:solidFill>
+                        <a:latin typeface="-apple-system"/>
+                        <a:ea typeface="-apple-system"/>
+                      </a:endParaRPr>
+                    </a:p>
+                  </a:txBody>
+                  <a:tcPr marL="76517" marR="76517" marT="51117" marB="51117" anchor="ctr" anchorCtr="0">
+                    <a:lnL>
+                      <a:noFill/>
+                    </a:lnL>
+                    <a:lnR>
+                      <a:noFill/>
+                    </a:lnR>
+                    <a:lnT>
+                      <a:noFill/>
+                    </a:lnT>
+                    <a:lnB>
+                      <a:noFill/>
+                    </a:lnB>
+                    <a:noFill/>
+                  </a:tcPr>
+                </a:tc>
+                <a:tc>
+                  <a:txBody>
+                    <a:bodyPr/>
+                    <a:p>
+                      <a:r>
+                        <a:rPr sz="1100" b="0" i="0">
+                          <a:solidFill>
+                            <a:srgbClr val="BFBFBF"/>
+                          </a:solidFill>
+                          <a:latin typeface="-apple-system"/>
+                          <a:ea typeface="-apple-system"/>
+                        </a:rPr>
+                        <a:t>TF-IDF Retriever</a:t>
+                      </a:r>
+                      <a:endParaRPr sz="1100" b="0" i="0">
+                        <a:solidFill>
+                          <a:srgbClr val="BFBFBF"/>
+                        </a:solidFill>
+                        <a:latin typeface="-apple-system"/>
+                        <a:ea typeface="-apple-system"/>
+                      </a:endParaRPr>
+                    </a:p>
+                  </a:txBody>
+                  <a:tcPr marL="76517" marR="76517" marT="51117" marB="51117" anchor="ctr" anchorCtr="0">
+                    <a:lnL>
+                      <a:noFill/>
+                    </a:lnL>
+                    <a:lnR>
+                      <a:noFill/>
+                    </a:lnR>
+                    <a:lnT>
+                      <a:noFill/>
+                    </a:lnT>
+                    <a:lnB>
+                      <a:noFill/>
+                    </a:lnB>
+                    <a:noFill/>
+                  </a:tcPr>
+                </a:tc>
+                <a:tc>
+                  <a:txBody>
+                    <a:bodyPr/>
+                    <a:p>
+                      <a:r>
+                        <a:rPr sz="1100" b="0" i="0">
+                          <a:solidFill>
+                            <a:srgbClr val="BFBFBF"/>
+                          </a:solidFill>
+                          <a:latin typeface="-apple-system"/>
+                          <a:ea typeface="-apple-system"/>
+                        </a:rPr>
+                        <a:t>Lightweight, zero dependencies, fast</a:t>
+                      </a:r>
+                      <a:endParaRPr sz="1100" b="0" i="0">
+                        <a:solidFill>
+                          <a:srgbClr val="BFBFBF"/>
+                        </a:solidFill>
+                        <a:latin typeface="-apple-system"/>
+                        <a:ea typeface="-apple-system"/>
+                      </a:endParaRPr>
+                    </a:p>
+                  </a:txBody>
+                  <a:tcPr marL="76517" marR="76517" marT="51117" marB="51117" anchor="ctr" anchorCtr="0">
+                    <a:lnL>
+                      <a:noFill/>
+                    </a:lnL>
+                    <a:lnR>
+                      <a:noFill/>
+                    </a:lnR>
+                    <a:lnT>
+                      <a:noFill/>
+                    </a:lnT>
+                    <a:lnB>
+                      <a:noFill/>
+                    </a:lnB>
+                    <a:noFill/>
+                  </a:tcPr>
+                </a:tc>
+              </a:tr>
+              <a:tr h="551815">
+                <a:tc>
+                  <a:txBody>
+                    <a:bodyPr/>
+                    <a:p>
+                      <a:r>
+                        <a:rPr sz="1100" b="0" i="0">
+                          <a:solidFill>
+                            <a:srgbClr val="BFBFBF"/>
+                          </a:solidFill>
+                          <a:latin typeface="-apple-system"/>
+                          <a:ea typeface="-apple-system"/>
+                        </a:rPr>
+                        <a:t>Backend</a:t>
+                      </a:r>
+                      <a:endParaRPr sz="1100" b="0" i="0">
+                        <a:solidFill>
+                          <a:srgbClr val="BFBFBF"/>
+                        </a:solidFill>
+                        <a:latin typeface="-apple-system"/>
+                        <a:ea typeface="-apple-system"/>
+                      </a:endParaRPr>
+                    </a:p>
+                  </a:txBody>
+                  <a:tcPr marL="76517" marR="76517" marT="51117" marB="51117" anchor="ctr" anchorCtr="0">
+                    <a:lnL>
+                      <a:noFill/>
+                    </a:lnL>
+                    <a:lnR>
+                      <a:noFill/>
+                    </a:lnR>
+                    <a:lnT>
+                      <a:noFill/>
+                    </a:lnT>
+                    <a:lnB>
+                      <a:noFill/>
+                    </a:lnB>
+                    <a:noFill/>
+                  </a:tcPr>
+                </a:tc>
+                <a:tc>
+                  <a:txBody>
+                    <a:bodyPr/>
+                    <a:p>
+                      <a:r>
+                        <a:rPr sz="1100" b="0" i="0">
+                          <a:solidFill>
+                            <a:srgbClr val="BFBFBF"/>
+                          </a:solidFill>
+                          <a:latin typeface="-apple-system"/>
+                          <a:ea typeface="-apple-system"/>
+                        </a:rPr>
+                        <a:t>Flask + Python</a:t>
+                      </a:r>
+                      <a:endParaRPr sz="1100" b="0" i="0">
+                        <a:solidFill>
+                          <a:srgbClr val="BFBFBF"/>
+                        </a:solidFill>
+                        <a:latin typeface="-apple-system"/>
+                        <a:ea typeface="-apple-system"/>
+                      </a:endParaRPr>
+                    </a:p>
+                  </a:txBody>
+                  <a:tcPr marL="76517" marR="76517" marT="51117" marB="51117" anchor="ctr" anchorCtr="0">
+                    <a:lnL>
+                      <a:noFill/>
+                    </a:lnL>
+                    <a:lnR>
+                      <a:noFill/>
+                    </a:lnR>
+                    <a:lnT>
+                      <a:noFill/>
+                    </a:lnT>
+                    <a:lnB>
+                      <a:noFill/>
+                    </a:lnB>
+                    <a:noFill/>
+                  </a:tcPr>
+                </a:tc>
+                <a:tc>
+                  <a:txBody>
+                    <a:bodyPr/>
+                    <a:p>
+                      <a:r>
+                        <a:rPr sz="1100" b="0" i="0">
+                          <a:solidFill>
+                            <a:srgbClr val="BFBFBF"/>
+                          </a:solidFill>
+                          <a:latin typeface="-apple-system"/>
+                          <a:ea typeface="-apple-system"/>
+                        </a:rPr>
+                        <a:t>JWT token minting, static serving</a:t>
+                      </a:r>
+                      <a:endParaRPr sz="1100" b="0" i="0">
+                        <a:solidFill>
+                          <a:srgbClr val="BFBFBF"/>
+                        </a:solidFill>
+                        <a:latin typeface="-apple-system"/>
+                        <a:ea typeface="-apple-system"/>
+                      </a:endParaRPr>
+                    </a:p>
+                  </a:txBody>
+                  <a:tcPr marL="76517" marR="76517" marT="51117" marB="51117" anchor="ctr" anchorCtr="0">
+                    <a:lnL>
+                      <a:noFill/>
+                    </a:lnL>
+                    <a:lnR>
+                      <a:noFill/>
+                    </a:lnR>
+                    <a:lnT>
+                      <a:noFill/>
+                    </a:lnT>
+                    <a:lnB>
+                      <a:noFill/>
+                    </a:lnB>
+                    <a:noFill/>
+                  </a:tcPr>
+                </a:tc>
+              </a:tr>
+              <a:tr h="504190">
+                <a:tc>
+                  <a:txBody>
+                    <a:bodyPr/>
+                    <a:p>
+                      <a:r>
+                        <a:rPr sz="1100" b="0" i="0">
+                          <a:solidFill>
+                            <a:srgbClr val="BFBFBF"/>
+                          </a:solidFill>
+                          <a:latin typeface="-apple-system"/>
+                          <a:ea typeface="-apple-system"/>
+                        </a:rPr>
+                        <a:t>Deployment</a:t>
+                      </a:r>
+                      <a:endParaRPr sz="1100" b="0" i="0">
+                        <a:solidFill>
+                          <a:srgbClr val="BFBFBF"/>
+                        </a:solidFill>
+                        <a:latin typeface="-apple-system"/>
+                        <a:ea typeface="-apple-system"/>
+                      </a:endParaRPr>
+                    </a:p>
+                  </a:txBody>
+                  <a:tcPr marL="76517" marR="76517" marT="51117" marB="51117" anchor="ctr" anchorCtr="0">
+                    <a:lnL>
+                      <a:noFill/>
+                    </a:lnL>
+                    <a:lnR>
+                      <a:noFill/>
+                    </a:lnR>
+                    <a:lnT>
+                      <a:noFill/>
+                    </a:lnT>
+                    <a:lnB>
+                      <a:noFill/>
+                    </a:lnB>
+                    <a:noFill/>
+                  </a:tcPr>
+                </a:tc>
+                <a:tc>
+                  <a:txBody>
+                    <a:bodyPr/>
+                    <a:p>
+                      <a:r>
+                        <a:rPr sz="1100" b="0" i="0">
+                          <a:solidFill>
+                            <a:srgbClr val="BFBFBF"/>
+                          </a:solidFill>
+                          <a:latin typeface="-apple-system"/>
+                          <a:ea typeface="-apple-system"/>
+                        </a:rPr>
+                        <a:t>Docker + Compose</a:t>
+                      </a:r>
+                      <a:endParaRPr sz="1100" b="0" i="0">
+                        <a:solidFill>
+                          <a:srgbClr val="BFBFBF"/>
+                        </a:solidFill>
+                        <a:latin typeface="-apple-system"/>
+                        <a:ea typeface="-apple-system"/>
+                      </a:endParaRPr>
+                    </a:p>
+                  </a:txBody>
+                  <a:tcPr marL="76517" marR="76517" marT="51117" marB="51117" anchor="ctr" anchorCtr="0">
+                    <a:lnL>
+                      <a:noFill/>
+                    </a:lnL>
+                    <a:lnR>
+                      <a:noFill/>
+                    </a:lnR>
+                    <a:lnT>
+                      <a:noFill/>
+                    </a:lnT>
+                    <a:lnB>
+                      <a:noFill/>
+                    </a:lnB>
+                    <a:noFill/>
+                  </a:tcPr>
+                </a:tc>
+                <a:tc>
+                  <a:txBody>
+                    <a:bodyPr/>
+                    <a:p>
+                      <a:r>
+                        <a:rPr sz="1100" b="0" i="0">
+                          <a:solidFill>
+                            <a:srgbClr val="BFBFBF"/>
+                          </a:solidFill>
+                          <a:latin typeface="-apple-system"/>
+                          <a:ea typeface="-apple-system"/>
+                        </a:rPr>
+                        <a:t>One-command portable setup</a:t>
+                      </a:r>
+                      <a:endParaRPr sz="1100" b="0" i="0">
+                        <a:solidFill>
+                          <a:srgbClr val="BFBFBF"/>
+                        </a:solidFill>
+                        <a:latin typeface="-apple-system"/>
+                        <a:ea typeface="-apple-system"/>
+                      </a:endParaRPr>
+                    </a:p>
+                  </a:txBody>
+                  <a:tcPr marL="76517" marR="76517" marT="51117" marB="51117" anchor="ctr" anchorCtr="0">
+                    <a:lnL>
+                      <a:noFill/>
+                    </a:lnL>
+                    <a:lnR>
+                      <a:noFill/>
+                    </a:lnR>
+                    <a:lnT>
+                      <a:noFill/>
+                    </a:lnT>
+                    <a:lnB>
+                      <a:noFill/>
+                    </a:lnB>
+                    <a:noFill/>
+                  </a:tcPr>
+                </a:tc>
+              </a:tr>
+            </a:tbl>
+          </a:graphicData>
+        </a:graphic>
+      </p:graphicFrame>
+    </p:spTree>
+  </p:cSld>
+  <p:clrMapOvr>
+    <a:masterClrMapping/>
+  </p:clrMapOvr>
+</p:sld>
+</file>
+
+<file path=ppt/slides/slide6.xml><?xml version="1.0" encoding="utf-8"?>
+<p:sld xmlns:a="http://schemas.openxmlformats.org/drawingml/2006/main" xmlns:r="http://schemas.openxmlformats.org/officeDocument/2006/relationships" xmlns:p="http://schemas.openxmlformats.org/presentationml/2006/main">
+  <p:cSld>
+    <p:spTree>
+      <p:nvGrpSpPr>
+        <p:cNvPr id="1" name=""/>
+        <p:cNvGrpSpPr/>
+        <p:nvPr/>
+      </p:nvGrpSpPr>
+      <p:grpSpPr/>
+      <p:sp>
+        <p:nvSpPr>
+          <p:cNvPr id="2" name="Content Placeholder 1"/>
+          <p:cNvSpPr>
+            <a:spLocks noGrp="1"/>
+          </p:cNvSpPr>
+          <p:nvPr>
+            <p:ph idx="1"/>
+          </p:nvPr>
+        </p:nvSpPr>
+        <p:spPr/>
+        <p:txBody>
+          <a:bodyPr/>
+          <a:p>
+            <a:r>
+              <a:rPr lang="en-US" altLang="en-US"/>
+              <a:t>What Aria Can Do</a:t>
+            </a:r>
+            <a:endParaRPr lang="en-US" altLang="en-US"/>
+          </a:p>
+          <a:p>
+            <a:endParaRPr lang="en-US" altLang="en-US"/>
+          </a:p>
+        </p:txBody>
+      </p:sp>
+      <p:sp>
+        <p:nvSpPr>
+          <p:cNvPr id="3" name="Title 2"/>
+          <p:cNvSpPr>
+            <a:spLocks noGrp="1"/>
+          </p:cNvSpPr>
+          <p:nvPr>
+            <p:ph type="title"/>
+          </p:nvPr>
+        </p:nvSpPr>
+        <p:spPr>
+          <a:xfrm>
+            <a:off x="635" y="2049780"/>
+            <a:ext cx="3580765" cy="2562225"/>
+          </a:xfrm>
+        </p:spPr>
+        <p:txBody>
+          <a:bodyPr/>
+          <a:p>
+            <a:r>
+              <a:rPr lang="en-US" altLang="en-US"/>
+              <a:t>Key Features &amp; Capabilities</a:t>
+            </a:r>
+            <a:endParaRPr lang="en-US" altLang="en-US"/>
+          </a:p>
+        </p:txBody>
+      </p:sp>
+      <p:graphicFrame>
+        <p:nvGraphicFramePr>
+          <p:cNvPr id="4" name="Table 3"/>
+          <p:cNvGraphicFramePr/>
+          <p:nvPr>
+            <p:custDataLst>
+              <p:tags r:id="rId1"/>
+            </p:custDataLst>
+          </p:nvPr>
+        </p:nvGraphicFramePr>
+        <p:xfrm>
+          <a:off x="4455160" y="107315"/>
+          <a:ext cx="7637145" cy="3832860"/>
+        </p:xfrm>
+        <a:graphic>
+          <a:graphicData uri="http://schemas.openxmlformats.org/drawingml/2006/table">
+            <a:tbl>
+              <a:tblPr firstRow="1" bandRow="1">
+                <a:tableStyleId>{5C22544A-7EE6-4342-B048-85BDC9FD1C3A}</a:tableStyleId>
+              </a:tblPr>
+              <a:tblGrid>
+                <a:gridCol w="2101850"/>
+                <a:gridCol w="2989580"/>
+                <a:gridCol w="2545715"/>
+              </a:tblGrid>
+              <a:tr h="637540">
+                <a:tc>
+                  <a:txBody>
+                    <a:bodyPr/>
+                    <a:p>
+                      <a:pPr>
+                        <a:buNone/>
+                      </a:pPr>
+                      <a:r>
+                        <a:rPr lang="en-US"/>
+                        <a:t>Tool</a:t>
+                      </a:r>
+                      <a:endParaRPr lang="en-US"/>
+                    </a:p>
+                  </a:txBody>
+                  <a:tcPr/>
+                </a:tc>
+                <a:tc>
+                  <a:txBody>
+                    <a:bodyPr/>
+                    <a:p>
+                      <a:pPr>
+                        <a:buNone/>
+                      </a:pPr>
+                      <a:r>
+                        <a:rPr lang="en-US"/>
+                        <a:t>Trigger </a:t>
+                      </a:r>
+                      <a:endParaRPr lang="en-US"/>
+                    </a:p>
+                  </a:txBody>
+                  <a:tcPr/>
+                </a:tc>
+                <a:tc>
+                  <a:txBody>
+                    <a:bodyPr/>
+                    <a:p>
+                      <a:pPr>
+                        <a:buNone/>
+                      </a:pPr>
+                      <a:r>
+                        <a:rPr lang="en-US"/>
+                        <a:t>Example</a:t>
+                      </a:r>
+                      <a:endParaRPr lang="en-US"/>
+                    </a:p>
+                  </a:txBody>
+                  <a:tcPr/>
+                </a:tc>
+              </a:tr>
+              <a:tr h="637540">
+                <a:tc>
+                  <a:txBody>
+                    <a:bodyPr/>
+                    <a:p>
+                      <a:pPr>
+                        <a:buNone/>
+                      </a:pPr>
+                      <a:r>
+                        <a:rPr lang="en-US" altLang="en-US"/>
+                        <a:t>get_order_status</a:t>
+                      </a:r>
+                      <a:endParaRPr lang="en-US" altLang="en-US"/>
+                    </a:p>
+                  </a:txBody>
+                  <a:tcPr/>
+                </a:tc>
+                <a:tc>
+                  <a:txBody>
+                    <a:bodyPr/>
+                    <a:p>
+                      <a:pPr>
+                        <a:buNone/>
+                      </a:pPr>
+                      <a:r>
+                        <a:rPr lang="en-US" altLang="en-US"/>
+                        <a:t>User asks about an order</a:t>
+                      </a:r>
+                      <a:endParaRPr lang="en-US" altLang="en-US"/>
+                    </a:p>
+                  </a:txBody>
+                  <a:tcPr/>
+                </a:tc>
+                <a:tc>
+                  <a:txBody>
+                    <a:bodyPr/>
+                    <a:p>
+                      <a:pPr>
+                        <a:buNone/>
+                      </a:pPr>
+                      <a:r>
+                        <a:rPr lang="en-US" altLang="en-US"/>
+                        <a:t>"Where is ORD-1042?"</a:t>
+                      </a:r>
+                      <a:endParaRPr lang="en-US" altLang="en-US"/>
+                    </a:p>
+                  </a:txBody>
+                  <a:tcPr/>
+                </a:tc>
+              </a:tr>
+              <a:tr h="640080">
+                <a:tc>
+                  <a:txBody>
+                    <a:bodyPr/>
+                    <a:p>
+                      <a:pPr>
+                        <a:buNone/>
+                      </a:pPr>
+                      <a:r>
+                        <a:rPr lang="en-US" altLang="en-US"/>
+                        <a:t>lookup_product</a:t>
+                      </a:r>
+                      <a:endParaRPr lang="en-US" altLang="en-US"/>
+                    </a:p>
+                  </a:txBody>
+                  <a:tcPr/>
+                </a:tc>
+                <a:tc>
+                  <a:txBody>
+                    <a:bodyPr/>
+                    <a:p>
+                      <a:pPr>
+                        <a:buNone/>
+                      </a:pPr>
+                      <a:r>
+                        <a:rPr lang="en-US" altLang="en-US"/>
+                        <a:t>Product inquiry</a:t>
+                      </a:r>
+                      <a:endParaRPr lang="en-US" altLang="en-US"/>
+                    </a:p>
+                  </a:txBody>
+                  <a:tcPr/>
+                </a:tc>
+                <a:tc>
+                  <a:txBody>
+                    <a:bodyPr/>
+                    <a:p>
+                      <a:pPr>
+                        <a:buNone/>
+                      </a:pPr>
+                      <a:r>
+                        <a:rPr lang="en-US" altLang="en-US"/>
+                        <a:t>"Tell me about the Sony headphones"</a:t>
+                      </a:r>
+                      <a:endParaRPr lang="en-US" altLang="en-US"/>
+                    </a:p>
+                  </a:txBody>
+                  <a:tcPr/>
+                </a:tc>
+              </a:tr>
+              <a:tr h="600075">
+                <a:tc>
+                  <a:txBody>
+                    <a:bodyPr/>
+                    <a:p>
+                      <a:pPr>
+                        <a:buNone/>
+                      </a:pPr>
+                      <a:r>
+                        <a:rPr lang="en-US" altLang="en-US"/>
+                        <a:t>get_returns_policy</a:t>
+                      </a:r>
+                      <a:endParaRPr lang="en-US" altLang="en-US"/>
+                    </a:p>
+                  </a:txBody>
+                  <a:tcPr/>
+                </a:tc>
+                <a:tc>
+                  <a:txBody>
+                    <a:bodyPr/>
+                    <a:p>
+                      <a:r>
+                        <a:rPr lang="en-US" altLang="en-US" sz="1800" b="0" i="0"/>
+                        <a:t>Returns/refunds/exchange</a:t>
+                      </a:r>
+                      <a:endParaRPr lang="en-US" altLang="en-US" sz="1800" b="0" i="0"/>
+                    </a:p>
+                  </a:txBody>
+                  <a:tcPr marL="76517" marR="76517" marT="51117" marB="51117" anchor="ctr" anchorCtr="0"/>
+                </a:tc>
+                <a:tc>
+                  <a:txBody>
+                    <a:bodyPr/>
+                    <a:p>
+                      <a:pPr>
+                        <a:buNone/>
+                      </a:pPr>
+                      <a:r>
+                        <a:rPr lang="en-US" altLang="en-US"/>
+                        <a:t>"I want to return my jacket"</a:t>
+                      </a:r>
+                      <a:endParaRPr lang="en-US" altLang="en-US"/>
+                    </a:p>
+                  </a:txBody>
+                  <a:tcPr/>
+                </a:tc>
+              </a:tr>
+              <a:tr h="637540">
+                <a:tc>
+                  <a:txBody>
+                    <a:bodyPr/>
+                    <a:p>
+                      <a:pPr>
+                        <a:buNone/>
+                      </a:pPr>
+                      <a:r>
+                        <a:rPr lang="en-US" altLang="en-US"/>
+                        <a:t>search_faq</a:t>
+                      </a:r>
+                      <a:endParaRPr lang="en-US" altLang="en-US"/>
+                    </a:p>
+                  </a:txBody>
+                  <a:tcPr/>
+                </a:tc>
+                <a:tc>
+                  <a:txBody>
+                    <a:bodyPr/>
+                    <a:p>
+                      <a:pPr>
+                        <a:buNone/>
+                      </a:pPr>
+                      <a:r>
+                        <a:rPr lang="en-US" altLang="en-US"/>
+                        <a:t>Policy questions</a:t>
+                      </a:r>
+                      <a:endParaRPr lang="en-US" altLang="en-US"/>
+                    </a:p>
+                  </a:txBody>
+                  <a:tcPr/>
+                </a:tc>
+                <a:tc>
+                  <a:txBody>
+                    <a:bodyPr/>
+                    <a:p>
+                      <a:pPr>
+                        <a:buNone/>
+                      </a:pPr>
+                      <a:r>
+                        <a:rPr lang="en-US" altLang="en-US"/>
+                        <a:t>"Is COD available?"</a:t>
+                      </a:r>
+                      <a:endParaRPr lang="en-US" altLang="en-US"/>
+                    </a:p>
+                  </a:txBody>
+                  <a:tcPr/>
+                </a:tc>
+              </a:tr>
+              <a:tr h="640080">
+                <a:tc>
+                  <a:txBody>
+                    <a:bodyPr/>
+                    <a:p>
+                      <a:pPr>
+                        <a:buNone/>
+                      </a:pPr>
+                      <a:r>
+                        <a:rPr lang="en-US" altLang="en-US"/>
+                        <a:t>get_current_datetime</a:t>
+                      </a:r>
+                      <a:endParaRPr lang="en-US" altLang="en-US"/>
+                    </a:p>
+                  </a:txBody>
+                  <a:tcPr/>
+                </a:tc>
+                <a:tc>
+                  <a:txBody>
+                    <a:bodyPr/>
+                    <a:p>
+                      <a:pPr>
+                        <a:buNone/>
+                      </a:pPr>
+                      <a:r>
+                        <a:rPr lang="en-US" altLang="en-US"/>
+                        <a:t>Date/time queries</a:t>
+                      </a:r>
+                      <a:endParaRPr lang="en-US" altLang="en-US"/>
+                    </a:p>
+                  </a:txBody>
+                  <a:tcPr/>
+                </a:tc>
+                <a:tc>
+                  <a:txBody>
+                    <a:bodyPr/>
+                    <a:p>
+                      <a:pPr>
+                        <a:buNone/>
+                      </a:pPr>
+                      <a:r>
+                        <a:rPr lang="en-US" altLang="en-US"/>
+                        <a:t>"What day is it today?"</a:t>
+                      </a:r>
+                      <a:endParaRPr lang="en-US" altLang="en-US"/>
+                    </a:p>
+                  </a:txBody>
+                  <a:tcPr/>
+                </a:tc>
+              </a:tr>
+            </a:tbl>
+          </a:graphicData>
+        </a:graphic>
+      </p:graphicFrame>
+      <p:sp>
+        <p:nvSpPr>
+          <p:cNvPr id="8" name="Text Box 7"/>
+          <p:cNvSpPr txBox="1"/>
+          <p:nvPr/>
+        </p:nvSpPr>
+        <p:spPr>
+          <a:xfrm>
+            <a:off x="4455160" y="3940810"/>
+            <a:ext cx="7456170" cy="2553335"/>
+          </a:xfrm>
+          <a:prstGeom prst="rect">
+            <a:avLst/>
+          </a:prstGeom>
+        </p:spPr>
+        <p:txBody>
+          <a:bodyPr wrap="square">
+            <a:noAutofit/>
+          </a:bodyPr>
+          <a:p>
+            <a:pPr marL="0" indent="0">
+              <a:spcBef>
+                <a:spcPct val="0"/>
+              </a:spcBef>
+              <a:spcAft>
+                <a:spcPts val="1600"/>
+              </a:spcAft>
+            </a:pPr>
+            <a:r>
+              <a:rPr sz="1600" b="1" i="0">
+                <a:solidFill>
+                  <a:schemeClr val="bg2">
+                    <a:lumMod val="10000"/>
+                  </a:schemeClr>
+                </a:solidFill>
+                <a:latin typeface="-apple-system"/>
+                <a:ea typeface="-apple-system"/>
+              </a:rPr>
+              <a:t>Data:</a:t>
+            </a:r>
+            <a:endParaRPr sz="1600" b="1" i="0">
+              <a:solidFill>
+                <a:schemeClr val="bg2">
+                  <a:lumMod val="10000"/>
+                </a:schemeClr>
+              </a:solidFill>
+              <a:latin typeface="-apple-system"/>
+              <a:ea typeface="-apple-system"/>
+            </a:endParaRPr>
+          </a:p>
+          <a:p>
+            <a:pPr marL="0" indent="0">
+              <a:spcBef>
+                <a:spcPts val="400"/>
+              </a:spcBef>
+              <a:spcAft>
+                <a:spcPts val="400"/>
+              </a:spcAft>
+              <a:buFont typeface="Arial" panose="020B0604020202090204"/>
+              <a:buChar char="•"/>
+            </a:pPr>
+            <a:r>
+              <a:rPr sz="1600" b="1" i="0">
+                <a:solidFill>
+                  <a:schemeClr val="bg2">
+                    <a:lumMod val="10000"/>
+                  </a:schemeClr>
+                </a:solidFill>
+                <a:latin typeface="-apple-system"/>
+                <a:ea typeface="-apple-system"/>
+              </a:rPr>
+              <a:t>10 sample orders (ORD-1001 to ORD-1010)</a:t>
+            </a:r>
+            <a:endParaRPr sz="1600" b="1" i="0">
+              <a:solidFill>
+                <a:schemeClr val="bg2">
+                  <a:lumMod val="10000"/>
+                </a:schemeClr>
+              </a:solidFill>
+              <a:latin typeface="-apple-system"/>
+              <a:ea typeface="-apple-system"/>
+            </a:endParaRPr>
+          </a:p>
+          <a:p>
+            <a:pPr marL="0" indent="0">
+              <a:spcBef>
+                <a:spcPts val="400"/>
+              </a:spcBef>
+              <a:spcAft>
+                <a:spcPts val="400"/>
+              </a:spcAft>
+              <a:buFont typeface="Arial" panose="020B0604020202090204"/>
+              <a:buChar char="•"/>
+            </a:pPr>
+            <a:r>
+              <a:rPr sz="1600" b="1" i="0">
+                <a:solidFill>
+                  <a:schemeClr val="bg2">
+                    <a:lumMod val="10000"/>
+                  </a:schemeClr>
+                </a:solidFill>
+                <a:latin typeface="-apple-system"/>
+                <a:ea typeface="-apple-system"/>
+              </a:rPr>
+              <a:t>20 products across 5 categories (Electronics, Clothing, Home &amp; Kitchen, Books, Sports)</a:t>
+            </a:r>
+            <a:endParaRPr sz="1600" b="1" i="0">
+              <a:solidFill>
+                <a:schemeClr val="bg2">
+                  <a:lumMod val="10000"/>
+                </a:schemeClr>
+              </a:solidFill>
+              <a:latin typeface="-apple-system"/>
+              <a:ea typeface="-apple-system"/>
+            </a:endParaRPr>
+          </a:p>
+          <a:p>
+            <a:pPr marL="0" indent="0">
+              <a:spcBef>
+                <a:spcPts val="400"/>
+              </a:spcBef>
+              <a:spcAft>
+                <a:spcPts val="400"/>
+              </a:spcAft>
+              <a:buFont typeface="Arial" panose="020B0604020202090204"/>
+              <a:buChar char="•"/>
+            </a:pPr>
+            <a:r>
+              <a:rPr sz="1600" b="1" i="0">
+                <a:solidFill>
+                  <a:schemeClr val="bg2">
+                    <a:lumMod val="10000"/>
+                  </a:schemeClr>
+                </a:solidFill>
+                <a:latin typeface="-apple-system"/>
+                <a:ea typeface="-apple-system"/>
+              </a:rPr>
+              <a:t>30-entry FAQ (shipping, payment, returns, account policies)</a:t>
+            </a:r>
+            <a:endParaRPr sz="1600" b="1" i="0">
+              <a:solidFill>
+                <a:schemeClr val="bg2">
+                  <a:lumMod val="10000"/>
+                </a:schemeClr>
+              </a:solidFill>
+              <a:latin typeface="-apple-system"/>
+              <a:ea typeface="-apple-system"/>
+            </a:endParaRPr>
+          </a:p>
+          <a:p>
+            <a:pPr marL="0" indent="0">
+              <a:spcBef>
+                <a:spcPct val="0"/>
+              </a:spcBef>
+              <a:spcAft>
+                <a:spcPts val="1600"/>
+              </a:spcAft>
+            </a:pPr>
+            <a:r>
+              <a:rPr sz="1600" b="0" i="0">
+                <a:solidFill>
+                  <a:schemeClr val="bg2">
+                    <a:lumMod val="10000"/>
+                  </a:schemeClr>
+                </a:solidFill>
+                <a:latin typeface="-apple-system"/>
+                <a:ea typeface="-apple-system"/>
+              </a:rPr>
+              <a:t>End-to-End Latency: ~700ms – 1.5 seconds</a:t>
+            </a:r>
+            <a:endParaRPr sz="1600" b="0" i="0">
+              <a:solidFill>
+                <a:schemeClr val="bg2">
+                  <a:lumMod val="10000"/>
+                </a:schemeClr>
+              </a:solidFill>
+              <a:latin typeface="-apple-system"/>
+              <a:ea typeface="-apple-system"/>
+            </a:endParaRPr>
+          </a:p>
+        </p:txBody>
+      </p:sp>
+    </p:spTree>
+  </p:cSld>
+  <p:clrMapOvr>
+    <a:masterClrMapping/>
+  </p:clrMapOvr>
+</p:sld>
+</file>
+
+<file path=ppt/slides/slide7.xml><?xml version="1.0" encoding="utf-8"?>
+<p:sld xmlns:a="http://schemas.openxmlformats.org/drawingml/2006/main" xmlns:r="http://schemas.openxmlformats.org/officeDocument/2006/relationships" xmlns:p="http://schemas.openxmlformats.org/presentationml/2006/main">
+  <p:cSld>
+    <p:spTree>
+      <p:nvGrpSpPr>
+        <p:cNvPr id="1" name=""/>
+        <p:cNvGrpSpPr/>
+        <p:nvPr/>
+      </p:nvGrpSpPr>
+      <p:grpSpPr/>
+      <p:graphicFrame>
+        <p:nvGraphicFramePr>
+          <p:cNvPr id="6" name="Content Placeholder 5"/>
+          <p:cNvGraphicFramePr/>
+          <p:nvPr>
+            <p:ph idx="1"/>
+          </p:nvPr>
+        </p:nvGraphicFramePr>
+        <p:xfrm>
+          <a:off x="4455269" y="603666"/>
+          <a:ext cx="7811770" cy="3093720"/>
+        </p:xfrm>
+        <a:graphic>
+          <a:graphicData uri="http://schemas.openxmlformats.org/drawingml/2006/table">
+            <a:tbl>
+              <a:tblPr firstRow="1" bandRow="1">
+                <a:tableStyleId>{5C22544A-7EE6-4342-B048-85BDC9FD1C3A}</a:tableStyleId>
+              </a:tblPr>
+              <a:tblGrid>
+                <a:gridCol w="2352675"/>
+                <a:gridCol w="2352675"/>
+                <a:gridCol w="3106420"/>
+              </a:tblGrid>
+              <a:tr h="381000">
+                <a:tc>
+                  <a:txBody>
+                    <a:bodyPr/>
+                    <a:p>
+                      <a:pPr>
+                        <a:buNone/>
+                      </a:pPr>
+                      <a:r>
+                        <a:rPr lang="en-US" altLang="en-US"/>
+                        <a:t>Challenge</a:t>
+                      </a:r>
+                      <a:endParaRPr lang="en-US" altLang="en-US"/>
+                    </a:p>
+                  </a:txBody>
+                  <a:tcPr/>
+                </a:tc>
+                <a:tc>
+                  <a:txBody>
+                    <a:bodyPr/>
+                    <a:p>
+                      <a:pPr>
+                        <a:buNone/>
+                      </a:pPr>
+                      <a:r>
+                        <a:rPr lang="en-US" altLang="en-US"/>
+                        <a:t>Root Cause</a:t>
+                      </a:r>
+                      <a:endParaRPr lang="en-US" altLang="en-US"/>
+                    </a:p>
+                  </a:txBody>
+                  <a:tcPr/>
+                </a:tc>
+                <a:tc>
+                  <a:txBody>
+                    <a:bodyPr/>
+                    <a:p>
+                      <a:pPr>
+                        <a:buNone/>
+                      </a:pPr>
+                      <a:r>
+                        <a:rPr lang="en-US" altLang="en-US"/>
+                        <a:t>Solution</a:t>
+                      </a:r>
+                      <a:endParaRPr lang="en-US" altLang="en-US"/>
+                    </a:p>
+                  </a:txBody>
+                  <a:tcPr/>
+                </a:tc>
+              </a:tr>
+              <a:tr h="381000">
+                <a:tc>
+                  <a:txBody>
+                    <a:bodyPr/>
+                    <a:p>
+                      <a:pPr>
+                        <a:buNone/>
+                      </a:pPr>
+                      <a:r>
+                        <a:rPr lang="en-US" altLang="en-US"/>
+                        <a:t>Agent silent on cold start</a:t>
+                      </a:r>
+                      <a:endParaRPr lang="en-US" altLang="en-US"/>
+                    </a:p>
+                  </a:txBody>
+                  <a:tcPr/>
+                </a:tc>
+                <a:tc>
+                  <a:txBody>
+                    <a:bodyPr/>
+                    <a:p>
+                      <a:pPr>
+                        <a:buNone/>
+                      </a:pPr>
+                      <a:r>
+                        <a:rPr lang="en-US" altLang="en-US"/>
+                        <a:t>MultilingualModel imports Transformers (&gt;60s) in subprocess</a:t>
+                      </a:r>
+                      <a:endParaRPr lang="en-US" altLang="en-US"/>
+                    </a:p>
+                  </a:txBody>
+                  <a:tcPr/>
+                </a:tc>
+                <a:tc>
+                  <a:txBody>
+                    <a:bodyPr/>
+                    <a:p>
+                      <a:pPr>
+                        <a:buNone/>
+                      </a:pPr>
+                      <a:r>
+                        <a:rPr lang="en-US" altLang="en-US"/>
+                        <a:t>Removed; Silero VAD handles turn detection</a:t>
+                      </a:r>
+                      <a:endParaRPr lang="en-US" altLang="en-US"/>
+                    </a:p>
+                  </a:txBody>
+                  <a:tcPr/>
+                </a:tc>
+              </a:tr>
+              <a:tr h="381000">
+                <a:tc>
+                  <a:txBody>
+                    <a:bodyPr/>
+                    <a:p>
+                      <a:pPr>
+                        <a:buNone/>
+                      </a:pPr>
+                      <a:r>
+                        <a:rPr lang="en-US" altLang="en-US"/>
+                        <a:t>Agent blocked for 60 seconds</a:t>
+                      </a:r>
+                      <a:endParaRPr lang="en-US" altLang="en-US"/>
+                    </a:p>
+                  </a:txBody>
+                  <a:tcPr/>
+                </a:tc>
+                <a:tc>
+                  <a:txBody>
+                    <a:bodyPr/>
+                    <a:p>
+                      <a:pPr>
+                        <a:buNone/>
+                      </a:pPr>
+                      <a:r>
+                        <a:rPr lang="en-US" altLang="en-US"/>
+                        <a:t>silero.VAD.load() called inside async entrypoint</a:t>
+                      </a:r>
+                      <a:endParaRPr lang="en-US" altLang="en-US"/>
+                    </a:p>
+                  </a:txBody>
+                  <a:tcPr/>
+                </a:tc>
+                <a:tc>
+                  <a:txBody>
+                    <a:bodyPr/>
+                    <a:p>
+                      <a:pPr>
+                        <a:buNone/>
+                      </a:pPr>
+                      <a:r>
+                        <a:rPr lang="en-US" altLang="en-US"/>
+                        <a:t>prewarm_fnc — pre-loads before accepting jobs</a:t>
+                      </a:r>
+                      <a:endParaRPr lang="en-US" altLang="en-US"/>
+                    </a:p>
+                  </a:txBody>
+                  <a:tcPr/>
+                </a:tc>
+              </a:tr>
+              <a:tr h="381000">
+                <a:tc>
+                  <a:txBody>
+                    <a:bodyPr/>
+                    <a:p>
+                      <a:pPr>
+                        <a:buNone/>
+                      </a:pPr>
+                      <a:r>
+                        <a:rPr lang="en-US" altLang="en-US"/>
+                        <a:t>Native dylib blocking event loop</a:t>
+                      </a:r>
+                      <a:endParaRPr lang="en-US" altLang="en-US"/>
+                    </a:p>
+                  </a:txBody>
+                  <a:tcPr/>
+                </a:tc>
+                <a:tc>
+                  <a:txBody>
+                    <a:bodyPr/>
+                    <a:p>
+                      <a:pPr>
+                        <a:buNone/>
+                      </a:pPr>
+                      <a:r>
+                        <a:rPr lang="en-US" altLang="en-US"/>
+                        <a:t>noise_cancellation.BVC() loads C++ dylib synchronously</a:t>
+                      </a:r>
+                      <a:endParaRPr lang="en-US" altLang="en-US"/>
+                    </a:p>
+                  </a:txBody>
+                  <a:tcPr/>
+                </a:tc>
+                <a:tc>
+                  <a:txBody>
+                    <a:bodyPr/>
+                    <a:p>
+                      <a:pPr>
+                        <a:buNone/>
+                      </a:pPr>
+                      <a:r>
+                        <a:rPr lang="en-US" altLang="en-US"/>
+                        <a:t>Removed BVC; session.start() now completes in 16ms</a:t>
+                      </a:r>
+                      <a:endParaRPr lang="en-US" altLang="en-US"/>
+                    </a:p>
+                  </a:txBody>
+                  <a:tcPr/>
+                </a:tc>
+              </a:tr>
+              <a:tr h="381000">
+                <a:tc>
+                  <a:txBody>
+                    <a:bodyPr/>
+                    <a:p>
+                      <a:pPr>
+                        <a:buNone/>
+                      </a:pPr>
+                      <a:r>
+                        <a:rPr lang="en-US" altLang="en-US"/>
+                        <a:t>Port conflict on restart</a:t>
+                      </a:r>
+                      <a:endParaRPr lang="en-US" altLang="en-US"/>
+                    </a:p>
+                  </a:txBody>
+                  <a:tcPr/>
+                </a:tc>
+                <a:tc>
+                  <a:txBody>
+                    <a:bodyPr/>
+                    <a:p>
+                      <a:pPr>
+                        <a:buNone/>
+                      </a:pPr>
+                      <a:r>
+                        <a:rPr lang="en-US" altLang="en-US"/>
+                        <a:t>Orphaned job subprocesses held port 8081</a:t>
+                      </a:r>
+                      <a:endParaRPr lang="en-US" altLang="en-US"/>
+                    </a:p>
+                  </a:txBody>
+                  <a:tcPr/>
+                </a:tc>
+                <a:tc>
+                  <a:txBody>
+                    <a:bodyPr/>
+                    <a:p>
+                      <a:pPr>
+                        <a:buNone/>
+                      </a:pPr>
+                      <a:r>
+                        <a:rPr lang="en-US" altLang="en-US"/>
+                        <a:t>stop.sh kills full process tree + waits for port release</a:t>
+                      </a:r>
+                      <a:endParaRPr lang="en-US" altLang="en-US"/>
+                    </a:p>
+                  </a:txBody>
+                  <a:tcPr/>
+                </a:tc>
+              </a:tr>
+              <a:tr h="381000">
+                <a:tc>
+                  <a:txBody>
+                    <a:bodyPr/>
+                    <a:p>
+                      <a:pPr>
+                        <a:buNone/>
+                      </a:pPr>
+                      <a:r>
+                        <a:rPr lang="en-US" altLang="en-US"/>
+                        <a:t>OpenAI rate limit (429)</a:t>
+                      </a:r>
+                      <a:endParaRPr lang="en-US" altLang="en-US"/>
+                    </a:p>
+                  </a:txBody>
+                  <a:tcPr/>
+                </a:tc>
+                <a:tc>
+                  <a:txBody>
+                    <a:bodyPr/>
+                    <a:p>
+                      <a:pPr>
+                        <a:buNone/>
+                      </a:pPr>
+                      <a:r>
+                        <a:rPr lang="en-US" altLang="en-US"/>
+                        <a:t>GPT-4.1 capped at 30K TPM</a:t>
+                      </a:r>
+                      <a:endParaRPr lang="en-US" altLang="en-US"/>
+                    </a:p>
+                  </a:txBody>
+                  <a:tcPr/>
+                </a:tc>
+                <a:tc>
+                  <a:txBody>
+                    <a:bodyPr/>
+                    <a:p>
+                      <a:pPr>
+                        <a:buNone/>
+                      </a:pPr>
+                      <a:r>
+                        <a:rPr lang="en-US" altLang="en-US"/>
+                        <a:t>Switched to gpt-4.1-mini (200K TPM)</a:t>
+                      </a:r>
+                      <a:endParaRPr lang="en-US" altLang="en-US"/>
+                    </a:p>
+                  </a:txBody>
+                  <a:tcPr/>
+                </a:tc>
+              </a:tr>
+            </a:tbl>
+          </a:graphicData>
+        </a:graphic>
+      </p:graphicFrame>
+      <p:sp>
+        <p:nvSpPr>
+          <p:cNvPr id="5" name="Title 4"/>
+          <p:cNvSpPr>
+            <a:spLocks noGrp="1"/>
+          </p:cNvSpPr>
+          <p:nvPr>
+            <p:ph type="title"/>
+          </p:nvPr>
+        </p:nvSpPr>
+        <p:spPr>
+          <a:xfrm>
+            <a:off x="635" y="2049780"/>
+            <a:ext cx="4092575" cy="2562225"/>
+          </a:xfrm>
+        </p:spPr>
+        <p:txBody>
+          <a:bodyPr/>
+          <a:p>
+            <a:r>
+              <a:rPr lang="en-US" altLang="en-US"/>
+              <a:t>Challenges &amp; Solutions</a:t>
+            </a:r>
+            <a:endParaRPr lang="en-US" altLang="en-US"/>
+          </a:p>
+        </p:txBody>
+      </p:sp>
+    </p:spTree>
+  </p:cSld>
+  <p:clrMapOvr>
+    <a:masterClrMapping/>
+  </p:clrMapOvr>
+</p:sld>
+</file>
+
+<file path=ppt/slides/slide8.xml><?xml version="1.0" encoding="utf-8"?>
+<p:sld xmlns:a="http://schemas.openxmlformats.org/drawingml/2006/main" xmlns:r="http://schemas.openxmlformats.org/officeDocument/2006/relationships" xmlns:p="http://schemas.openxmlformats.org/presentationml/2006/main">
+  <p:cSld>
+    <p:spTree>
+      <p:nvGrpSpPr>
+        <p:cNvPr id="1" name=""/>
+        <p:cNvGrpSpPr/>
+        <p:nvPr/>
+      </p:nvGrpSpPr>
+      <p:grpSpPr/>
+      <p:graphicFrame>
+        <p:nvGraphicFramePr>
+          <p:cNvPr id="6" name="Content Placeholder 5"/>
+          <p:cNvGraphicFramePr/>
+          <p:nvPr>
+            <p:ph idx="1"/>
+          </p:nvPr>
+        </p:nvGraphicFramePr>
+        <p:xfrm>
+          <a:off x="4455269" y="603666"/>
+          <a:ext cx="7811770" cy="3093720"/>
+        </p:xfrm>
+        <a:graphic>
+          <a:graphicData uri="http://schemas.openxmlformats.org/drawingml/2006/table">
+            <a:tbl>
+              <a:tblPr firstRow="1" bandRow="1">
+                <a:tableStyleId>{5C22544A-7EE6-4342-B048-85BDC9FD1C3A}</a:tableStyleId>
+              </a:tblPr>
+              <a:tblGrid>
+                <a:gridCol w="2352675"/>
+                <a:gridCol w="2352675"/>
+                <a:gridCol w="3106420"/>
+              </a:tblGrid>
+              <a:tr h="381000">
+                <a:tc>
+                  <a:txBody>
+                    <a:bodyPr/>
+                    <a:p>
+                      <a:pPr>
+                        <a:buNone/>
+                      </a:pPr>
+                      <a:r>
+                        <a:rPr lang="en-US" altLang="en-US"/>
+                        <a:t>Challenge</a:t>
+                      </a:r>
+                      <a:endParaRPr lang="en-US" altLang="en-US"/>
+                    </a:p>
+                  </a:txBody>
+                  <a:tcPr/>
+                </a:tc>
+                <a:tc>
+                  <a:txBody>
+                    <a:bodyPr/>
+                    <a:p>
+                      <a:pPr>
+                        <a:buNone/>
+                      </a:pPr>
+                      <a:r>
+                        <a:rPr lang="en-US" altLang="en-US"/>
+                        <a:t>Root Cause</a:t>
+                      </a:r>
+                      <a:endParaRPr lang="en-US" altLang="en-US"/>
+                    </a:p>
+                  </a:txBody>
+                  <a:tcPr/>
+                </a:tc>
+                <a:tc>
+                  <a:txBody>
+                    <a:bodyPr/>
+                    <a:p>
+                      <a:pPr>
+                        <a:buNone/>
+                      </a:pPr>
+                      <a:r>
+                        <a:rPr lang="en-US" altLang="en-US"/>
+                        <a:t>Solution</a:t>
+                      </a:r>
+                      <a:endParaRPr lang="en-US" altLang="en-US"/>
+                    </a:p>
+                  </a:txBody>
+                  <a:tcPr/>
+                </a:tc>
+              </a:tr>
+              <a:tr h="381000">
+                <a:tc>
+                  <a:txBody>
+                    <a:bodyPr/>
+                    <a:p>
+                      <a:pPr>
+                        <a:buNone/>
+                      </a:pPr>
+                      <a:r>
+                        <a:rPr lang="en-US" altLang="en-US"/>
+                        <a:t>Agent silent on cold start</a:t>
+                      </a:r>
+                      <a:endParaRPr lang="en-US" altLang="en-US"/>
+                    </a:p>
+                  </a:txBody>
+                  <a:tcPr/>
+                </a:tc>
+                <a:tc>
+                  <a:txBody>
+                    <a:bodyPr/>
+                    <a:p>
+                      <a:pPr>
+                        <a:buNone/>
+                      </a:pPr>
+                      <a:r>
+                        <a:rPr lang="en-US" altLang="en-US"/>
+                        <a:t>MultilingualModel imports Transformers (&gt;60s) in subprocess</a:t>
+                      </a:r>
+                      <a:endParaRPr lang="en-US" altLang="en-US"/>
+                    </a:p>
+                  </a:txBody>
+                  <a:tcPr/>
+                </a:tc>
+                <a:tc>
+                  <a:txBody>
+                    <a:bodyPr/>
+                    <a:p>
+                      <a:pPr>
+                        <a:buNone/>
+                      </a:pPr>
+                      <a:r>
+                        <a:rPr lang="en-US" altLang="en-US"/>
+                        <a:t>Removed; Silero VAD handles turn detection</a:t>
+                      </a:r>
+                      <a:endParaRPr lang="en-US" altLang="en-US"/>
+                    </a:p>
+                  </a:txBody>
+                  <a:tcPr/>
+                </a:tc>
+              </a:tr>
+              <a:tr h="381000">
+                <a:tc>
+                  <a:txBody>
+                    <a:bodyPr/>
+                    <a:p>
+                      <a:pPr>
+                        <a:buNone/>
+                      </a:pPr>
+                      <a:r>
+                        <a:rPr lang="en-US" altLang="en-US"/>
+                        <a:t>Agent blocked for 60 seconds</a:t>
+                      </a:r>
+                      <a:endParaRPr lang="en-US" altLang="en-US"/>
+                    </a:p>
+                  </a:txBody>
+                  <a:tcPr/>
+                </a:tc>
+                <a:tc>
+                  <a:txBody>
+                    <a:bodyPr/>
+                    <a:p>
+                      <a:pPr>
+                        <a:buNone/>
+                      </a:pPr>
+                      <a:r>
+                        <a:rPr lang="en-US" altLang="en-US"/>
+                        <a:t>silero.VAD.load() called inside async entrypoint</a:t>
+                      </a:r>
+                      <a:endParaRPr lang="en-US" altLang="en-US"/>
+                    </a:p>
+                  </a:txBody>
+                  <a:tcPr/>
+                </a:tc>
+                <a:tc>
+                  <a:txBody>
+                    <a:bodyPr/>
+                    <a:p>
+                      <a:pPr>
+                        <a:buNone/>
+                      </a:pPr>
+                      <a:r>
+                        <a:rPr lang="en-US" altLang="en-US"/>
+                        <a:t>prewarm_fnc — pre-loads before accepting jobs</a:t>
+                      </a:r>
+                      <a:endParaRPr lang="en-US" altLang="en-US"/>
+                    </a:p>
+                  </a:txBody>
+                  <a:tcPr/>
+                </a:tc>
+              </a:tr>
+              <a:tr h="381000">
+                <a:tc>
+                  <a:txBody>
+                    <a:bodyPr/>
+                    <a:p>
+                      <a:pPr>
+                        <a:buNone/>
+                      </a:pPr>
+                      <a:r>
+                        <a:rPr lang="en-US" altLang="en-US"/>
+                        <a:t>Native dylib blocking event loop</a:t>
+                      </a:r>
+                      <a:endParaRPr lang="en-US" altLang="en-US"/>
+                    </a:p>
+                  </a:txBody>
+                  <a:tcPr/>
+                </a:tc>
+                <a:tc>
+                  <a:txBody>
+                    <a:bodyPr/>
+                    <a:p>
+                      <a:pPr>
+                        <a:buNone/>
+                      </a:pPr>
+                      <a:r>
+                        <a:rPr lang="en-US" altLang="en-US"/>
+                        <a:t>noise_cancellation.BVC() loads C++ dylib synchronously</a:t>
+                      </a:r>
+                      <a:endParaRPr lang="en-US" altLang="en-US"/>
+                    </a:p>
+                  </a:txBody>
+                  <a:tcPr/>
+                </a:tc>
+                <a:tc>
+                  <a:txBody>
+                    <a:bodyPr/>
+                    <a:p>
+                      <a:pPr>
+                        <a:buNone/>
+                      </a:pPr>
+                      <a:r>
+                        <a:rPr lang="en-US" altLang="en-US"/>
+                        <a:t>Removed BVC; session.start() now completes in 16ms</a:t>
+                      </a:r>
+                      <a:endParaRPr lang="en-US" altLang="en-US"/>
+                    </a:p>
+                  </a:txBody>
+                  <a:tcPr/>
+                </a:tc>
+              </a:tr>
+              <a:tr h="381000">
+                <a:tc>
+                  <a:txBody>
+                    <a:bodyPr/>
+                    <a:p>
+                      <a:pPr>
+                        <a:buNone/>
+                      </a:pPr>
+                      <a:r>
+                        <a:rPr lang="en-US" altLang="en-US"/>
+                        <a:t>Port conflict on restart</a:t>
+                      </a:r>
+                      <a:endParaRPr lang="en-US" altLang="en-US"/>
+                    </a:p>
+                  </a:txBody>
+                  <a:tcPr/>
+                </a:tc>
+                <a:tc>
+                  <a:txBody>
+                    <a:bodyPr/>
+                    <a:p>
+                      <a:pPr>
+                        <a:buNone/>
+                      </a:pPr>
+                      <a:r>
+                        <a:rPr lang="en-US" altLang="en-US"/>
+                        <a:t>Orphaned job subprocesses held port 8081</a:t>
+                      </a:r>
+                      <a:endParaRPr lang="en-US" altLang="en-US"/>
+                    </a:p>
+                  </a:txBody>
+                  <a:tcPr/>
+                </a:tc>
+                <a:tc>
+                  <a:txBody>
+                    <a:bodyPr/>
+                    <a:p>
+                      <a:pPr>
+                        <a:buNone/>
+                      </a:pPr>
+                      <a:r>
+                        <a:rPr lang="en-US" altLang="en-US"/>
+                        <a:t>stop.sh kills full process tree + waits for port release</a:t>
+                      </a:r>
+                      <a:endParaRPr lang="en-US" altLang="en-US"/>
+                    </a:p>
+                  </a:txBody>
+                  <a:tcPr/>
+                </a:tc>
+              </a:tr>
+              <a:tr h="381000">
+                <a:tc>
+                  <a:txBody>
+                    <a:bodyPr/>
+                    <a:p>
+                      <a:pPr>
+                        <a:buNone/>
+                      </a:pPr>
+                      <a:r>
+                        <a:rPr lang="en-US" altLang="en-US"/>
+                        <a:t>OpenAI rate limit (429)</a:t>
+                      </a:r>
+                      <a:endParaRPr lang="en-US" altLang="en-US"/>
+                    </a:p>
+                  </a:txBody>
+                  <a:tcPr/>
+                </a:tc>
+                <a:tc>
+                  <a:txBody>
+                    <a:bodyPr/>
+                    <a:p>
+                      <a:pPr>
+                        <a:buNone/>
+                      </a:pPr>
+                      <a:r>
+                        <a:rPr lang="en-US" altLang="en-US"/>
+                        <a:t>GPT-4.1 capped at 30K TPM</a:t>
+                      </a:r>
+                      <a:endParaRPr lang="en-US" altLang="en-US"/>
+                    </a:p>
+                  </a:txBody>
+                  <a:tcPr/>
+                </a:tc>
+                <a:tc>
+                  <a:txBody>
+                    <a:bodyPr/>
+                    <a:p>
+                      <a:pPr>
+                        <a:buNone/>
+                      </a:pPr>
+                      <a:r>
+                        <a:rPr lang="en-US" altLang="en-US"/>
+                        <a:t>Switched to gpt-4.1-mini (200K TPM)</a:t>
+                      </a:r>
+                      <a:endParaRPr lang="en-US" altLang="en-US"/>
+                    </a:p>
+                  </a:txBody>
+                  <a:tcPr/>
+                </a:tc>
+              </a:tr>
+            </a:tbl>
+          </a:graphicData>
+        </a:graphic>
+      </p:graphicFrame>
+      <p:sp>
+        <p:nvSpPr>
+          <p:cNvPr id="5" name="Title 4"/>
+          <p:cNvSpPr>
+            <a:spLocks noGrp="1"/>
+          </p:cNvSpPr>
+          <p:nvPr>
+            <p:ph type="title"/>
+          </p:nvPr>
+        </p:nvSpPr>
+        <p:spPr>
+          <a:xfrm>
+            <a:off x="635" y="2049780"/>
+            <a:ext cx="4092575" cy="2562225"/>
+          </a:xfrm>
+        </p:spPr>
+        <p:txBody>
+          <a:bodyPr/>
+          <a:p>
+            <a:r>
+              <a:rPr lang="en-US" altLang="en-US"/>
+              <a:t>Challenges &amp; Solutions</a:t>
+            </a:r>
+            <a:endParaRPr lang="en-US" altLang="en-US"/>
+          </a:p>
+        </p:txBody>
+      </p:sp>
+    </p:spTree>
+  </p:cSld>
+  <p:clrMapOvr>
+    <a:masterClrMapping/>
+  </p:clrMapOvr>
+</p:sld>
+</file>
+
+<file path=ppt/slides/slide9.xml><?xml version="1.0" encoding="utf-8"?>
+<p:sld xmlns:a="http://schemas.openxmlformats.org/drawingml/2006/main" xmlns:r="http://schemas.openxmlformats.org/officeDocument/2006/relationships" xmlns:p="http://schemas.openxmlformats.org/presentationml/2006/main">
+  <p:cSld>
+    <p:spTree>
+      <p:nvGrpSpPr>
+        <p:cNvPr id="1" name=""/>
+        <p:cNvGrpSpPr/>
+        <p:nvPr/>
+      </p:nvGrpSpPr>
+      <p:grpSpPr/>
+      <p:sp>
+        <p:nvSpPr>
+          <p:cNvPr id="5" name="Title 4"/>
+          <p:cNvSpPr>
+            <a:spLocks noGrp="1"/>
+          </p:cNvSpPr>
+          <p:nvPr>
+            <p:ph type="title"/>
+          </p:nvPr>
+        </p:nvSpPr>
+        <p:spPr>
+          <a:xfrm>
+            <a:off x="635" y="2049780"/>
+            <a:ext cx="4092575" cy="2562225"/>
+          </a:xfrm>
+        </p:spPr>
+        <p:txBody>
+          <a:bodyPr/>
+          <a:p>
+            <a:r>
+              <a:rPr lang="en-US" altLang="en-US"/>
+              <a:t>Demo</a:t>
+            </a:r>
+            <a:br>
+              <a:rPr lang="en-US" altLang="en-US"/>
+            </a:br>
+            <a:endParaRPr lang="en-US" altLang="en-US"/>
+          </a:p>
+        </p:txBody>
+      </p:sp>
+      <p:sp>
+        <p:nvSpPr>
+          <p:cNvPr id="2" name="Content Placeholder 1"/>
+          <p:cNvSpPr/>
+          <p:nvPr>
+            <p:ph idx="1"/>
+          </p:nvPr>
+        </p:nvSpPr>
+        <p:spPr>
+          <a:xfrm>
+            <a:off x="4455160" y="136525"/>
+            <a:ext cx="7627620" cy="5877560"/>
+          </a:xfrm>
+        </p:spPr>
+        <p:txBody>
+          <a:bodyPr>
+            <a:normAutofit/>
+          </a:bodyPr>
+          <a:p>
+            <a:r>
+              <a:rPr lang="en-US" altLang="en-US" sz="1800"/>
+              <a:t>Scenario 1:</a:t>
+            </a:r>
+            <a:endParaRPr lang="en-US" altLang="en-US" sz="1800"/>
+          </a:p>
+          <a:p>
+            <a:pPr marL="0" indent="0">
+              <a:buNone/>
+            </a:pPr>
+            <a:r>
+              <a:rPr lang="en-US" altLang="en-US" sz="1800">
+                <a:sym typeface="+mn-ea"/>
+              </a:rPr>
+              <a:t>”</a:t>
+            </a:r>
+            <a:r>
+              <a:rPr lang="en-US" altLang="en-US" sz="1800"/>
+              <a:t> Hi, what's the status of my order ORD-1003?"</a:t>
+            </a:r>
+            <a:endParaRPr lang="en-US" altLang="en-US" sz="1800"/>
+          </a:p>
+          <a:p>
+            <a:pPr marL="0" indent="0">
+              <a:buNone/>
+            </a:pPr>
+            <a:r>
+              <a:rPr lang="en-US" altLang="en-US" sz="1800"/>
+              <a:t>→ Aria calls get_order_status, returns: "Your order for [items] has been shipped. Expected delivery by [date]. Tracking number: [TRK-xxx]."</a:t>
+            </a:r>
+            <a:endParaRPr lang="en-US" altLang="en-US" sz="1800"/>
+          </a:p>
+          <a:p>
+            <a:endParaRPr lang="en-US" altLang="en-US" sz="1800"/>
+          </a:p>
+          <a:p>
+            <a:r>
+              <a:rPr lang="en-US" altLang="en-US" sz="1800"/>
+              <a:t>Scenario 2:</a:t>
+            </a:r>
+            <a:endParaRPr lang="en-US" altLang="en-US" sz="1800"/>
+          </a:p>
+          <a:p>
+            <a:pPr marL="0" indent="0">
+              <a:buNone/>
+            </a:pPr>
+            <a:r>
+              <a:rPr lang="en-US" altLang="en-US" sz="1800"/>
+              <a:t>"Do you have Sony headphones? What's the price?"</a:t>
+            </a:r>
+            <a:endParaRPr lang="en-US" altLang="en-US" sz="1800"/>
+          </a:p>
+          <a:p>
+            <a:pPr marL="0" indent="0">
+              <a:buNone/>
+            </a:pPr>
+            <a:r>
+              <a:rPr lang="en-US" altLang="en-US" sz="1800"/>
+              <a:t>→ Aria calls lookup_product, returns price, rating, stock status, top 3 features.</a:t>
+            </a:r>
+            <a:endParaRPr lang="en-US" altLang="en-US" sz="1800"/>
+          </a:p>
+          <a:p>
+            <a:pPr marL="0" indent="0">
+              <a:buNone/>
+            </a:pPr>
+            <a:endParaRPr lang="en-US" altLang="en-US" sz="1800"/>
+          </a:p>
+          <a:p>
+            <a:pPr marL="0" indent="0">
+              <a:buNone/>
+            </a:pPr>
+            <a:r>
+              <a:rPr lang="en-US" altLang="en-US" sz="1800"/>
+              <a:t>Scenario 3:</a:t>
+            </a:r>
+            <a:endParaRPr lang="en-US" altLang="en-US" sz="1800"/>
+          </a:p>
+          <a:p>
+            <a:pPr marL="0" indent="0">
+              <a:buNone/>
+            </a:pPr>
+            <a:r>
+              <a:rPr lang="en-US" altLang="en-US" sz="1800"/>
+              <a:t>"I want to return a jacket I bought last week."</a:t>
+            </a:r>
+            <a:endParaRPr lang="en-US" altLang="en-US" sz="1800"/>
+          </a:p>
+          <a:p>
+            <a:pPr marL="0" indent="0">
+              <a:buNone/>
+            </a:pPr>
+            <a:r>
+              <a:rPr lang="en-US" altLang="en-US" sz="1800"/>
+              <a:t>→ Aria calls get_returns_policy, returns the Clothing return window (30 days) and steps to initiate.</a:t>
+            </a:r>
+            <a:endParaRPr lang="en-US" altLang="en-US" sz="1800"/>
+          </a:p>
+        </p:txBody>
+      </p:sp>
+    </p:spTree>
+  </p:cSld>
+  <p:clrMapOvr>
+    <a:masterClrMapping/>
+  </p:clrMapOvr>
+</p:sld>
+</file>
+
+<file path=ppt/tags/tag1.xml><?xml version="1.0" encoding="utf-8"?>
+<p:tagLst xmlns:p="http://schemas.openxmlformats.org/presentationml/2006/main">
+  <p:tag name="wpp_generatetext" val="1"/>
+</p:tagLst>
+</file>
+
+<file path=ppt/tags/tag2.xml><?xml version="1.0" encoding="utf-8"?>
+<p:tagLst xmlns:p="http://schemas.openxmlformats.org/presentationml/2006/main">
+  <p:tag name="TABLE_ENDDRAG_ORIGIN_RECT" val="601*301"/>
+  <p:tag name="TABLE_ENDDRAG_RECT" val="350*45*601*301"/>
+</p:tagLst>
 </file>
 
 <file path=ppt/theme/theme1.xml><?xml version="1.0" encoding="utf-8"?>
@@ -5499,7 +8861,7 @@
     </a:clrScheme>
     <a:fontScheme name="Office Theme">
       <a:majorFont>
-        <a:latin typeface="Calibri Light" panose="020F0302020204030204"/>
+        <a:latin typeface="Calibri Light"/>
         <a:ea typeface=""/>
         <a:cs typeface=""/>
         <a:font script="Jpan" typeface="游ゴシック Light"/>
@@ -5534,7 +8896,7 @@
         <a:font script="Geor" typeface="Sylfaen"/>
       </a:majorFont>
       <a:minorFont>
-        <a:latin typeface="Calibri" panose="020F0502020204030204"/>
+        <a:latin typeface="Calibri"/>
         <a:ea typeface=""/>
         <a:cs typeface=""/>
         <a:font script="Jpan" typeface="游ゴシック"/>
@@ -5707,8 +9069,6 @@
       </a:bgFillStyleLst>
     </a:fmtScheme>
   </a:themeElements>
-  <a:objectDefaults/>
-  <a:extraClrSchemeLst/>
   <a:extLst>
     <a:ext uri="{05A4C25C-085E-4340-85A3-A5531E510DB2}">
       <thm15:themeFamily xmlns:thm15="http://schemas.microsoft.com/office/thememl/2012/main" name="Office Theme" id="{62F939B6-93AF-4DB8-9C6B-D6C7DFDC589F}" vid="{4A3C46E8-61CC-4603-A589-7422A47A8E4A}"/>
@@ -5760,7 +9120,7 @@
     </a:clrScheme>
     <a:fontScheme name="Office">
       <a:majorFont>
-        <a:latin typeface="Calibri Light" panose="020F0302020204030204"/>
+        <a:latin typeface="Calibri Light"/>
         <a:ea typeface=""/>
         <a:cs typeface=""/>
         <a:font script="Jpan" typeface="游ゴシック Light"/>
@@ -5793,26 +9153,9 @@
         <a:font script="Viet" typeface="Times New Roman"/>
         <a:font script="Uigh" typeface="Microsoft Uighur"/>
         <a:font script="Geor" typeface="Sylfaen"/>
-        <a:font script="Armn" typeface="Arial"/>
-        <a:font script="Bugi" typeface="Leelawadee UI"/>
-        <a:font script="Bopo" typeface="Microsoft JhengHei"/>
-        <a:font script="Java" typeface="Javanese Text"/>
-        <a:font script="Lisu" typeface="Segoe UI"/>
-        <a:font script="Mymr" typeface="Myanmar Text"/>
-        <a:font script="Nkoo" typeface="Ebrima"/>
-        <a:font script="Olck" typeface="Nirmala UI"/>
-        <a:font script="Osma" typeface="Ebrima"/>
-        <a:font script="Phag" typeface="Phagspa"/>
-        <a:font script="Syrn" typeface="Estrangelo Edessa"/>
-        <a:font script="Syrj" typeface="Estrangelo Edessa"/>
-        <a:font script="Syre" typeface="Estrangelo Edessa"/>
-        <a:font script="Sora" typeface="Nirmala UI"/>
-        <a:font script="Tale" typeface="Microsoft Tai Le"/>
-        <a:font script="Talu" typeface="Microsoft New Tai Lue"/>
-        <a:font script="Tfng" typeface="Ebrima"/>
       </a:majorFont>
       <a:minorFont>
-        <a:latin typeface="Calibri" panose="020F0502020204030204"/>
+        <a:latin typeface="Calibri"/>
         <a:ea typeface=""/>
         <a:cs typeface=""/>
         <a:font script="Jpan" typeface="游ゴシック"/>
@@ -5845,23 +9188,6 @@
         <a:font script="Viet" typeface="Arial"/>
         <a:font script="Uigh" typeface="Microsoft Uighur"/>
         <a:font script="Geor" typeface="Sylfaen"/>
-        <a:font script="Armn" typeface="Arial"/>
-        <a:font script="Bugi" typeface="Leelawadee UI"/>
-        <a:font script="Bopo" typeface="Microsoft JhengHei"/>
-        <a:font script="Java" typeface="Javanese Text"/>
-        <a:font script="Lisu" typeface="Segoe UI"/>
-        <a:font script="Mymr" typeface="Myanmar Text"/>
-        <a:font script="Nkoo" typeface="Ebrima"/>
-        <a:font script="Olck" typeface="Nirmala UI"/>
-        <a:font script="Osma" typeface="Ebrima"/>
-        <a:font script="Phag" typeface="Phagspa"/>
-        <a:font script="Syrn" typeface="Estrangelo Edessa"/>
-        <a:font script="Syrj" typeface="Estrangelo Edessa"/>
-        <a:font script="Syre" typeface="Estrangelo Edessa"/>
-        <a:font script="Sora" typeface="Nirmala UI"/>
-        <a:font script="Tale" typeface="Microsoft Tai Le"/>
-        <a:font script="Talu" typeface="Microsoft New Tai Lue"/>
-        <a:font script="Tfng" typeface="Ebrima"/>
       </a:minorFont>
     </a:fontScheme>
     <a:fmtScheme name="Office">
@@ -6002,8 +9328,6 @@
       </a:bgFillStyleLst>
     </a:fmtScheme>
   </a:themeElements>
-  <a:objectDefaults/>
-  <a:extraClrSchemeLst/>
   <a:extLst>
     <a:ext uri="{05A4C25C-085E-4340-85A3-A5531E510DB2}">
       <thm15:themeFamily xmlns:thm15="http://schemas.microsoft.com/office/thememl/2012/main" name="Office Theme" id="{62F939B6-93AF-4DB8-9C6B-D6C7DFDC589F}" vid="{4A3C46E8-61CC-4603-A589-7422A47A8E4A}"/>

--- a/Capstone PPT Template.pptx
+++ b/Capstone PPT Template.pptx
@@ -5,7 +5,7 @@
     <p:sldMasterId id="2147483648" r:id="rId1"/>
   </p:sldMasterIdLst>
   <p:notesMasterIdLst>
-    <p:notesMasterId r:id="rId14"/>
+    <p:notesMasterId r:id="rId15"/>
   </p:notesMasterIdLst>
   <p:sldIdLst>
     <p:sldId id="256" r:id="rId3"/>
@@ -15,11 +15,11 @@
     <p:sldId id="712" r:id="rId7"/>
     <p:sldId id="716" r:id="rId8"/>
     <p:sldId id="717" r:id="rId9"/>
-    <p:sldId id="718" r:id="rId10"/>
-    <p:sldId id="719" r:id="rId11"/>
-    <p:sldId id="720" r:id="rId18"/>
-    <p:sldId id="711" r:id="rId12"/>
-    <p:sldId id="303" r:id="rId13"/>
+    <p:sldId id="719" r:id="rId10"/>
+    <p:sldId id="718" r:id="rId11"/>
+    <p:sldId id="721" r:id="rId12"/>
+    <p:sldId id="711" r:id="rId13"/>
+    <p:sldId id="303" r:id="rId14"/>
   </p:sldIdLst>
   <p:sldSz cx="12192000" cy="6858000"/>
   <p:notesSz cx="6858000" cy="9144000"/>
@@ -4796,6 +4796,223 @@
         <p:cNvGrpSpPr/>
         <p:nvPr/>
       </p:nvGrpSpPr>
+      <p:grpSpPr/>
+      <p:sp>
+        <p:nvSpPr>
+          <p:cNvPr id="2" name="Content Placeholder 1"/>
+          <p:cNvSpPr>
+            <a:spLocks noGrp="1"/>
+          </p:cNvSpPr>
+          <p:nvPr>
+            <p:ph idx="1"/>
+          </p:nvPr>
+        </p:nvSpPr>
+        <p:spPr>
+          <a:xfrm>
+            <a:off x="4455160" y="145415"/>
+            <a:ext cx="7058025" cy="5912485"/>
+          </a:xfrm>
+        </p:spPr>
+        <p:txBody>
+          <a:bodyPr>
+            <a:normAutofit lnSpcReduction="10000"/>
+          </a:bodyPr>
+          <a:p>
+            <a:r>
+              <a:rPr lang="en-US" sz="2000"/>
+              <a:t>Real Data Layer - </a:t>
+            </a:r>
+            <a:endParaRPr lang="en-US" sz="2000"/>
+          </a:p>
+          <a:p>
+            <a:pPr marL="800100" lvl="1" indent="-342900"/>
+            <a:r>
+              <a:rPr lang="en-US" altLang="en-US" sz="1600"/>
+              <a:t>PostgreSQL/Supabase — real orders, real products, real inventory</a:t>
+            </a:r>
+            <a:endParaRPr lang="en-US" altLang="en-US" sz="1600"/>
+          </a:p>
+          <a:p>
+            <a:pPr marL="800100" lvl="1" indent="-342900"/>
+            <a:r>
+              <a:rPr lang="en-US" altLang="en-US" sz="1600"/>
+              <a:t>E-Commerce API Integration</a:t>
+            </a:r>
+            <a:endParaRPr lang="en-US" altLang="en-US" sz="1600"/>
+          </a:p>
+          <a:p>
+            <a:pPr marL="800100" lvl="1" indent="-342900"/>
+            <a:r>
+              <a:rPr lang="en-US" altLang="en-US" sz="1600"/>
+              <a:t>User Authentication</a:t>
+            </a:r>
+            <a:endParaRPr lang="en-US" altLang="en-US" sz="1600"/>
+          </a:p>
+          <a:p>
+            <a:pPr marL="800100" lvl="1" indent="-342900"/>
+            <a:r>
+              <a:rPr lang="en-US" altLang="en-US" sz="1600"/>
+              <a:t>Order Ownership</a:t>
+            </a:r>
+            <a:endParaRPr lang="en-US" altLang="en-US" sz="1600"/>
+          </a:p>
+          <a:p>
+            <a:r>
+              <a:rPr lang="en-US" sz="2000"/>
+              <a:t>Richer Voice Capabilities - </a:t>
+            </a:r>
+            <a:endParaRPr lang="en-US" sz="2000"/>
+          </a:p>
+          <a:p>
+            <a:pPr lvl="1"/>
+            <a:r>
+              <a:rPr lang="en-US" altLang="en-US" sz="1600"/>
+              <a:t>Multilingual Support</a:t>
+            </a:r>
+            <a:endParaRPr lang="en-US" altLang="en-US" sz="1600"/>
+          </a:p>
+          <a:p>
+            <a:pPr lvl="1"/>
+            <a:r>
+              <a:rPr lang="en-US" altLang="en-US" sz="1600"/>
+              <a:t>Barge-In Support</a:t>
+            </a:r>
+            <a:endParaRPr lang="en-US" altLang="en-US" sz="1600"/>
+          </a:p>
+          <a:p>
+            <a:pPr lvl="1"/>
+            <a:r>
+              <a:rPr lang="en-US" altLang="en-US" sz="1600"/>
+              <a:t>Custom brand voice</a:t>
+            </a:r>
+            <a:endParaRPr lang="en-US" altLang="en-US" sz="1600"/>
+          </a:p>
+          <a:p>
+            <a:pPr lvl="0"/>
+            <a:r>
+              <a:rPr lang="en-US" sz="2000"/>
+              <a:t>Smarter AI Layer</a:t>
+            </a:r>
+            <a:endParaRPr lang="en-US" sz="2000"/>
+          </a:p>
+          <a:p>
+            <a:pPr lvl="1"/>
+            <a:r>
+              <a:rPr lang="en-US" altLang="en-US" sz="1600"/>
+              <a:t>Vector-based RAG</a:t>
+            </a:r>
+            <a:endParaRPr lang="en-US" altLang="en-US" sz="1600"/>
+          </a:p>
+          <a:p>
+            <a:pPr lvl="1"/>
+            <a:r>
+              <a:rPr lang="en-US" altLang="en-US" sz="1600"/>
+              <a:t>Dynamic FAQ</a:t>
+            </a:r>
+            <a:endParaRPr lang="en-US" altLang="en-US" sz="1600"/>
+          </a:p>
+          <a:p>
+            <a:pPr lvl="1"/>
+            <a:r>
+              <a:rPr lang="en-US" altLang="en-US" sz="1600"/>
+              <a:t>Personalised Recommendation</a:t>
+            </a:r>
+            <a:endParaRPr lang="en-US" altLang="en-US" sz="1600"/>
+          </a:p>
+          <a:p>
+            <a:pPr lvl="1"/>
+            <a:r>
+              <a:rPr lang="en-US" altLang="en-US" sz="1600"/>
+              <a:t>Sentiment Detection</a:t>
+            </a:r>
+            <a:endParaRPr lang="en-US" altLang="en-US" sz="1600"/>
+          </a:p>
+          <a:p>
+            <a:pPr lvl="0"/>
+            <a:r>
+              <a:rPr lang="en-US" sz="2000"/>
+              <a:t>New Channels</a:t>
+            </a:r>
+            <a:endParaRPr lang="en-US" sz="2000"/>
+          </a:p>
+          <a:p>
+            <a:pPr lvl="1"/>
+            <a:r>
+              <a:rPr lang="en-US" sz="2000"/>
+              <a:t>Whatsapp Voice</a:t>
+            </a:r>
+            <a:endParaRPr lang="en-US" sz="2000"/>
+          </a:p>
+          <a:p>
+            <a:pPr lvl="1"/>
+            <a:r>
+              <a:rPr lang="en-US" sz="2000"/>
+              <a:t>Phone</a:t>
+            </a:r>
+            <a:endParaRPr lang="en-US" sz="2000"/>
+          </a:p>
+          <a:p>
+            <a:pPr lvl="1"/>
+            <a:r>
+              <a:rPr lang="en-US" sz="2000"/>
+              <a:t>Mobile App</a:t>
+            </a:r>
+            <a:endParaRPr lang="en-US" sz="2000"/>
+          </a:p>
+          <a:p>
+            <a:pPr lvl="1"/>
+            <a:r>
+              <a:rPr lang="en-US" sz="2000"/>
+              <a:t>Push Notification</a:t>
+            </a:r>
+            <a:endParaRPr lang="en-US" sz="2000"/>
+          </a:p>
+        </p:txBody>
+      </p:sp>
+      <p:sp>
+        <p:nvSpPr>
+          <p:cNvPr id="3" name="Title 2"/>
+          <p:cNvSpPr>
+            <a:spLocks noGrp="1"/>
+          </p:cNvSpPr>
+          <p:nvPr>
+            <p:ph type="title"/>
+          </p:nvPr>
+        </p:nvSpPr>
+        <p:spPr>
+          <a:xfrm>
+            <a:off x="0" y="2049780"/>
+            <a:ext cx="4088765" cy="2562225"/>
+          </a:xfrm>
+        </p:spPr>
+        <p:txBody>
+          <a:bodyPr/>
+          <a:p>
+            <a:r>
+              <a:rPr lang="en-US"/>
+              <a:t>Enhanacements</a:t>
+            </a:r>
+            <a:endParaRPr lang="en-US"/>
+          </a:p>
+        </p:txBody>
+      </p:sp>
+    </p:spTree>
+  </p:cSld>
+  <p:clrMapOvr>
+    <a:masterClrMapping/>
+  </p:clrMapOvr>
+</p:sld>
+</file>
+
+<file path=ppt/slides/slide11.xml><?xml version="1.0" encoding="utf-8"?>
+<p:sld xmlns:a="http://schemas.openxmlformats.org/drawingml/2006/main" xmlns:r="http://schemas.openxmlformats.org/officeDocument/2006/relationships" xmlns:p="http://schemas.openxmlformats.org/presentationml/2006/main">
+  <p:cSld>
+    <p:spTree>
+      <p:nvGrpSpPr>
+        <p:cNvPr id="1" name=""/>
+        <p:cNvGrpSpPr/>
+        <p:nvPr/>
+      </p:nvGrpSpPr>
       <p:grpSpPr>
         <a:xfrm>
           <a:off x="0" y="0"/>
@@ -4840,7 +5057,7 @@
 </p:sld>
 </file>
 
-<file path=ppt/slides/slide11.xml><?xml version="1.0" encoding="utf-8"?>
+<file path=ppt/slides/slide12.xml><?xml version="1.0" encoding="utf-8"?>
 <p:sld xmlns:a="http://schemas.openxmlformats.org/drawingml/2006/main" xmlns:r="http://schemas.openxmlformats.org/officeDocument/2006/relationships" xmlns:p="http://schemas.openxmlformats.org/presentationml/2006/main">
   <p:cSld>
     <p:spTree>
@@ -4906,861 +5123,6 @@
             <a:endParaRPr lang="en-IN" sz="6600" b="1" dirty="0">
               <a:latin typeface="Calibri" panose="020F0502020204030204" pitchFamily="34" charset="0"/>
             </a:endParaRPr>
-          </a:p>
-        </p:txBody>
-      </p:sp>
-    </p:spTree>
-  </p:cSld>
-  <p:clrMapOvr>
-    <a:masterClrMapping/>
-  </p:clrMapOvr>
-</p:sld>
-</file>
-
-<file path=ppt/slides/slide12.xml><?xml version="1.0" encoding="utf-8"?>
-<p:sld xmlns:a="http://schemas.openxmlformats.org/drawingml/2006/main" xmlns:p="http://schemas.openxmlformats.org/presentationml/2006/main" xmlns:r="http://schemas.openxmlformats.org/officeDocument/2006/relationships">
-  <p:cSld>
-    <p:bg>
-      <p:bgPr>
-        <a:solidFill>
-          <a:srgbClr val="F5F7FA"/>
-        </a:solidFill>
-        <a:effectLst/>
-      </p:bgPr>
-    </p:bg>
-    <p:spTree>
-      <p:nvGrpSpPr>
-        <p:cNvPr id="1" name=""/>
-        <p:cNvGrpSpPr/>
-        <p:nvPr/>
-      </p:nvGrpSpPr>
-      <p:grpSpPr/>
-      <p:sp>
-        <p:nvSpPr>
-          <p:cNvPr id="2" name="Title 1"/>
-          <p:cNvSpPr>
-            <a:spLocks noGrp="1"/>
-          </p:cNvSpPr>
-          <p:nvPr>
-            <p:ph type="title"/>
-          </p:nvPr>
-        </p:nvSpPr>
-        <p:spPr/>
-        <p:txBody>
-          <a:bodyPr/>
-          <a:lstStyle/>
-          <a:p/>
-        </p:txBody>
-      </p:sp>
-      <p:sp>
-        <p:nvSpPr>
-          <p:cNvPr id="3" name="Content Placeholder 2"/>
-          <p:cNvSpPr>
-            <a:spLocks noGrp="1"/>
-          </p:cNvSpPr>
-          <p:nvPr>
-            <p:ph idx="1"/>
-          </p:nvPr>
-        </p:nvSpPr>
-        <p:spPr/>
-        <p:txBody>
-          <a:bodyPr/>
-          <a:lstStyle/>
-          <a:p/>
-        </p:txBody>
-      </p:sp>
-      <p:sp>
-        <p:nvSpPr>
-          <p:cNvPr id="4" name="TextBox 3"/>
-          <p:cNvSpPr txBox="1"/>
-          <p:nvPr/>
-        </p:nvSpPr>
-        <p:spPr>
-          <a:xfrm>
-            <a:off x="502920" y="320040"/>
-            <a:ext cx="11155680" cy="640080"/>
-          </a:xfrm>
-          <a:prstGeom prst="rect">
-            <a:avLst/>
-          </a:prstGeom>
-          <a:noFill/>
-        </p:spPr>
-        <p:txBody>
-          <a:bodyPr wrap="none">
-            <a:spAutoFit/>
-          </a:bodyPr>
-          <a:lstStyle/>
-          <a:p>
-            <a:pPr>
-              <a:defRPr sz="3400" b="1">
-                <a:solidFill>
-                  <a:srgbClr val="172533"/>
-                </a:solidFill>
-              </a:defRPr>
-            </a:pPr>
-            <a:r>
-              <a:t>Next Steps for Enhancement</a:t>
-            </a:r>
-          </a:p>
-        </p:txBody>
-      </p:sp>
-      <p:sp>
-        <p:nvSpPr>
-          <p:cNvPr id="5" name="TextBox 4"/>
-          <p:cNvSpPr txBox="1"/>
-          <p:nvPr/>
-        </p:nvSpPr>
-        <p:spPr>
-          <a:xfrm>
-            <a:off x="530352" y="932688"/>
-            <a:ext cx="10881360" cy="320040"/>
-          </a:xfrm>
-          <a:prstGeom prst="rect">
-            <a:avLst/>
-          </a:prstGeom>
-          <a:noFill/>
-        </p:spPr>
-        <p:txBody>
-          <a:bodyPr wrap="none">
-            <a:spAutoFit/>
-          </a:bodyPr>
-          <a:lstStyle/>
-          <a:p>
-            <a:pPr>
-              <a:defRPr sz="1500">
-                <a:solidFill>
-                  <a:srgbClr val="526070"/>
-                </a:solidFill>
-              </a:defRPr>
-            </a:pPr>
-            <a:r>
-              <a:t>Moving VoxCart from capstone prototype to production-ready assistant</a:t>
-            </a:r>
-          </a:p>
-        </p:txBody>
-      </p:sp>
-      <p:sp>
-        <p:nvSpPr>
-          <p:cNvPr id="6" name="Rounded Rectangle 5"/>
-          <p:cNvSpPr/>
-          <p:nvPr/>
-        </p:nvSpPr>
-        <p:spPr>
-          <a:xfrm>
-            <a:off x="640080" y="1508760"/>
-            <a:ext cx="3611880" cy="1143000"/>
-          </a:xfrm>
-          <a:prstGeom prst="roundRect">
-            <a:avLst/>
-          </a:prstGeom>
-          <a:solidFill>
-            <a:srgbClr val="FFFFFF"/>
-          </a:solidFill>
-          <a:ln w="12700">
-            <a:solidFill>
-              <a:srgbClr val="D7DEE6"/>
-            </a:solidFill>
-          </a:ln>
-        </p:spPr>
-        <p:style>
-          <a:lnRef idx="1">
-            <a:schemeClr val="accent1"/>
-          </a:lnRef>
-          <a:fillRef idx="3">
-            <a:schemeClr val="accent1"/>
-          </a:fillRef>
-          <a:effectRef idx="2">
-            <a:schemeClr val="accent1"/>
-          </a:effectRef>
-          <a:fontRef idx="minor">
-            <a:schemeClr val="lt1"/>
-          </a:fontRef>
-        </p:style>
-        <p:txBody>
-          <a:bodyPr rtlCol="0" anchor="ctr" lIns="182880" rIns="128016" tIns="109728" bIns="73152"/>
-          <a:lstStyle/>
-          <a:p>
-            <a:pPr algn="ctr">
-              <a:spcAft>
-                <a:spcPts val="500"/>
-              </a:spcAft>
-              <a:defRPr sz="1400" b="1">
-                <a:solidFill>
-                  <a:srgbClr val="1E2C3A"/>
-                </a:solidFill>
-              </a:defRPr>
-            </a:pPr>
-            <a:r>
-              <a:t>Security &amp; Access</a:t>
-            </a:r>
-          </a:p>
-          <a:p>
-            <a:pPr>
-              <a:lnSpc>
-                <a:spcPct val="110000"/>
-              </a:lnSpc>
-              <a:defRPr sz="1050">
-                <a:solidFill>
-                  <a:srgbClr val="505B68"/>
-                </a:solidFill>
-              </a:defRPr>
-            </a:pPr>
-            <a:r>
-              <a:t>Authenticate users before token minting; restrict CORS; add rate limits.</a:t>
-            </a:r>
-          </a:p>
-        </p:txBody>
-      </p:sp>
-      <p:sp>
-        <p:nvSpPr>
-          <p:cNvPr id="7" name="Rectangle 6"/>
-          <p:cNvSpPr/>
-          <p:nvPr/>
-        </p:nvSpPr>
-        <p:spPr>
-          <a:xfrm>
-            <a:off x="640080" y="1508760"/>
-            <a:ext cx="73152" cy="1143000"/>
-          </a:xfrm>
-          <a:prstGeom prst="rect">
-            <a:avLst/>
-          </a:prstGeom>
-          <a:solidFill>
-            <a:srgbClr val="2A548C"/>
-          </a:solidFill>
-          <a:ln>
-            <a:noFill/>
-          </a:ln>
-        </p:spPr>
-        <p:style>
-          <a:lnRef idx="1">
-            <a:schemeClr val="accent1"/>
-          </a:lnRef>
-          <a:fillRef idx="3">
-            <a:schemeClr val="accent1"/>
-          </a:fillRef>
-          <a:effectRef idx="2">
-            <a:schemeClr val="accent1"/>
-          </a:effectRef>
-          <a:fontRef idx="minor">
-            <a:schemeClr val="lt1"/>
-          </a:fontRef>
-        </p:style>
-        <p:txBody>
-          <a:bodyPr rtlCol="0" anchor="ctr"/>
-          <a:lstStyle/>
-          <a:p>
-            <a:pPr algn="ctr"/>
-          </a:p>
-        </p:txBody>
-      </p:sp>
-      <p:sp>
-        <p:nvSpPr>
-          <p:cNvPr id="8" name="Rounded Rectangle 7"/>
-          <p:cNvSpPr/>
-          <p:nvPr/>
-        </p:nvSpPr>
-        <p:spPr>
-          <a:xfrm>
-            <a:off x="4526280" y="1508760"/>
-            <a:ext cx="3611880" cy="1143000"/>
-          </a:xfrm>
-          <a:prstGeom prst="roundRect">
-            <a:avLst/>
-          </a:prstGeom>
-          <a:solidFill>
-            <a:srgbClr val="FFFFFF"/>
-          </a:solidFill>
-          <a:ln w="12700">
-            <a:solidFill>
-              <a:srgbClr val="D7DEE6"/>
-            </a:solidFill>
-          </a:ln>
-        </p:spPr>
-        <p:style>
-          <a:lnRef idx="1">
-            <a:schemeClr val="accent1"/>
-          </a:lnRef>
-          <a:fillRef idx="3">
-            <a:schemeClr val="accent1"/>
-          </a:fillRef>
-          <a:effectRef idx="2">
-            <a:schemeClr val="accent1"/>
-          </a:effectRef>
-          <a:fontRef idx="minor">
-            <a:schemeClr val="lt1"/>
-          </a:fontRef>
-        </p:style>
-        <p:txBody>
-          <a:bodyPr rtlCol="0" anchor="ctr" lIns="182880" rIns="128016" tIns="109728" bIns="73152"/>
-          <a:lstStyle/>
-          <a:p>
-            <a:pPr algn="ctr">
-              <a:spcAft>
-                <a:spcPts val="500"/>
-              </a:spcAft>
-              <a:defRPr sz="1400" b="1">
-                <a:solidFill>
-                  <a:srgbClr val="1E2C3A"/>
-                </a:solidFill>
-              </a:defRPr>
-            </a:pPr>
-            <a:r>
-              <a:t>Order Ownership</a:t>
-            </a:r>
-          </a:p>
-          <a:p>
-            <a:pPr>
-              <a:lnSpc>
-                <a:spcPct val="110000"/>
-              </a:lnSpc>
-              <a:defRPr sz="1050">
-                <a:solidFill>
-                  <a:srgbClr val="505B68"/>
-                </a:solidFill>
-              </a:defRPr>
-            </a:pPr>
-            <a:r>
-              <a:t>Verify that a user can access only their own orders before returning status.</a:t>
-            </a:r>
-          </a:p>
-        </p:txBody>
-      </p:sp>
-      <p:sp>
-        <p:nvSpPr>
-          <p:cNvPr id="9" name="Rectangle 8"/>
-          <p:cNvSpPr/>
-          <p:nvPr/>
-        </p:nvSpPr>
-        <p:spPr>
-          <a:xfrm>
-            <a:off x="4526280" y="1508760"/>
-            <a:ext cx="73152" cy="1143000"/>
-          </a:xfrm>
-          <a:prstGeom prst="rect">
-            <a:avLst/>
-          </a:prstGeom>
-          <a:solidFill>
-            <a:srgbClr val="1C7A68"/>
-          </a:solidFill>
-          <a:ln>
-            <a:noFill/>
-          </a:ln>
-        </p:spPr>
-        <p:style>
-          <a:lnRef idx="1">
-            <a:schemeClr val="accent1"/>
-          </a:lnRef>
-          <a:fillRef idx="3">
-            <a:schemeClr val="accent1"/>
-          </a:fillRef>
-          <a:effectRef idx="2">
-            <a:schemeClr val="accent1"/>
-          </a:effectRef>
-          <a:fontRef idx="minor">
-            <a:schemeClr val="lt1"/>
-          </a:fontRef>
-        </p:style>
-        <p:txBody>
-          <a:bodyPr rtlCol="0" anchor="ctr"/>
-          <a:lstStyle/>
-          <a:p>
-            <a:pPr algn="ctr"/>
-          </a:p>
-        </p:txBody>
-      </p:sp>
-      <p:sp>
-        <p:nvSpPr>
-          <p:cNvPr id="10" name="Rounded Rectangle 9"/>
-          <p:cNvSpPr/>
-          <p:nvPr/>
-        </p:nvSpPr>
-        <p:spPr>
-          <a:xfrm>
-            <a:off x="8412480" y="1508760"/>
-            <a:ext cx="3611880" cy="1143000"/>
-          </a:xfrm>
-          <a:prstGeom prst="roundRect">
-            <a:avLst/>
-          </a:prstGeom>
-          <a:solidFill>
-            <a:srgbClr val="FFFFFF"/>
-          </a:solidFill>
-          <a:ln w="12700">
-            <a:solidFill>
-              <a:srgbClr val="D7DEE6"/>
-            </a:solidFill>
-          </a:ln>
-        </p:spPr>
-        <p:style>
-          <a:lnRef idx="1">
-            <a:schemeClr val="accent1"/>
-          </a:lnRef>
-          <a:fillRef idx="3">
-            <a:schemeClr val="accent1"/>
-          </a:fillRef>
-          <a:effectRef idx="2">
-            <a:schemeClr val="accent1"/>
-          </a:effectRef>
-          <a:fontRef idx="minor">
-            <a:schemeClr val="lt1"/>
-          </a:fontRef>
-        </p:style>
-        <p:txBody>
-          <a:bodyPr rtlCol="0" anchor="ctr" lIns="182880" rIns="128016" tIns="109728" bIns="73152"/>
-          <a:lstStyle/>
-          <a:p>
-            <a:pPr algn="ctr">
-              <a:spcAft>
-                <a:spcPts val="500"/>
-              </a:spcAft>
-              <a:defRPr sz="1400" b="1">
-                <a:solidFill>
-                  <a:srgbClr val="1E2C3A"/>
-                </a:solidFill>
-              </a:defRPr>
-            </a:pPr>
-            <a:r>
-              <a:t>Safety Guardrails</a:t>
-            </a:r>
-          </a:p>
-          <a:p>
-            <a:pPr>
-              <a:lnSpc>
-                <a:spcPct val="110000"/>
-              </a:lnSpc>
-              <a:defRPr sz="1050">
-                <a:solidFill>
-                  <a:srgbClr val="505B68"/>
-                </a:solidFill>
-              </a:defRPr>
-            </a:pPr>
-            <a:r>
-              <a:t>Add moderation, prompt-injection checks, and response validation.</a:t>
-            </a:r>
-          </a:p>
-        </p:txBody>
-      </p:sp>
-      <p:sp>
-        <p:nvSpPr>
-          <p:cNvPr id="11" name="Rectangle 10"/>
-          <p:cNvSpPr/>
-          <p:nvPr/>
-        </p:nvSpPr>
-        <p:spPr>
-          <a:xfrm>
-            <a:off x="8412480" y="1508760"/>
-            <a:ext cx="73152" cy="1143000"/>
-          </a:xfrm>
-          <a:prstGeom prst="rect">
-            <a:avLst/>
-          </a:prstGeom>
-          <a:solidFill>
-            <a:srgbClr val="955029"/>
-          </a:solidFill>
-          <a:ln>
-            <a:noFill/>
-          </a:ln>
-        </p:spPr>
-        <p:style>
-          <a:lnRef idx="1">
-            <a:schemeClr val="accent1"/>
-          </a:lnRef>
-          <a:fillRef idx="3">
-            <a:schemeClr val="accent1"/>
-          </a:fillRef>
-          <a:effectRef idx="2">
-            <a:schemeClr val="accent1"/>
-          </a:effectRef>
-          <a:fontRef idx="minor">
-            <a:schemeClr val="lt1"/>
-          </a:fontRef>
-        </p:style>
-        <p:txBody>
-          <a:bodyPr rtlCol="0" anchor="ctr"/>
-          <a:lstStyle/>
-          <a:p>
-            <a:pPr algn="ctr"/>
-          </a:p>
-        </p:txBody>
-      </p:sp>
-      <p:sp>
-        <p:nvSpPr>
-          <p:cNvPr id="12" name="Rounded Rectangle 11"/>
-          <p:cNvSpPr/>
-          <p:nvPr/>
-        </p:nvSpPr>
-        <p:spPr>
-          <a:xfrm>
-            <a:off x="640080" y="2944368"/>
-            <a:ext cx="3611880" cy="1143000"/>
-          </a:xfrm>
-          <a:prstGeom prst="roundRect">
-            <a:avLst/>
-          </a:prstGeom>
-          <a:solidFill>
-            <a:srgbClr val="FFFFFF"/>
-          </a:solidFill>
-          <a:ln w="12700">
-            <a:solidFill>
-              <a:srgbClr val="D7DEE6"/>
-            </a:solidFill>
-          </a:ln>
-        </p:spPr>
-        <p:style>
-          <a:lnRef idx="1">
-            <a:schemeClr val="accent1"/>
-          </a:lnRef>
-          <a:fillRef idx="3">
-            <a:schemeClr val="accent1"/>
-          </a:fillRef>
-          <a:effectRef idx="2">
-            <a:schemeClr val="accent1"/>
-          </a:effectRef>
-          <a:fontRef idx="minor">
-            <a:schemeClr val="lt1"/>
-          </a:fontRef>
-        </p:style>
-        <p:txBody>
-          <a:bodyPr rtlCol="0" anchor="ctr" lIns="182880" rIns="128016" tIns="109728" bIns="73152"/>
-          <a:lstStyle/>
-          <a:p>
-            <a:pPr algn="ctr">
-              <a:spcAft>
-                <a:spcPts val="500"/>
-              </a:spcAft>
-              <a:defRPr sz="1400" b="1">
-                <a:solidFill>
-                  <a:srgbClr val="1E2C3A"/>
-                </a:solidFill>
-              </a:defRPr>
-            </a:pPr>
-            <a:r>
-              <a:t>Real Backend</a:t>
-            </a:r>
-          </a:p>
-          <a:p>
-            <a:pPr>
-              <a:lnSpc>
-                <a:spcPct val="110000"/>
-              </a:lnSpc>
-              <a:defRPr sz="1050">
-                <a:solidFill>
-                  <a:srgbClr val="505B68"/>
-                </a:solidFill>
-              </a:defRPr>
-            </a:pPr>
-            <a:r>
-              <a:t>Replace mock data with live catalogue, order, return, and payment APIs.</a:t>
-            </a:r>
-          </a:p>
-        </p:txBody>
-      </p:sp>
-      <p:sp>
-        <p:nvSpPr>
-          <p:cNvPr id="13" name="Rectangle 12"/>
-          <p:cNvSpPr/>
-          <p:nvPr/>
-        </p:nvSpPr>
-        <p:spPr>
-          <a:xfrm>
-            <a:off x="640080" y="2944368"/>
-            <a:ext cx="73152" cy="1143000"/>
-          </a:xfrm>
-          <a:prstGeom prst="rect">
-            <a:avLst/>
-          </a:prstGeom>
-          <a:solidFill>
-            <a:srgbClr val="6958A6"/>
-          </a:solidFill>
-          <a:ln>
-            <a:noFill/>
-          </a:ln>
-        </p:spPr>
-        <p:style>
-          <a:lnRef idx="1">
-            <a:schemeClr val="accent1"/>
-          </a:lnRef>
-          <a:fillRef idx="3">
-            <a:schemeClr val="accent1"/>
-          </a:fillRef>
-          <a:effectRef idx="2">
-            <a:schemeClr val="accent1"/>
-          </a:effectRef>
-          <a:fontRef idx="minor">
-            <a:schemeClr val="lt1"/>
-          </a:fontRef>
-        </p:style>
-        <p:txBody>
-          <a:bodyPr rtlCol="0" anchor="ctr"/>
-          <a:lstStyle/>
-          <a:p>
-            <a:pPr algn="ctr"/>
-          </a:p>
-        </p:txBody>
-      </p:sp>
-      <p:sp>
-        <p:nvSpPr>
-          <p:cNvPr id="14" name="Rounded Rectangle 13"/>
-          <p:cNvSpPr/>
-          <p:nvPr/>
-        </p:nvSpPr>
-        <p:spPr>
-          <a:xfrm>
-            <a:off x="4526280" y="2944368"/>
-            <a:ext cx="3611880" cy="1143000"/>
-          </a:xfrm>
-          <a:prstGeom prst="roundRect">
-            <a:avLst/>
-          </a:prstGeom>
-          <a:solidFill>
-            <a:srgbClr val="FFFFFF"/>
-          </a:solidFill>
-          <a:ln w="12700">
-            <a:solidFill>
-              <a:srgbClr val="D7DEE6"/>
-            </a:solidFill>
-          </a:ln>
-        </p:spPr>
-        <p:style>
-          <a:lnRef idx="1">
-            <a:schemeClr val="accent1"/>
-          </a:lnRef>
-          <a:fillRef idx="3">
-            <a:schemeClr val="accent1"/>
-          </a:fillRef>
-          <a:effectRef idx="2">
-            <a:schemeClr val="accent1"/>
-          </a:effectRef>
-          <a:fontRef idx="minor">
-            <a:schemeClr val="lt1"/>
-          </a:fontRef>
-        </p:style>
-        <p:txBody>
-          <a:bodyPr rtlCol="0" anchor="ctr" lIns="182880" rIns="128016" tIns="109728" bIns="73152"/>
-          <a:lstStyle/>
-          <a:p>
-            <a:pPr algn="ctr">
-              <a:spcAft>
-                <a:spcPts val="500"/>
-              </a:spcAft>
-              <a:defRPr sz="1400" b="1">
-                <a:solidFill>
-                  <a:srgbClr val="1E2C3A"/>
-                </a:solidFill>
-              </a:defRPr>
-            </a:pPr>
-            <a:r>
-              <a:t>Quality Metrics</a:t>
-            </a:r>
-          </a:p>
-          <a:p>
-            <a:pPr>
-              <a:lnSpc>
-                <a:spcPct val="110000"/>
-              </a:lnSpc>
-              <a:defRPr sz="1050">
-                <a:solidFill>
-                  <a:srgbClr val="505B68"/>
-                </a:solidFill>
-              </a:defRPr>
-            </a:pPr>
-            <a:r>
-              <a:t>Track latency, tool accuracy, fallback rate, and task completion.</a:t>
-            </a:r>
-          </a:p>
-        </p:txBody>
-      </p:sp>
-      <p:sp>
-        <p:nvSpPr>
-          <p:cNvPr id="15" name="Rectangle 14"/>
-          <p:cNvSpPr/>
-          <p:nvPr/>
-        </p:nvSpPr>
-        <p:spPr>
-          <a:xfrm>
-            <a:off x="4526280" y="2944368"/>
-            <a:ext cx="73152" cy="1143000"/>
-          </a:xfrm>
-          <a:prstGeom prst="rect">
-            <a:avLst/>
-          </a:prstGeom>
-          <a:solidFill>
-            <a:srgbClr val="A13946"/>
-          </a:solidFill>
-          <a:ln>
-            <a:noFill/>
-          </a:ln>
-        </p:spPr>
-        <p:style>
-          <a:lnRef idx="1">
-            <a:schemeClr val="accent1"/>
-          </a:lnRef>
-          <a:fillRef idx="3">
-            <a:schemeClr val="accent1"/>
-          </a:fillRef>
-          <a:effectRef idx="2">
-            <a:schemeClr val="accent1"/>
-          </a:effectRef>
-          <a:fontRef idx="minor">
-            <a:schemeClr val="lt1"/>
-          </a:fontRef>
-        </p:style>
-        <p:txBody>
-          <a:bodyPr rtlCol="0" anchor="ctr"/>
-          <a:lstStyle/>
-          <a:p>
-            <a:pPr algn="ctr"/>
-          </a:p>
-        </p:txBody>
-      </p:sp>
-      <p:sp>
-        <p:nvSpPr>
-          <p:cNvPr id="16" name="Rounded Rectangle 15"/>
-          <p:cNvSpPr/>
-          <p:nvPr/>
-        </p:nvSpPr>
-        <p:spPr>
-          <a:xfrm>
-            <a:off x="8412480" y="2944368"/>
-            <a:ext cx="3611880" cy="1143000"/>
-          </a:xfrm>
-          <a:prstGeom prst="roundRect">
-            <a:avLst/>
-          </a:prstGeom>
-          <a:solidFill>
-            <a:srgbClr val="FFFFFF"/>
-          </a:solidFill>
-          <a:ln w="12700">
-            <a:solidFill>
-              <a:srgbClr val="D7DEE6"/>
-            </a:solidFill>
-          </a:ln>
-        </p:spPr>
-        <p:style>
-          <a:lnRef idx="1">
-            <a:schemeClr val="accent1"/>
-          </a:lnRef>
-          <a:fillRef idx="3">
-            <a:schemeClr val="accent1"/>
-          </a:fillRef>
-          <a:effectRef idx="2">
-            <a:schemeClr val="accent1"/>
-          </a:effectRef>
-          <a:fontRef idx="minor">
-            <a:schemeClr val="lt1"/>
-          </a:fontRef>
-        </p:style>
-        <p:txBody>
-          <a:bodyPr rtlCol="0" anchor="ctr" lIns="182880" rIns="128016" tIns="109728" bIns="73152"/>
-          <a:lstStyle/>
-          <a:p>
-            <a:pPr algn="ctr">
-              <a:spcAft>
-                <a:spcPts val="500"/>
-              </a:spcAft>
-              <a:defRPr sz="1400" b="1">
-                <a:solidFill>
-                  <a:srgbClr val="1E2C3A"/>
-                </a:solidFill>
-              </a:defRPr>
-            </a:pPr>
-            <a:r>
-              <a:t>Multilingual Scale</a:t>
-            </a:r>
-          </a:p>
-          <a:p>
-            <a:pPr>
-              <a:lnSpc>
-                <a:spcPct val="110000"/>
-              </a:lnSpc>
-              <a:defRPr sz="1050">
-                <a:solidFill>
-                  <a:srgbClr val="505B68"/>
-                </a:solidFill>
-              </a:defRPr>
-            </a:pPr>
-            <a:r>
-              <a:t>Validate STT/TTS quality across languages, accents, and noisy settings.</a:t>
-            </a:r>
-          </a:p>
-        </p:txBody>
-      </p:sp>
-      <p:sp>
-        <p:nvSpPr>
-          <p:cNvPr id="17" name="Rectangle 16"/>
-          <p:cNvSpPr/>
-          <p:nvPr/>
-        </p:nvSpPr>
-        <p:spPr>
-          <a:xfrm>
-            <a:off x="8412480" y="2944368"/>
-            <a:ext cx="73152" cy="1143000"/>
-          </a:xfrm>
-          <a:prstGeom prst="rect">
-            <a:avLst/>
-          </a:prstGeom>
-          <a:solidFill>
-            <a:srgbClr val="4D6836"/>
-          </a:solidFill>
-          <a:ln>
-            <a:noFill/>
-          </a:ln>
-        </p:spPr>
-        <p:style>
-          <a:lnRef idx="1">
-            <a:schemeClr val="accent1"/>
-          </a:lnRef>
-          <a:fillRef idx="3">
-            <a:schemeClr val="accent1"/>
-          </a:fillRef>
-          <a:effectRef idx="2">
-            <a:schemeClr val="accent1"/>
-          </a:effectRef>
-          <a:fontRef idx="minor">
-            <a:schemeClr val="lt1"/>
-          </a:fontRef>
-        </p:style>
-        <p:txBody>
-          <a:bodyPr rtlCol="0" anchor="ctr"/>
-          <a:lstStyle/>
-          <a:p>
-            <a:pPr algn="ctr"/>
-          </a:p>
-        </p:txBody>
-      </p:sp>
-      <p:sp>
-        <p:nvSpPr>
-          <p:cNvPr id="18" name="TextBox 17"/>
-          <p:cNvSpPr txBox="1"/>
-          <p:nvPr/>
-        </p:nvSpPr>
-        <p:spPr>
-          <a:xfrm>
-            <a:off x="594360" y="6172200"/>
-            <a:ext cx="10972800" cy="320040"/>
-          </a:xfrm>
-          <a:prstGeom prst="rect">
-            <a:avLst/>
-          </a:prstGeom>
-          <a:noFill/>
-        </p:spPr>
-        <p:txBody>
-          <a:bodyPr wrap="none">
-            <a:spAutoFit/>
-          </a:bodyPr>
-          <a:lstStyle/>
-          <a:p>
-            <a:pPr algn="ctr">
-              <a:defRPr sz="1300">
-                <a:solidFill>
-                  <a:srgbClr val="4A5562"/>
-                </a:solidFill>
-              </a:defRPr>
-            </a:pPr>
-            <a:r>
-              <a:t>Immediate demo readiness: run healthcheck, verify microphone permissions, and rehearse the three required voice scenarios.</a:t>
-            </a:r>
           </a:p>
         </p:txBody>
       </p:sp>
@@ -8276,6 +7638,173 @@
         <p:nvPr/>
       </p:nvGrpSpPr>
       <p:grpSpPr/>
+      <p:sp>
+        <p:nvSpPr>
+          <p:cNvPr id="5" name="Title 4"/>
+          <p:cNvSpPr>
+            <a:spLocks noGrp="1"/>
+          </p:cNvSpPr>
+          <p:nvPr>
+            <p:ph type="title"/>
+          </p:nvPr>
+        </p:nvSpPr>
+        <p:spPr>
+          <a:xfrm>
+            <a:off x="635" y="2049780"/>
+            <a:ext cx="4092575" cy="2562225"/>
+          </a:xfrm>
+        </p:spPr>
+        <p:txBody>
+          <a:bodyPr/>
+          <a:p>
+            <a:r>
+              <a:rPr lang="en-US" altLang="en-US"/>
+              <a:t>Demo</a:t>
+            </a:r>
+            <a:br>
+              <a:rPr lang="en-US" altLang="en-US"/>
+            </a:br>
+            <a:endParaRPr lang="en-US" altLang="en-US"/>
+          </a:p>
+        </p:txBody>
+      </p:sp>
+      <p:sp>
+        <p:nvSpPr>
+          <p:cNvPr id="2" name="Content Placeholder 1"/>
+          <p:cNvSpPr/>
+          <p:nvPr>
+            <p:ph idx="1"/>
+          </p:nvPr>
+        </p:nvSpPr>
+        <p:spPr>
+          <a:xfrm>
+            <a:off x="4455160" y="136525"/>
+            <a:ext cx="7627620" cy="5877560"/>
+          </a:xfrm>
+        </p:spPr>
+        <p:txBody>
+          <a:bodyPr>
+            <a:normAutofit/>
+          </a:bodyPr>
+          <a:p>
+            <a:r>
+              <a:rPr lang="en-US" altLang="en-US" sz="1800"/>
+              <a:t>Scenario 1:</a:t>
+            </a:r>
+            <a:endParaRPr lang="en-US" altLang="en-US" sz="1800"/>
+          </a:p>
+          <a:p>
+            <a:pPr marL="0" indent="0">
+              <a:buNone/>
+            </a:pPr>
+            <a:r>
+              <a:rPr lang="en-US" altLang="en-US" sz="1800">
+                <a:sym typeface="+mn-ea"/>
+              </a:rPr>
+              <a:t>”</a:t>
+            </a:r>
+            <a:r>
+              <a:rPr lang="en-US" altLang="en-US" sz="1800"/>
+              <a:t> Hi, what's the status of my order ORD-1003?"</a:t>
+            </a:r>
+            <a:endParaRPr lang="en-US" altLang="en-US" sz="1800"/>
+          </a:p>
+          <a:p>
+            <a:pPr marL="0" indent="0">
+              <a:buNone/>
+            </a:pPr>
+            <a:r>
+              <a:rPr lang="en-US" altLang="en-US" sz="1800"/>
+              <a:t>→ Aria calls get_order_status, returns: "Your order for [items] has been shipped. Expected delivery by [date]. Tracking number: [0RD- 1003]."</a:t>
+            </a:r>
+            <a:endParaRPr lang="en-US" altLang="en-US" sz="1800"/>
+          </a:p>
+          <a:p>
+            <a:endParaRPr lang="en-US" altLang="en-US" sz="1800"/>
+          </a:p>
+          <a:p>
+            <a:r>
+              <a:rPr lang="en-US" altLang="en-US" sz="1800"/>
+              <a:t>Scenario 2:</a:t>
+            </a:r>
+            <a:endParaRPr lang="en-US" altLang="en-US" sz="1800"/>
+          </a:p>
+          <a:p>
+            <a:pPr marL="0" indent="0">
+              <a:buNone/>
+            </a:pPr>
+            <a:r>
+              <a:rPr lang="en-US" altLang="en-US" sz="1800"/>
+              <a:t>"Do you have Sony headphones? What's the price?"</a:t>
+            </a:r>
+            <a:endParaRPr lang="en-US" altLang="en-US" sz="1800"/>
+          </a:p>
+          <a:p>
+            <a:pPr marL="0" indent="0">
+              <a:buNone/>
+            </a:pPr>
+            <a:r>
+              <a:rPr lang="en-US" altLang="en-US" sz="1800"/>
+              <a:t>→ Aria calls lookup_product, returns price, rating, stock status, top 3 features.</a:t>
+            </a:r>
+            <a:endParaRPr lang="en-US" altLang="en-US" sz="1800"/>
+          </a:p>
+          <a:p>
+            <a:pPr marL="0" indent="0">
+              <a:buNone/>
+            </a:pPr>
+            <a:endParaRPr lang="en-US" altLang="en-US" sz="1800"/>
+          </a:p>
+          <a:p>
+            <a:pPr marL="0" indent="0">
+              <a:buNone/>
+            </a:pPr>
+            <a:r>
+              <a:rPr lang="en-US" altLang="en-US" sz="1800"/>
+              <a:t>Scenario 3:</a:t>
+            </a:r>
+            <a:endParaRPr lang="en-US" altLang="en-US" sz="1800"/>
+          </a:p>
+          <a:p>
+            <a:pPr marL="0" indent="0">
+              <a:buNone/>
+            </a:pPr>
+            <a:r>
+              <a:rPr lang="en-US" altLang="en-US" sz="1800"/>
+              <a:t>"I want to return a jacket I bought last week."</a:t>
+            </a:r>
+            <a:endParaRPr lang="en-US" altLang="en-US" sz="1800"/>
+          </a:p>
+          <a:p>
+            <a:pPr marL="0" indent="0">
+              <a:buNone/>
+            </a:pPr>
+            <a:r>
+              <a:rPr lang="en-US" altLang="en-US" sz="1800"/>
+              <a:t>→ Aria calls get_returns_policy, returns the Clothing return window (30 days) and steps to initiate.</a:t>
+            </a:r>
+            <a:endParaRPr lang="en-US" altLang="en-US" sz="1800"/>
+          </a:p>
+        </p:txBody>
+      </p:sp>
+    </p:spTree>
+  </p:cSld>
+  <p:clrMapOvr>
+    <a:masterClrMapping/>
+  </p:clrMapOvr>
+</p:sld>
+</file>
+
+<file path=ppt/slides/slide9.xml><?xml version="1.0" encoding="utf-8"?>
+<p:sld xmlns:a="http://schemas.openxmlformats.org/drawingml/2006/main" xmlns:r="http://schemas.openxmlformats.org/officeDocument/2006/relationships" xmlns:p="http://schemas.openxmlformats.org/presentationml/2006/main">
+  <p:cSld>
+    <p:spTree>
+      <p:nvGrpSpPr>
+        <p:cNvPr id="1" name=""/>
+        <p:cNvGrpSpPr/>
+        <p:nvPr/>
+      </p:nvGrpSpPr>
+      <p:grpSpPr/>
       <p:graphicFrame>
         <p:nvGraphicFramePr>
           <p:cNvPr id="6" name="Content Placeholder 5"/>
@@ -8627,173 +8156,6 @@
               <a:t>Challenges &amp; Solutions</a:t>
             </a:r>
             <a:endParaRPr lang="en-US" altLang="en-US"/>
-          </a:p>
-        </p:txBody>
-      </p:sp>
-    </p:spTree>
-  </p:cSld>
-  <p:clrMapOvr>
-    <a:masterClrMapping/>
-  </p:clrMapOvr>
-</p:sld>
-</file>
-
-<file path=ppt/slides/slide9.xml><?xml version="1.0" encoding="utf-8"?>
-<p:sld xmlns:a="http://schemas.openxmlformats.org/drawingml/2006/main" xmlns:r="http://schemas.openxmlformats.org/officeDocument/2006/relationships" xmlns:p="http://schemas.openxmlformats.org/presentationml/2006/main">
-  <p:cSld>
-    <p:spTree>
-      <p:nvGrpSpPr>
-        <p:cNvPr id="1" name=""/>
-        <p:cNvGrpSpPr/>
-        <p:nvPr/>
-      </p:nvGrpSpPr>
-      <p:grpSpPr/>
-      <p:sp>
-        <p:nvSpPr>
-          <p:cNvPr id="5" name="Title 4"/>
-          <p:cNvSpPr>
-            <a:spLocks noGrp="1"/>
-          </p:cNvSpPr>
-          <p:nvPr>
-            <p:ph type="title"/>
-          </p:nvPr>
-        </p:nvSpPr>
-        <p:spPr>
-          <a:xfrm>
-            <a:off x="635" y="2049780"/>
-            <a:ext cx="4092575" cy="2562225"/>
-          </a:xfrm>
-        </p:spPr>
-        <p:txBody>
-          <a:bodyPr/>
-          <a:p>
-            <a:r>
-              <a:rPr lang="en-US" altLang="en-US"/>
-              <a:t>Demo</a:t>
-            </a:r>
-            <a:br>
-              <a:rPr lang="en-US" altLang="en-US"/>
-            </a:br>
-            <a:endParaRPr lang="en-US" altLang="en-US"/>
-          </a:p>
-        </p:txBody>
-      </p:sp>
-      <p:sp>
-        <p:nvSpPr>
-          <p:cNvPr id="2" name="Content Placeholder 1"/>
-          <p:cNvSpPr/>
-          <p:nvPr>
-            <p:ph idx="1"/>
-          </p:nvPr>
-        </p:nvSpPr>
-        <p:spPr>
-          <a:xfrm>
-            <a:off x="4455160" y="136525"/>
-            <a:ext cx="7627620" cy="5877560"/>
-          </a:xfrm>
-        </p:spPr>
-        <p:txBody>
-          <a:bodyPr>
-            <a:normAutofit/>
-          </a:bodyPr>
-          <a:p>
-            <a:r>
-              <a:rPr lang="en-US" altLang="en-US" sz="1800"/>
-              <a:t>Scenario 1:</a:t>
-            </a:r>
-            <a:endParaRPr lang="en-US" altLang="en-US" sz="1800"/>
-          </a:p>
-          <a:p>
-            <a:pPr marL="0" indent="0">
-              <a:buNone/>
-            </a:pPr>
-            <a:r>
-              <a:rPr lang="en-US" altLang="en-US" sz="1800">
-                <a:sym typeface="+mn-ea"/>
-              </a:rPr>
-              <a:t>”</a:t>
-            </a:r>
-            <a:r>
-              <a:rPr lang="en-US" altLang="en-US" sz="1800"/>
-              <a:t> Hi, what's the status of my order ORD-1003?"</a:t>
-            </a:r>
-            <a:endParaRPr lang="en-US" altLang="en-US" sz="1800"/>
-          </a:p>
-          <a:p>
-            <a:pPr marL="0" indent="0">
-              <a:buNone/>
-            </a:pPr>
-            <a:r>
-              <a:rPr lang="en-US" altLang="en-US" sz="1800"/>
-              <a:t>→ Aria calls get_order_status, returns: "Your order for [items] has been shipped. Expected delivery by [date]. Tracking number: [TRK-xxx]."</a:t>
-            </a:r>
-            <a:endParaRPr lang="en-US" altLang="en-US" sz="1800"/>
-          </a:p>
-          <a:p>
-            <a:endParaRPr lang="en-US" altLang="en-US" sz="1800"/>
-          </a:p>
-          <a:p>
-            <a:r>
-              <a:rPr lang="en-US" altLang="en-US" sz="1800"/>
-              <a:t>Scenario 2:</a:t>
-            </a:r>
-            <a:endParaRPr lang="en-US" altLang="en-US" sz="1800"/>
-          </a:p>
-          <a:p>
-            <a:pPr marL="0" indent="0">
-              <a:buNone/>
-            </a:pPr>
-            <a:r>
-              <a:rPr lang="en-US" altLang="en-US" sz="1800"/>
-              <a:t>"Do you have Sony headphones? What's the price?"</a:t>
-            </a:r>
-            <a:endParaRPr lang="en-US" altLang="en-US" sz="1800"/>
-          </a:p>
-          <a:p>
-            <a:pPr marL="0" indent="0">
-              <a:buNone/>
-            </a:pPr>
-            <a:r>
-              <a:rPr lang="en-US" altLang="en-US" sz="1800"/>
-              <a:t>→ Aria calls lookup_product, returns price, rating, stock status, top 3 features.</a:t>
-            </a:r>
-            <a:endParaRPr lang="en-US" altLang="en-US" sz="1800"/>
-          </a:p>
-          <a:p>
-            <a:pPr marL="0" indent="0">
-              <a:buNone/>
-            </a:pPr>
-            <a:endParaRPr lang="en-US" altLang="en-US" sz="1800"/>
-          </a:p>
-          <a:p>
-            <a:pPr marL="0" indent="0">
-              <a:buNone/>
-            </a:pPr>
-            <a:r>
-              <a:rPr lang="en-US" altLang="en-US" sz="1800"/>
-              <a:t>Scenario 3:</a:t>
-            </a:r>
-            <a:endParaRPr lang="en-US" altLang="en-US" sz="1800"/>
-          </a:p>
-          <a:p>
-            <a:pPr marL="0" indent="0">
-              <a:buNone/>
-            </a:pPr>
-            <a:r>
-              <a:rPr lang="en-US" altLang="en-US" sz="1800"/>
-              <a:t>"I want to return a jacket I bought last week."</a:t>
-            </a:r>
-            <a:endParaRPr lang="en-US" altLang="en-US" sz="1800"/>
-          </a:p>
-          <a:p>
-            <a:pPr marL="0" indent="0">
-              <a:buNone/>
-            </a:pPr>
-            <a:r>
-              <a:rPr lang="en-US" altLang="en-US" sz="1800"/>
-              <a:t>→ Aria calls get_returns_policy, returns the Clothing return window (30 days) and steps to initiate.</a:t>
-            </a:r>
-            <a:endParaRPr lang="en-US" altLang="en-US" sz="1800"/>
           </a:p>
         </p:txBody>
       </p:sp>
